--- a/figures/ADNIModelandError.pptx
+++ b/figures/ADNIModelandError.pptx
@@ -5,7 +5,7 @@
     <p:sldMasterId id="2147483648" r:id="rId1"/>
   </p:sldMasterIdLst>
   <p:sldIdLst>
-    <p:sldId id="256" r:id="rId2"/>
+    <p:sldId id="256" r:id="rId6"/>
   </p:sldIdLst>
   <p:sldSz cx="10698163" cy="7562850"/>
   <p:notesSz cx="6858000" cy="9144000"/>
@@ -104,22 +104,6 @@
       </a:defRPr>
     </a:lvl9pPr>
   </p:defaultTextStyle>
-  <p:extLst>
-    <p:ext uri="{EFAFB233-063F-42B5-8137-9DF3F51BA10A}">
-      <p15:sldGuideLst xmlns:p15="http://schemas.microsoft.com/office/powerpoint/2012/main">
-        <p15:guide id="1" orient="horz" pos="2382">
-          <p15:clr>
-            <a:srgbClr val="A4A3A4"/>
-          </p15:clr>
-        </p15:guide>
-        <p15:guide id="2" pos="3370">
-          <p15:clr>
-            <a:srgbClr val="A4A3A4"/>
-          </p15:clr>
-        </p15:guide>
-      </p15:sldGuideLst>
-    </p:ext>
-  </p:extLst>
 </p:presentation>
 </file>
 
@@ -161,7 +145,7 @@
           <a:lstStyle/>
           <a:p>
             <a:r>
-              <a:rPr lang="en-US"/>
+              <a:rPr lang="en-US" smtClean="0"/>
               <a:t>Click to edit Master title style</a:t>
             </a:r>
             <a:endParaRPr lang="en-GB"/>
@@ -280,7 +264,7 @@
           </a:lstStyle>
           <a:p>
             <a:r>
-              <a:rPr lang="en-US"/>
+              <a:rPr lang="en-US" smtClean="0"/>
               <a:t>Click to edit Master subtitle style</a:t>
             </a:r>
             <a:endParaRPr lang="en-GB"/>
@@ -304,7 +288,7 @@
           <a:p>
             <a:fld id="{6BA5D40C-A8DC-479A-A5D3-E7B4936A184B}" type="datetimeFigureOut">
               <a:rPr lang="en-GB" smtClean="0"/>
-              <a:t>13/05/2026</a:t>
+              <a:t>15/07/2015</a:t>
             </a:fld>
             <a:endParaRPr lang="en-GB"/>
           </a:p>
@@ -398,7 +382,7 @@
           <a:lstStyle/>
           <a:p>
             <a:r>
-              <a:rPr lang="en-US"/>
+              <a:rPr lang="en-US" smtClean="0"/>
               <a:t>Click to edit Master title style</a:t>
             </a:r>
             <a:endParaRPr lang="en-GB"/>
@@ -422,35 +406,35 @@
           <a:p>
             <a:pPr lvl="0"/>
             <a:r>
-              <a:rPr lang="en-US"/>
+              <a:rPr lang="en-US" smtClean="0"/>
               <a:t>Click to edit Master text styles</a:t>
             </a:r>
           </a:p>
           <a:p>
             <a:pPr lvl="1"/>
             <a:r>
-              <a:rPr lang="en-US"/>
+              <a:rPr lang="en-US" smtClean="0"/>
               <a:t>Second level</a:t>
             </a:r>
           </a:p>
           <a:p>
             <a:pPr lvl="2"/>
             <a:r>
-              <a:rPr lang="en-US"/>
+              <a:rPr lang="en-US" smtClean="0"/>
               <a:t>Third level</a:t>
             </a:r>
           </a:p>
           <a:p>
             <a:pPr lvl="3"/>
             <a:r>
-              <a:rPr lang="en-US"/>
+              <a:rPr lang="en-US" smtClean="0"/>
               <a:t>Fourth level</a:t>
             </a:r>
           </a:p>
           <a:p>
             <a:pPr lvl="4"/>
             <a:r>
-              <a:rPr lang="en-US"/>
+              <a:rPr lang="en-US" smtClean="0"/>
               <a:t>Fifth level</a:t>
             </a:r>
             <a:endParaRPr lang="en-GB"/>
@@ -474,7 +458,7 @@
           <a:p>
             <a:fld id="{6BA5D40C-A8DC-479A-A5D3-E7B4936A184B}" type="datetimeFigureOut">
               <a:rPr lang="en-GB" smtClean="0"/>
-              <a:t>13/05/2026</a:t>
+              <a:t>15/07/2015</a:t>
             </a:fld>
             <a:endParaRPr lang="en-GB"/>
           </a:p>
@@ -573,7 +557,7 @@
           <a:lstStyle/>
           <a:p>
             <a:r>
-              <a:rPr lang="en-US"/>
+              <a:rPr lang="en-US" smtClean="0"/>
               <a:t>Click to edit Master title style</a:t>
             </a:r>
             <a:endParaRPr lang="en-GB"/>
@@ -602,35 +586,35 @@
           <a:p>
             <a:pPr lvl="0"/>
             <a:r>
-              <a:rPr lang="en-US"/>
+              <a:rPr lang="en-US" smtClean="0"/>
               <a:t>Click to edit Master text styles</a:t>
             </a:r>
           </a:p>
           <a:p>
             <a:pPr lvl="1"/>
             <a:r>
-              <a:rPr lang="en-US"/>
+              <a:rPr lang="en-US" smtClean="0"/>
               <a:t>Second level</a:t>
             </a:r>
           </a:p>
           <a:p>
             <a:pPr lvl="2"/>
             <a:r>
-              <a:rPr lang="en-US"/>
+              <a:rPr lang="en-US" smtClean="0"/>
               <a:t>Third level</a:t>
             </a:r>
           </a:p>
           <a:p>
             <a:pPr lvl="3"/>
             <a:r>
-              <a:rPr lang="en-US"/>
+              <a:rPr lang="en-US" smtClean="0"/>
               <a:t>Fourth level</a:t>
             </a:r>
           </a:p>
           <a:p>
             <a:pPr lvl="4"/>
             <a:r>
-              <a:rPr lang="en-US"/>
+              <a:rPr lang="en-US" smtClean="0"/>
               <a:t>Fifth level</a:t>
             </a:r>
             <a:endParaRPr lang="en-GB"/>
@@ -654,7 +638,7 @@
           <a:p>
             <a:fld id="{6BA5D40C-A8DC-479A-A5D3-E7B4936A184B}" type="datetimeFigureOut">
               <a:rPr lang="en-GB" smtClean="0"/>
-              <a:t>13/05/2026</a:t>
+              <a:t>15/07/2015</a:t>
             </a:fld>
             <a:endParaRPr lang="en-GB"/>
           </a:p>
@@ -748,7 +732,7 @@
           <a:lstStyle/>
           <a:p>
             <a:r>
-              <a:rPr lang="en-US"/>
+              <a:rPr lang="en-US" smtClean="0"/>
               <a:t>Click to edit Master title style</a:t>
             </a:r>
             <a:endParaRPr lang="en-GB"/>
@@ -772,35 +756,35 @@
           <a:p>
             <a:pPr lvl="0"/>
             <a:r>
-              <a:rPr lang="en-US"/>
+              <a:rPr lang="en-US" smtClean="0"/>
               <a:t>Click to edit Master text styles</a:t>
             </a:r>
           </a:p>
           <a:p>
             <a:pPr lvl="1"/>
             <a:r>
-              <a:rPr lang="en-US"/>
+              <a:rPr lang="en-US" smtClean="0"/>
               <a:t>Second level</a:t>
             </a:r>
           </a:p>
           <a:p>
             <a:pPr lvl="2"/>
             <a:r>
-              <a:rPr lang="en-US"/>
+              <a:rPr lang="en-US" smtClean="0"/>
               <a:t>Third level</a:t>
             </a:r>
           </a:p>
           <a:p>
             <a:pPr lvl="3"/>
             <a:r>
-              <a:rPr lang="en-US"/>
+              <a:rPr lang="en-US" smtClean="0"/>
               <a:t>Fourth level</a:t>
             </a:r>
           </a:p>
           <a:p>
             <a:pPr lvl="4"/>
             <a:r>
-              <a:rPr lang="en-US"/>
+              <a:rPr lang="en-US" smtClean="0"/>
               <a:t>Fifth level</a:t>
             </a:r>
             <a:endParaRPr lang="en-GB"/>
@@ -824,7 +808,7 @@
           <a:p>
             <a:fld id="{6BA5D40C-A8DC-479A-A5D3-E7B4936A184B}" type="datetimeFigureOut">
               <a:rPr lang="en-GB" smtClean="0"/>
-              <a:t>13/05/2026</a:t>
+              <a:t>15/07/2015</a:t>
             </a:fld>
             <a:endParaRPr lang="en-GB"/>
           </a:p>
@@ -927,7 +911,7 @@
           </a:lstStyle>
           <a:p>
             <a:r>
-              <a:rPr lang="en-US"/>
+              <a:rPr lang="en-US" smtClean="0"/>
               <a:t>Click to edit Master title style</a:t>
             </a:r>
             <a:endParaRPr lang="en-GB"/>
@@ -1047,7 +1031,7 @@
           <a:p>
             <a:pPr lvl="0"/>
             <a:r>
-              <a:rPr lang="en-US"/>
+              <a:rPr lang="en-US" smtClean="0"/>
               <a:t>Click to edit Master text styles</a:t>
             </a:r>
           </a:p>
@@ -1070,7 +1054,7 @@
           <a:p>
             <a:fld id="{6BA5D40C-A8DC-479A-A5D3-E7B4936A184B}" type="datetimeFigureOut">
               <a:rPr lang="en-GB" smtClean="0"/>
-              <a:t>13/05/2026</a:t>
+              <a:t>15/07/2015</a:t>
             </a:fld>
             <a:endParaRPr lang="en-GB"/>
           </a:p>
@@ -1164,7 +1148,7 @@
           <a:lstStyle/>
           <a:p>
             <a:r>
-              <a:rPr lang="en-US"/>
+              <a:rPr lang="en-US" smtClean="0"/>
               <a:t>Click to edit Master title style</a:t>
             </a:r>
             <a:endParaRPr lang="en-GB"/>
@@ -1221,35 +1205,35 @@
           <a:p>
             <a:pPr lvl="0"/>
             <a:r>
-              <a:rPr lang="en-US"/>
+              <a:rPr lang="en-US" smtClean="0"/>
               <a:t>Click to edit Master text styles</a:t>
             </a:r>
           </a:p>
           <a:p>
             <a:pPr lvl="1"/>
             <a:r>
-              <a:rPr lang="en-US"/>
+              <a:rPr lang="en-US" smtClean="0"/>
               <a:t>Second level</a:t>
             </a:r>
           </a:p>
           <a:p>
             <a:pPr lvl="2"/>
             <a:r>
-              <a:rPr lang="en-US"/>
+              <a:rPr lang="en-US" smtClean="0"/>
               <a:t>Third level</a:t>
             </a:r>
           </a:p>
           <a:p>
             <a:pPr lvl="3"/>
             <a:r>
-              <a:rPr lang="en-US"/>
+              <a:rPr lang="en-US" smtClean="0"/>
               <a:t>Fourth level</a:t>
             </a:r>
           </a:p>
           <a:p>
             <a:pPr lvl="4"/>
             <a:r>
-              <a:rPr lang="en-US"/>
+              <a:rPr lang="en-US" smtClean="0"/>
               <a:t>Fifth level</a:t>
             </a:r>
             <a:endParaRPr lang="en-GB"/>
@@ -1306,35 +1290,35 @@
           <a:p>
             <a:pPr lvl="0"/>
             <a:r>
-              <a:rPr lang="en-US"/>
+              <a:rPr lang="en-US" smtClean="0"/>
               <a:t>Click to edit Master text styles</a:t>
             </a:r>
           </a:p>
           <a:p>
             <a:pPr lvl="1"/>
             <a:r>
-              <a:rPr lang="en-US"/>
+              <a:rPr lang="en-US" smtClean="0"/>
               <a:t>Second level</a:t>
             </a:r>
           </a:p>
           <a:p>
             <a:pPr lvl="2"/>
             <a:r>
-              <a:rPr lang="en-US"/>
+              <a:rPr lang="en-US" smtClean="0"/>
               <a:t>Third level</a:t>
             </a:r>
           </a:p>
           <a:p>
             <a:pPr lvl="3"/>
             <a:r>
-              <a:rPr lang="en-US"/>
+              <a:rPr lang="en-US" smtClean="0"/>
               <a:t>Fourth level</a:t>
             </a:r>
           </a:p>
           <a:p>
             <a:pPr lvl="4"/>
             <a:r>
-              <a:rPr lang="en-US"/>
+              <a:rPr lang="en-US" smtClean="0"/>
               <a:t>Fifth level</a:t>
             </a:r>
             <a:endParaRPr lang="en-GB"/>
@@ -1358,7 +1342,7 @@
           <a:p>
             <a:fld id="{6BA5D40C-A8DC-479A-A5D3-E7B4936A184B}" type="datetimeFigureOut">
               <a:rPr lang="en-GB" smtClean="0"/>
-              <a:t>13/05/2026</a:t>
+              <a:t>15/07/2015</a:t>
             </a:fld>
             <a:endParaRPr lang="en-GB"/>
           </a:p>
@@ -1461,7 +1445,7 @@
           </a:lstStyle>
           <a:p>
             <a:r>
-              <a:rPr lang="en-US"/>
+              <a:rPr lang="en-US" smtClean="0"/>
               <a:t>Click to edit Master title style</a:t>
             </a:r>
             <a:endParaRPr lang="en-GB"/>
@@ -1527,7 +1511,7 @@
           <a:p>
             <a:pPr lvl="0"/>
             <a:r>
-              <a:rPr lang="en-US"/>
+              <a:rPr lang="en-US" smtClean="0"/>
               <a:t>Click to edit Master text styles</a:t>
             </a:r>
           </a:p>
@@ -1583,35 +1567,35 @@
           <a:p>
             <a:pPr lvl="0"/>
             <a:r>
-              <a:rPr lang="en-US"/>
+              <a:rPr lang="en-US" smtClean="0"/>
               <a:t>Click to edit Master text styles</a:t>
             </a:r>
           </a:p>
           <a:p>
             <a:pPr lvl="1"/>
             <a:r>
-              <a:rPr lang="en-US"/>
+              <a:rPr lang="en-US" smtClean="0"/>
               <a:t>Second level</a:t>
             </a:r>
           </a:p>
           <a:p>
             <a:pPr lvl="2"/>
             <a:r>
-              <a:rPr lang="en-US"/>
+              <a:rPr lang="en-US" smtClean="0"/>
               <a:t>Third level</a:t>
             </a:r>
           </a:p>
           <a:p>
             <a:pPr lvl="3"/>
             <a:r>
-              <a:rPr lang="en-US"/>
+              <a:rPr lang="en-US" smtClean="0"/>
               <a:t>Fourth level</a:t>
             </a:r>
           </a:p>
           <a:p>
             <a:pPr lvl="4"/>
             <a:r>
-              <a:rPr lang="en-US"/>
+              <a:rPr lang="en-US" smtClean="0"/>
               <a:t>Fifth level</a:t>
             </a:r>
             <a:endParaRPr lang="en-GB"/>
@@ -1677,7 +1661,7 @@
           <a:p>
             <a:pPr lvl="0"/>
             <a:r>
-              <a:rPr lang="en-US"/>
+              <a:rPr lang="en-US" smtClean="0"/>
               <a:t>Click to edit Master text styles</a:t>
             </a:r>
           </a:p>
@@ -1733,35 +1717,35 @@
           <a:p>
             <a:pPr lvl="0"/>
             <a:r>
-              <a:rPr lang="en-US"/>
+              <a:rPr lang="en-US" smtClean="0"/>
               <a:t>Click to edit Master text styles</a:t>
             </a:r>
           </a:p>
           <a:p>
             <a:pPr lvl="1"/>
             <a:r>
-              <a:rPr lang="en-US"/>
+              <a:rPr lang="en-US" smtClean="0"/>
               <a:t>Second level</a:t>
             </a:r>
           </a:p>
           <a:p>
             <a:pPr lvl="2"/>
             <a:r>
-              <a:rPr lang="en-US"/>
+              <a:rPr lang="en-US" smtClean="0"/>
               <a:t>Third level</a:t>
             </a:r>
           </a:p>
           <a:p>
             <a:pPr lvl="3"/>
             <a:r>
-              <a:rPr lang="en-US"/>
+              <a:rPr lang="en-US" smtClean="0"/>
               <a:t>Fourth level</a:t>
             </a:r>
           </a:p>
           <a:p>
             <a:pPr lvl="4"/>
             <a:r>
-              <a:rPr lang="en-US"/>
+              <a:rPr lang="en-US" smtClean="0"/>
               <a:t>Fifth level</a:t>
             </a:r>
             <a:endParaRPr lang="en-GB"/>
@@ -1785,7 +1769,7 @@
           <a:p>
             <a:fld id="{6BA5D40C-A8DC-479A-A5D3-E7B4936A184B}" type="datetimeFigureOut">
               <a:rPr lang="en-GB" smtClean="0"/>
-              <a:t>13/05/2026</a:t>
+              <a:t>15/07/2015</a:t>
             </a:fld>
             <a:endParaRPr lang="en-GB"/>
           </a:p>
@@ -1879,7 +1863,7 @@
           <a:lstStyle/>
           <a:p>
             <a:r>
-              <a:rPr lang="en-US"/>
+              <a:rPr lang="en-US" smtClean="0"/>
               <a:t>Click to edit Master title style</a:t>
             </a:r>
             <a:endParaRPr lang="en-GB"/>
@@ -1903,7 +1887,7 @@
           <a:p>
             <a:fld id="{6BA5D40C-A8DC-479A-A5D3-E7B4936A184B}" type="datetimeFigureOut">
               <a:rPr lang="en-GB" smtClean="0"/>
-              <a:t>13/05/2026</a:t>
+              <a:t>15/07/2015</a:t>
             </a:fld>
             <a:endParaRPr lang="en-GB"/>
           </a:p>
@@ -1998,7 +1982,7 @@
           <a:p>
             <a:fld id="{6BA5D40C-A8DC-479A-A5D3-E7B4936A184B}" type="datetimeFigureOut">
               <a:rPr lang="en-GB" smtClean="0"/>
-              <a:t>13/05/2026</a:t>
+              <a:t>15/07/2015</a:t>
             </a:fld>
             <a:endParaRPr lang="en-GB"/>
           </a:p>
@@ -2101,7 +2085,7 @@
           </a:lstStyle>
           <a:p>
             <a:r>
-              <a:rPr lang="en-US"/>
+              <a:rPr lang="en-US" smtClean="0"/>
               <a:t>Click to edit Master title style</a:t>
             </a:r>
             <a:endParaRPr lang="en-GB"/>
@@ -2158,35 +2142,35 @@
           <a:p>
             <a:pPr lvl="0"/>
             <a:r>
-              <a:rPr lang="en-US"/>
+              <a:rPr lang="en-US" smtClean="0"/>
               <a:t>Click to edit Master text styles</a:t>
             </a:r>
           </a:p>
           <a:p>
             <a:pPr lvl="1"/>
             <a:r>
-              <a:rPr lang="en-US"/>
+              <a:rPr lang="en-US" smtClean="0"/>
               <a:t>Second level</a:t>
             </a:r>
           </a:p>
           <a:p>
             <a:pPr lvl="2"/>
             <a:r>
-              <a:rPr lang="en-US"/>
+              <a:rPr lang="en-US" smtClean="0"/>
               <a:t>Third level</a:t>
             </a:r>
           </a:p>
           <a:p>
             <a:pPr lvl="3"/>
             <a:r>
-              <a:rPr lang="en-US"/>
+              <a:rPr lang="en-US" smtClean="0"/>
               <a:t>Fourth level</a:t>
             </a:r>
           </a:p>
           <a:p>
             <a:pPr lvl="4"/>
             <a:r>
-              <a:rPr lang="en-US"/>
+              <a:rPr lang="en-US" smtClean="0"/>
               <a:t>Fifth level</a:t>
             </a:r>
             <a:endParaRPr lang="en-GB"/>
@@ -2252,7 +2236,7 @@
           <a:p>
             <a:pPr lvl="0"/>
             <a:r>
-              <a:rPr lang="en-US"/>
+              <a:rPr lang="en-US" smtClean="0"/>
               <a:t>Click to edit Master text styles</a:t>
             </a:r>
           </a:p>
@@ -2275,7 +2259,7 @@
           <a:p>
             <a:fld id="{6BA5D40C-A8DC-479A-A5D3-E7B4936A184B}" type="datetimeFigureOut">
               <a:rPr lang="en-GB" smtClean="0"/>
-              <a:t>13/05/2026</a:t>
+              <a:t>15/07/2015</a:t>
             </a:fld>
             <a:endParaRPr lang="en-GB"/>
           </a:p>
@@ -2378,7 +2362,7 @@
           </a:lstStyle>
           <a:p>
             <a:r>
-              <a:rPr lang="en-US"/>
+              <a:rPr lang="en-US" smtClean="0"/>
               <a:t>Click to edit Master title style</a:t>
             </a:r>
             <a:endParaRPr lang="en-GB"/>
@@ -2505,7 +2489,7 @@
           <a:p>
             <a:pPr lvl="0"/>
             <a:r>
-              <a:rPr lang="en-US"/>
+              <a:rPr lang="en-US" smtClean="0"/>
               <a:t>Click to edit Master text styles</a:t>
             </a:r>
           </a:p>
@@ -2528,7 +2512,7 @@
           <a:p>
             <a:fld id="{6BA5D40C-A8DC-479A-A5D3-E7B4936A184B}" type="datetimeFigureOut">
               <a:rPr lang="en-GB" smtClean="0"/>
-              <a:t>13/05/2026</a:t>
+              <a:t>15/07/2015</a:t>
             </a:fld>
             <a:endParaRPr lang="en-GB"/>
           </a:p>
@@ -2637,7 +2621,7 @@
           <a:lstStyle/>
           <a:p>
             <a:r>
-              <a:rPr lang="en-US"/>
+              <a:rPr lang="en-US" smtClean="0"/>
               <a:t>Click to edit Master title style</a:t>
             </a:r>
             <a:endParaRPr lang="en-GB"/>
@@ -2671,35 +2655,35 @@
           <a:p>
             <a:pPr lvl="0"/>
             <a:r>
-              <a:rPr lang="en-US"/>
+              <a:rPr lang="en-US" smtClean="0"/>
               <a:t>Click to edit Master text styles</a:t>
             </a:r>
           </a:p>
           <a:p>
             <a:pPr lvl="1"/>
             <a:r>
-              <a:rPr lang="en-US"/>
+              <a:rPr lang="en-US" smtClean="0"/>
               <a:t>Second level</a:t>
             </a:r>
           </a:p>
           <a:p>
             <a:pPr lvl="2"/>
             <a:r>
-              <a:rPr lang="en-US"/>
+              <a:rPr lang="en-US" smtClean="0"/>
               <a:t>Third level</a:t>
             </a:r>
           </a:p>
           <a:p>
             <a:pPr lvl="3"/>
             <a:r>
-              <a:rPr lang="en-US"/>
+              <a:rPr lang="en-US" smtClean="0"/>
               <a:t>Fourth level</a:t>
             </a:r>
           </a:p>
           <a:p>
             <a:pPr lvl="4"/>
             <a:r>
-              <a:rPr lang="en-US"/>
+              <a:rPr lang="en-US" smtClean="0"/>
               <a:t>Fifth level</a:t>
             </a:r>
             <a:endParaRPr lang="en-GB"/>
@@ -2741,7 +2725,7 @@
           <a:p>
             <a:fld id="{6BA5D40C-A8DC-479A-A5D3-E7B4936A184B}" type="datetimeFigureOut">
               <a:rPr lang="en-GB" smtClean="0"/>
-              <a:t>13/05/2026</a:t>
+              <a:t>15/07/2015</a:t>
             </a:fld>
             <a:endParaRPr lang="en-GB"/>
           </a:p>
@@ -3116,17 +3100,17 @@
           <a:chExt cx="0" cy="0"/>
         </a:xfrm>
       </p:grpSpPr>
-      <p:grpSp>
+      <p:grpSp xmlns:pic="http://schemas.openxmlformats.org/drawingml/2006/picture">
         <p:nvGrpSpPr>
-          <p:cNvPr id="2" name="Group 1"/>
+          <p:cNvPr id="2" name=""/>
           <p:cNvGrpSpPr/>
           <p:nvPr/>
         </p:nvGrpSpPr>
         <p:grpSpPr>
           <a:xfrm>
-            <a:off x="2377281" y="1495425"/>
+            <a:off x="2377282" y="1495425"/>
             <a:ext cx="5943600" cy="4572000"/>
-            <a:chOff x="2377281" y="1495425"/>
+            <a:chOff x="2377282" y="1495425"/>
             <a:chExt cx="5943600" cy="4572000"/>
           </a:xfrm>
         </p:grpSpPr>
@@ -3162,9 +3146,7 @@
           <p:txBody>
             <a:bodyPr/>
             <a:lstStyle/>
-            <a:p>
-              <a:endParaRPr/>
-            </a:p>
+            <a:p/>
           </p:txBody>
         </p:sp>
         <p:sp>
@@ -3199,9 +3181,7 @@
           <p:txBody>
             <a:bodyPr/>
             <a:lstStyle/>
-            <a:p>
-              <a:endParaRPr/>
-            </a:p>
+            <a:p/>
           </p:txBody>
         </p:sp>
         <p:sp>
@@ -3227,9 +3207,7 @@
           <p:txBody>
             <a:bodyPr/>
             <a:lstStyle/>
-            <a:p>
-              <a:endParaRPr/>
-            </a:p>
+            <a:p/>
           </p:txBody>
         </p:sp>
         <p:sp>
@@ -3245,12 +3223,8 @@
             </a:xfrm>
             <a:custGeom>
               <a:avLst/>
-              <a:gdLst/>
-              <a:ahLst/>
-              <a:cxnLst/>
-              <a:rect l="0" t="0" r="0" b="0"/>
               <a:pathLst>
-                <a:path w="2539947">
+                <a:path w="2539947" h="0">
                   <a:moveTo>
                     <a:pt x="0" y="0"/>
                   </a:moveTo>
@@ -3276,9 +3250,7 @@
           <p:txBody>
             <a:bodyPr/>
             <a:lstStyle/>
-            <a:p>
-              <a:endParaRPr/>
-            </a:p>
+            <a:p/>
           </p:txBody>
         </p:sp>
         <p:sp>
@@ -3294,12 +3266,8 @@
             </a:xfrm>
             <a:custGeom>
               <a:avLst/>
-              <a:gdLst/>
-              <a:ahLst/>
-              <a:cxnLst/>
-              <a:rect l="0" t="0" r="0" b="0"/>
               <a:pathLst>
-                <a:path w="2539947">
+                <a:path w="2539947" h="0">
                   <a:moveTo>
                     <a:pt x="0" y="0"/>
                   </a:moveTo>
@@ -3325,9 +3293,7 @@
           <p:txBody>
             <a:bodyPr/>
             <a:lstStyle/>
-            <a:p>
-              <a:endParaRPr/>
-            </a:p>
+            <a:p/>
           </p:txBody>
         </p:sp>
         <p:sp>
@@ -3343,12 +3309,8 @@
             </a:xfrm>
             <a:custGeom>
               <a:avLst/>
-              <a:gdLst/>
-              <a:ahLst/>
-              <a:cxnLst/>
-              <a:rect l="0" t="0" r="0" b="0"/>
               <a:pathLst>
-                <a:path w="2539947">
+                <a:path w="2539947" h="0">
                   <a:moveTo>
                     <a:pt x="0" y="0"/>
                   </a:moveTo>
@@ -3374,9 +3336,7 @@
           <p:txBody>
             <a:bodyPr/>
             <a:lstStyle/>
-            <a:p>
-              <a:endParaRPr/>
-            </a:p>
+            <a:p/>
           </p:txBody>
         </p:sp>
         <p:sp>
@@ -3392,12 +3352,8 @@
             </a:xfrm>
             <a:custGeom>
               <a:avLst/>
-              <a:gdLst/>
-              <a:ahLst/>
-              <a:cxnLst/>
-              <a:rect l="0" t="0" r="0" b="0"/>
               <a:pathLst>
-                <a:path w="2539947">
+                <a:path w="2539947" h="0">
                   <a:moveTo>
                     <a:pt x="0" y="0"/>
                   </a:moveTo>
@@ -3423,9 +3379,7 @@
           <p:txBody>
             <a:bodyPr/>
             <a:lstStyle/>
-            <a:p>
-              <a:endParaRPr/>
-            </a:p>
+            <a:p/>
           </p:txBody>
         </p:sp>
         <p:sp>
@@ -3441,12 +3395,8 @@
             </a:xfrm>
             <a:custGeom>
               <a:avLst/>
-              <a:gdLst/>
-              <a:ahLst/>
-              <a:cxnLst/>
-              <a:rect l="0" t="0" r="0" b="0"/>
               <a:pathLst>
-                <a:path w="2539947">
+                <a:path w="2539947" h="0">
                   <a:moveTo>
                     <a:pt x="0" y="0"/>
                   </a:moveTo>
@@ -3472,9 +3422,7 @@
           <p:txBody>
             <a:bodyPr/>
             <a:lstStyle/>
-            <a:p>
-              <a:endParaRPr/>
-            </a:p>
+            <a:p/>
           </p:txBody>
         </p:sp>
         <p:sp>
@@ -3490,12 +3438,8 @@
             </a:xfrm>
             <a:custGeom>
               <a:avLst/>
-              <a:gdLst/>
-              <a:ahLst/>
-              <a:cxnLst/>
-              <a:rect l="0" t="0" r="0" b="0"/>
               <a:pathLst>
-                <a:path w="2539947">
+                <a:path w="2539947" h="0">
                   <a:moveTo>
                     <a:pt x="0" y="0"/>
                   </a:moveTo>
@@ -3521,9 +3465,7 @@
           <p:txBody>
             <a:bodyPr/>
             <a:lstStyle/>
-            <a:p>
-              <a:endParaRPr/>
-            </a:p>
+            <a:p/>
           </p:txBody>
         </p:sp>
         <p:sp>
@@ -3539,12 +3481,8 @@
             </a:xfrm>
             <a:custGeom>
               <a:avLst/>
-              <a:gdLst/>
-              <a:ahLst/>
-              <a:cxnLst/>
-              <a:rect l="0" t="0" r="0" b="0"/>
               <a:pathLst>
-                <a:path h="1806522">
+                <a:path w="0" h="1806522">
                   <a:moveTo>
                     <a:pt x="0" y="1806522"/>
                   </a:moveTo>
@@ -3570,9 +3508,7 @@
           <p:txBody>
             <a:bodyPr/>
             <a:lstStyle/>
-            <a:p>
-              <a:endParaRPr/>
-            </a:p>
+            <a:p/>
           </p:txBody>
         </p:sp>
         <p:sp>
@@ -3588,12 +3524,8 @@
             </a:xfrm>
             <a:custGeom>
               <a:avLst/>
-              <a:gdLst/>
-              <a:ahLst/>
-              <a:cxnLst/>
-              <a:rect l="0" t="0" r="0" b="0"/>
               <a:pathLst>
-                <a:path h="1806522">
+                <a:path w="0" h="1806522">
                   <a:moveTo>
                     <a:pt x="0" y="1806522"/>
                   </a:moveTo>
@@ -3619,9 +3551,7 @@
           <p:txBody>
             <a:bodyPr/>
             <a:lstStyle/>
-            <a:p>
-              <a:endParaRPr/>
-            </a:p>
+            <a:p/>
           </p:txBody>
         </p:sp>
         <p:sp>
@@ -3637,12 +3567,8 @@
             </a:xfrm>
             <a:custGeom>
               <a:avLst/>
-              <a:gdLst/>
-              <a:ahLst/>
-              <a:cxnLst/>
-              <a:rect l="0" t="0" r="0" b="0"/>
               <a:pathLst>
-                <a:path h="1806522">
+                <a:path w="0" h="1806522">
                   <a:moveTo>
                     <a:pt x="0" y="1806522"/>
                   </a:moveTo>
@@ -3668,9 +3594,7 @@
           <p:txBody>
             <a:bodyPr/>
             <a:lstStyle/>
-            <a:p>
-              <a:endParaRPr/>
-            </a:p>
+            <a:p/>
           </p:txBody>
         </p:sp>
         <p:sp>
@@ -3686,12 +3610,8 @@
             </a:xfrm>
             <a:custGeom>
               <a:avLst/>
-              <a:gdLst/>
-              <a:ahLst/>
-              <a:cxnLst/>
-              <a:rect l="0" t="0" r="0" b="0"/>
               <a:pathLst>
-                <a:path w="2539947">
+                <a:path w="2539947" h="0">
                   <a:moveTo>
                     <a:pt x="0" y="0"/>
                   </a:moveTo>
@@ -3717,9 +3637,7 @@
           <p:txBody>
             <a:bodyPr/>
             <a:lstStyle/>
-            <a:p>
-              <a:endParaRPr/>
-            </a:p>
+            <a:p/>
           </p:txBody>
         </p:sp>
         <p:sp>
@@ -3735,12 +3653,8 @@
             </a:xfrm>
             <a:custGeom>
               <a:avLst/>
-              <a:gdLst/>
-              <a:ahLst/>
-              <a:cxnLst/>
-              <a:rect l="0" t="0" r="0" b="0"/>
               <a:pathLst>
-                <a:path w="2539947">
+                <a:path w="2539947" h="0">
                   <a:moveTo>
                     <a:pt x="0" y="0"/>
                   </a:moveTo>
@@ -3766,9 +3680,7 @@
           <p:txBody>
             <a:bodyPr/>
             <a:lstStyle/>
-            <a:p>
-              <a:endParaRPr/>
-            </a:p>
+            <a:p/>
           </p:txBody>
         </p:sp>
         <p:sp>
@@ -3784,12 +3696,8 @@
             </a:xfrm>
             <a:custGeom>
               <a:avLst/>
-              <a:gdLst/>
-              <a:ahLst/>
-              <a:cxnLst/>
-              <a:rect l="0" t="0" r="0" b="0"/>
               <a:pathLst>
-                <a:path w="2539947">
+                <a:path w="2539947" h="0">
                   <a:moveTo>
                     <a:pt x="0" y="0"/>
                   </a:moveTo>
@@ -3815,9 +3723,7 @@
           <p:txBody>
             <a:bodyPr/>
             <a:lstStyle/>
-            <a:p>
-              <a:endParaRPr/>
-            </a:p>
+            <a:p/>
           </p:txBody>
         </p:sp>
         <p:sp>
@@ -3833,12 +3739,8 @@
             </a:xfrm>
             <a:custGeom>
               <a:avLst/>
-              <a:gdLst/>
-              <a:ahLst/>
-              <a:cxnLst/>
-              <a:rect l="0" t="0" r="0" b="0"/>
               <a:pathLst>
-                <a:path w="2539947">
+                <a:path w="2539947" h="0">
                   <a:moveTo>
                     <a:pt x="0" y="0"/>
                   </a:moveTo>
@@ -3864,9 +3766,7 @@
           <p:txBody>
             <a:bodyPr/>
             <a:lstStyle/>
-            <a:p>
-              <a:endParaRPr/>
-            </a:p>
+            <a:p/>
           </p:txBody>
         </p:sp>
         <p:sp>
@@ -3882,12 +3782,8 @@
             </a:xfrm>
             <a:custGeom>
               <a:avLst/>
-              <a:gdLst/>
-              <a:ahLst/>
-              <a:cxnLst/>
-              <a:rect l="0" t="0" r="0" b="0"/>
               <a:pathLst>
-                <a:path w="2539947">
+                <a:path w="2539947" h="0">
                   <a:moveTo>
                     <a:pt x="0" y="0"/>
                   </a:moveTo>
@@ -3913,9 +3809,7 @@
           <p:txBody>
             <a:bodyPr/>
             <a:lstStyle/>
-            <a:p>
-              <a:endParaRPr/>
-            </a:p>
+            <a:p/>
           </p:txBody>
         </p:sp>
         <p:sp>
@@ -3931,12 +3825,8 @@
             </a:xfrm>
             <a:custGeom>
               <a:avLst/>
-              <a:gdLst/>
-              <a:ahLst/>
-              <a:cxnLst/>
-              <a:rect l="0" t="0" r="0" b="0"/>
               <a:pathLst>
-                <a:path w="2539947">
+                <a:path w="2539947" h="0">
                   <a:moveTo>
                     <a:pt x="0" y="0"/>
                   </a:moveTo>
@@ -3962,9 +3852,7 @@
           <p:txBody>
             <a:bodyPr/>
             <a:lstStyle/>
-            <a:p>
-              <a:endParaRPr/>
-            </a:p>
+            <a:p/>
           </p:txBody>
         </p:sp>
         <p:sp>
@@ -3980,12 +3868,8 @@
             </a:xfrm>
             <a:custGeom>
               <a:avLst/>
-              <a:gdLst/>
-              <a:ahLst/>
-              <a:cxnLst/>
-              <a:rect l="0" t="0" r="0" b="0"/>
               <a:pathLst>
-                <a:path h="1806522">
+                <a:path w="0" h="1806522">
                   <a:moveTo>
                     <a:pt x="0" y="1806522"/>
                   </a:moveTo>
@@ -4011,9 +3895,7 @@
           <p:txBody>
             <a:bodyPr/>
             <a:lstStyle/>
-            <a:p>
-              <a:endParaRPr/>
-            </a:p>
+            <a:p/>
           </p:txBody>
         </p:sp>
         <p:sp>
@@ -4029,12 +3911,8 @@
             </a:xfrm>
             <a:custGeom>
               <a:avLst/>
-              <a:gdLst/>
-              <a:ahLst/>
-              <a:cxnLst/>
-              <a:rect l="0" t="0" r="0" b="0"/>
               <a:pathLst>
-                <a:path h="1806522">
+                <a:path w="0" h="1806522">
                   <a:moveTo>
                     <a:pt x="0" y="1806522"/>
                   </a:moveTo>
@@ -4060,9 +3938,7 @@
           <p:txBody>
             <a:bodyPr/>
             <a:lstStyle/>
-            <a:p>
-              <a:endParaRPr/>
-            </a:p>
+            <a:p/>
           </p:txBody>
         </p:sp>
         <p:sp>
@@ -4078,12 +3954,8 @@
             </a:xfrm>
             <a:custGeom>
               <a:avLst/>
-              <a:gdLst/>
-              <a:ahLst/>
-              <a:cxnLst/>
-              <a:rect l="0" t="0" r="0" b="0"/>
               <a:pathLst>
-                <a:path h="1806522">
+                <a:path w="0" h="1806522">
                   <a:moveTo>
                     <a:pt x="0" y="1806522"/>
                   </a:moveTo>
@@ -4109,9 +3981,7 @@
           <p:txBody>
             <a:bodyPr/>
             <a:lstStyle/>
-            <a:p>
-              <a:endParaRPr/>
-            </a:p>
+            <a:p/>
           </p:txBody>
         </p:sp>
         <p:sp>
@@ -4127,12 +3997,8 @@
             </a:xfrm>
             <a:custGeom>
               <a:avLst/>
-              <a:gdLst/>
-              <a:ahLst/>
-              <a:cxnLst/>
-              <a:rect l="0" t="0" r="0" b="0"/>
               <a:pathLst>
-                <a:path h="1806522">
+                <a:path w="0" h="1806522">
                   <a:moveTo>
                     <a:pt x="0" y="1806522"/>
                   </a:moveTo>
@@ -4158,9 +4024,7 @@
           <p:txBody>
             <a:bodyPr/>
             <a:lstStyle/>
-            <a:p>
-              <a:endParaRPr/>
-            </a:p>
+            <a:p/>
           </p:txBody>
         </p:sp>
         <p:sp>
@@ -4176,10 +4040,6 @@
             </a:xfrm>
             <a:custGeom>
               <a:avLst/>
-              <a:gdLst/>
-              <a:ahLst/>
-              <a:cxnLst/>
-              <a:rect l="0" t="0" r="0" b="0"/>
               <a:pathLst>
                 <a:path w="1577845" h="1057132">
                   <a:moveTo>
@@ -4324,9 +4184,7 @@
           <p:txBody>
             <a:bodyPr/>
             <a:lstStyle/>
-            <a:p>
-              <a:endParaRPr/>
-            </a:p>
+            <a:p/>
           </p:txBody>
         </p:sp>
         <p:sp>
@@ -4342,10 +4200,6 @@
             </a:xfrm>
             <a:custGeom>
               <a:avLst/>
-              <a:gdLst/>
-              <a:ahLst/>
-              <a:cxnLst/>
-              <a:rect l="0" t="0" r="0" b="0"/>
               <a:pathLst>
                 <a:path w="1577845" h="1642292">
                   <a:moveTo>
@@ -4613,9 +4467,7 @@
           <p:txBody>
             <a:bodyPr/>
             <a:lstStyle/>
-            <a:p>
-              <a:endParaRPr/>
-            </a:p>
+            <a:p/>
           </p:txBody>
         </p:sp>
         <p:sp>
@@ -4631,10 +4483,6 @@
             </a:xfrm>
             <a:custGeom>
               <a:avLst/>
-              <a:gdLst/>
-              <a:ahLst/>
-              <a:cxnLst/>
-              <a:rect l="0" t="0" r="0" b="0"/>
               <a:pathLst>
                 <a:path w="1577845" h="1507238">
                   <a:moveTo>
@@ -4770,9 +4618,7 @@
           <p:txBody>
             <a:bodyPr/>
             <a:lstStyle/>
-            <a:p>
-              <a:endParaRPr/>
-            </a:p>
+            <a:p/>
           </p:txBody>
         </p:sp>
         <p:sp>
@@ -4788,10 +4634,6 @@
             </a:xfrm>
             <a:custGeom>
               <a:avLst/>
-              <a:gdLst/>
-              <a:ahLst/>
-              <a:cxnLst/>
-              <a:rect l="0" t="0" r="0" b="0"/>
               <a:pathLst>
                 <a:path w="1577845" h="814272">
                   <a:moveTo>
@@ -4927,9 +4769,7 @@
           <p:txBody>
             <a:bodyPr/>
             <a:lstStyle/>
-            <a:p>
-              <a:endParaRPr/>
-            </a:p>
+            <a:p/>
           </p:txBody>
         </p:sp>
         <p:sp>
@@ -4959,9 +4799,7 @@
           <p:txBody>
             <a:bodyPr/>
             <a:lstStyle/>
-            <a:p>
-              <a:endParaRPr/>
-            </a:p>
+            <a:p/>
           </p:txBody>
         </p:sp>
         <p:sp>
@@ -4981,10 +4819,10 @@
             <a:noFill/>
           </p:spPr>
           <p:txBody>
-            <a:bodyPr wrap="none" lIns="0" tIns="0" rIns="0" bIns="0" anchor="ctr" anchorCtr="1"/>
+            <a:bodyPr lIns="0" rIns="0" tIns="0" bIns="0" anchorCtr="1" anchor="ctr" wrap="none"/>
             <a:lstStyle/>
             <a:p>
-              <a:pPr marL="0" marR="0" indent="0" algn="l">
+              <a:pPr algn="l" marL="0" marR="0" indent="0">
                 <a:lnSpc>
                   <a:spcPts val="880"/>
                 </a:lnSpc>
@@ -5027,10 +4865,10 @@
             <a:noFill/>
           </p:spPr>
           <p:txBody>
-            <a:bodyPr wrap="none" lIns="0" tIns="0" rIns="0" bIns="0" anchor="ctr" anchorCtr="1"/>
+            <a:bodyPr lIns="0" rIns="0" tIns="0" bIns="0" anchorCtr="1" anchor="ctr" wrap="none"/>
             <a:lstStyle/>
             <a:p>
-              <a:pPr marL="0" marR="0" indent="0" algn="l">
+              <a:pPr algn="l" marL="0" marR="0" indent="0">
                 <a:lnSpc>
                   <a:spcPts val="880"/>
                 </a:lnSpc>
@@ -5073,10 +4911,10 @@
             <a:noFill/>
           </p:spPr>
           <p:txBody>
-            <a:bodyPr wrap="none" lIns="0" tIns="0" rIns="0" bIns="0" anchor="ctr" anchorCtr="1"/>
+            <a:bodyPr lIns="0" rIns="0" tIns="0" bIns="0" anchorCtr="1" anchor="ctr" wrap="none"/>
             <a:lstStyle/>
             <a:p>
-              <a:pPr marL="0" marR="0" indent="0" algn="l">
+              <a:pPr algn="l" marL="0" marR="0" indent="0">
                 <a:lnSpc>
                   <a:spcPts val="880"/>
                 </a:lnSpc>
@@ -5119,10 +4957,10 @@
             <a:noFill/>
           </p:spPr>
           <p:txBody>
-            <a:bodyPr wrap="none" lIns="0" tIns="0" rIns="0" bIns="0" anchor="ctr" anchorCtr="1"/>
+            <a:bodyPr lIns="0" rIns="0" tIns="0" bIns="0" anchorCtr="1" anchor="ctr" wrap="none"/>
             <a:lstStyle/>
             <a:p>
-              <a:pPr marL="0" marR="0" indent="0" algn="l">
+              <a:pPr algn="l" marL="0" marR="0" indent="0">
                 <a:lnSpc>
                   <a:spcPts val="880"/>
                 </a:lnSpc>
@@ -5165,10 +5003,10 @@
             <a:noFill/>
           </p:spPr>
           <p:txBody>
-            <a:bodyPr wrap="none" lIns="0" tIns="0" rIns="0" bIns="0" anchor="ctr" anchorCtr="1"/>
+            <a:bodyPr lIns="0" rIns="0" tIns="0" bIns="0" anchorCtr="1" anchor="ctr" wrap="none"/>
             <a:lstStyle/>
             <a:p>
-              <a:pPr marL="0" marR="0" indent="0" algn="l">
+              <a:pPr algn="l" marL="0" marR="0" indent="0">
                 <a:lnSpc>
                   <a:spcPts val="880"/>
                 </a:lnSpc>
@@ -5211,10 +5049,10 @@
             <a:noFill/>
           </p:spPr>
           <p:txBody>
-            <a:bodyPr wrap="none" lIns="0" tIns="0" rIns="0" bIns="0" anchor="ctr" anchorCtr="1"/>
+            <a:bodyPr lIns="0" rIns="0" tIns="0" bIns="0" anchorCtr="1" anchor="ctr" wrap="none"/>
             <a:lstStyle/>
             <a:p>
-              <a:pPr marL="0" marR="0" indent="0" algn="l">
+              <a:pPr algn="l" marL="0" marR="0" indent="0">
                 <a:lnSpc>
                   <a:spcPts val="880"/>
                 </a:lnSpc>
@@ -5253,12 +5091,8 @@
             </a:xfrm>
             <a:custGeom>
               <a:avLst/>
-              <a:gdLst/>
-              <a:ahLst/>
-              <a:cxnLst/>
-              <a:rect l="0" t="0" r="0" b="0"/>
               <a:pathLst>
-                <a:path w="34794">
+                <a:path w="34794" h="0">
                   <a:moveTo>
                     <a:pt x="0" y="0"/>
                   </a:moveTo>
@@ -5281,9 +5115,7 @@
           <p:txBody>
             <a:bodyPr/>
             <a:lstStyle/>
-            <a:p>
-              <a:endParaRPr/>
-            </a:p>
+            <a:p/>
           </p:txBody>
         </p:sp>
         <p:sp>
@@ -5299,12 +5131,8 @@
             </a:xfrm>
             <a:custGeom>
               <a:avLst/>
-              <a:gdLst/>
-              <a:ahLst/>
-              <a:cxnLst/>
-              <a:rect l="0" t="0" r="0" b="0"/>
               <a:pathLst>
-                <a:path w="34794">
+                <a:path w="34794" h="0">
                   <a:moveTo>
                     <a:pt x="0" y="0"/>
                   </a:moveTo>
@@ -5327,9 +5155,7 @@
           <p:txBody>
             <a:bodyPr/>
             <a:lstStyle/>
-            <a:p>
-              <a:endParaRPr/>
-            </a:p>
+            <a:p/>
           </p:txBody>
         </p:sp>
         <p:sp>
@@ -5345,12 +5171,8 @@
             </a:xfrm>
             <a:custGeom>
               <a:avLst/>
-              <a:gdLst/>
-              <a:ahLst/>
-              <a:cxnLst/>
-              <a:rect l="0" t="0" r="0" b="0"/>
               <a:pathLst>
-                <a:path w="34794">
+                <a:path w="34794" h="0">
                   <a:moveTo>
                     <a:pt x="0" y="0"/>
                   </a:moveTo>
@@ -5373,9 +5195,7 @@
           <p:txBody>
             <a:bodyPr/>
             <a:lstStyle/>
-            <a:p>
-              <a:endParaRPr/>
-            </a:p>
+            <a:p/>
           </p:txBody>
         </p:sp>
         <p:sp>
@@ -5391,12 +5211,8 @@
             </a:xfrm>
             <a:custGeom>
               <a:avLst/>
-              <a:gdLst/>
-              <a:ahLst/>
-              <a:cxnLst/>
-              <a:rect l="0" t="0" r="0" b="0"/>
               <a:pathLst>
-                <a:path w="34794">
+                <a:path w="34794" h="0">
                   <a:moveTo>
                     <a:pt x="0" y="0"/>
                   </a:moveTo>
@@ -5419,9 +5235,7 @@
           <p:txBody>
             <a:bodyPr/>
             <a:lstStyle/>
-            <a:p>
-              <a:endParaRPr/>
-            </a:p>
+            <a:p/>
           </p:txBody>
         </p:sp>
         <p:sp>
@@ -5437,12 +5251,8 @@
             </a:xfrm>
             <a:custGeom>
               <a:avLst/>
-              <a:gdLst/>
-              <a:ahLst/>
-              <a:cxnLst/>
-              <a:rect l="0" t="0" r="0" b="0"/>
               <a:pathLst>
-                <a:path w="34794">
+                <a:path w="34794" h="0">
                   <a:moveTo>
                     <a:pt x="0" y="0"/>
                   </a:moveTo>
@@ -5465,9 +5275,7 @@
           <p:txBody>
             <a:bodyPr/>
             <a:lstStyle/>
-            <a:p>
-              <a:endParaRPr/>
-            </a:p>
+            <a:p/>
           </p:txBody>
         </p:sp>
         <p:sp>
@@ -5483,12 +5291,8 @@
             </a:xfrm>
             <a:custGeom>
               <a:avLst/>
-              <a:gdLst/>
-              <a:ahLst/>
-              <a:cxnLst/>
-              <a:rect l="0" t="0" r="0" b="0"/>
               <a:pathLst>
-                <a:path w="34794">
+                <a:path w="34794" h="0">
                   <a:moveTo>
                     <a:pt x="0" y="0"/>
                   </a:moveTo>
@@ -5511,9 +5315,7 @@
           <p:txBody>
             <a:bodyPr/>
             <a:lstStyle/>
-            <a:p>
-              <a:endParaRPr/>
-            </a:p>
+            <a:p/>
           </p:txBody>
         </p:sp>
         <p:sp>
@@ -5529,12 +5331,8 @@
             </a:xfrm>
             <a:custGeom>
               <a:avLst/>
-              <a:gdLst/>
-              <a:ahLst/>
-              <a:cxnLst/>
-              <a:rect l="0" t="0" r="0" b="0"/>
               <a:pathLst>
-                <a:path h="34794">
+                <a:path w="0" h="34794">
                   <a:moveTo>
                     <a:pt x="0" y="34794"/>
                   </a:moveTo>
@@ -5557,9 +5355,7 @@
           <p:txBody>
             <a:bodyPr/>
             <a:lstStyle/>
-            <a:p>
-              <a:endParaRPr/>
-            </a:p>
+            <a:p/>
           </p:txBody>
         </p:sp>
         <p:sp>
@@ -5575,12 +5371,8 @@
             </a:xfrm>
             <a:custGeom>
               <a:avLst/>
-              <a:gdLst/>
-              <a:ahLst/>
-              <a:cxnLst/>
-              <a:rect l="0" t="0" r="0" b="0"/>
               <a:pathLst>
-                <a:path h="34794">
+                <a:path w="0" h="34794">
                   <a:moveTo>
                     <a:pt x="0" y="34794"/>
                   </a:moveTo>
@@ -5603,9 +5395,7 @@
           <p:txBody>
             <a:bodyPr/>
             <a:lstStyle/>
-            <a:p>
-              <a:endParaRPr/>
-            </a:p>
+            <a:p/>
           </p:txBody>
         </p:sp>
         <p:sp>
@@ -5621,12 +5411,8 @@
             </a:xfrm>
             <a:custGeom>
               <a:avLst/>
-              <a:gdLst/>
-              <a:ahLst/>
-              <a:cxnLst/>
-              <a:rect l="0" t="0" r="0" b="0"/>
               <a:pathLst>
-                <a:path h="34794">
+                <a:path w="0" h="34794">
                   <a:moveTo>
                     <a:pt x="0" y="34794"/>
                   </a:moveTo>
@@ -5649,9 +5435,7 @@
           <p:txBody>
             <a:bodyPr/>
             <a:lstStyle/>
-            <a:p>
-              <a:endParaRPr/>
-            </a:p>
+            <a:p/>
           </p:txBody>
         </p:sp>
         <p:sp>
@@ -5667,12 +5451,8 @@
             </a:xfrm>
             <a:custGeom>
               <a:avLst/>
-              <a:gdLst/>
-              <a:ahLst/>
-              <a:cxnLst/>
-              <a:rect l="0" t="0" r="0" b="0"/>
               <a:pathLst>
-                <a:path h="34794">
+                <a:path w="0" h="34794">
                   <a:moveTo>
                     <a:pt x="0" y="34794"/>
                   </a:moveTo>
@@ -5695,9 +5475,7 @@
           <p:txBody>
             <a:bodyPr/>
             <a:lstStyle/>
-            <a:p>
-              <a:endParaRPr/>
-            </a:p>
+            <a:p/>
           </p:txBody>
         </p:sp>
         <p:sp>
@@ -5717,10 +5495,10 @@
             <a:noFill/>
           </p:spPr>
           <p:txBody>
-            <a:bodyPr wrap="none" lIns="0" tIns="0" rIns="0" bIns="0" anchor="ctr" anchorCtr="1"/>
+            <a:bodyPr lIns="0" rIns="0" tIns="0" bIns="0" anchorCtr="1" anchor="ctr" wrap="none"/>
             <a:lstStyle/>
             <a:p>
-              <a:pPr marL="0" marR="0" indent="0" algn="l">
+              <a:pPr algn="l" marL="0" marR="0" indent="0">
                 <a:lnSpc>
                   <a:spcPts val="880"/>
                 </a:lnSpc>
@@ -5763,10 +5541,10 @@
             <a:noFill/>
           </p:spPr>
           <p:txBody>
-            <a:bodyPr wrap="none" lIns="0" tIns="0" rIns="0" bIns="0" anchor="ctr" anchorCtr="1"/>
+            <a:bodyPr lIns="0" rIns="0" tIns="0" bIns="0" anchorCtr="1" anchor="ctr" wrap="none"/>
             <a:lstStyle/>
             <a:p>
-              <a:pPr marL="0" marR="0" indent="0" algn="l">
+              <a:pPr algn="l" marL="0" marR="0" indent="0">
                 <a:lnSpc>
                   <a:spcPts val="880"/>
                 </a:lnSpc>
@@ -5809,10 +5587,10 @@
             <a:noFill/>
           </p:spPr>
           <p:txBody>
-            <a:bodyPr wrap="none" lIns="0" tIns="0" rIns="0" bIns="0" anchor="ctr" anchorCtr="1"/>
+            <a:bodyPr lIns="0" rIns="0" tIns="0" bIns="0" anchorCtr="1" anchor="ctr" wrap="none"/>
             <a:lstStyle/>
             <a:p>
-              <a:pPr marL="0" marR="0" indent="0" algn="l">
+              <a:pPr algn="l" marL="0" marR="0" indent="0">
                 <a:lnSpc>
                   <a:spcPts val="880"/>
                 </a:lnSpc>
@@ -5855,10 +5633,10 @@
             <a:noFill/>
           </p:spPr>
           <p:txBody>
-            <a:bodyPr wrap="none" lIns="0" tIns="0" rIns="0" bIns="0" anchor="ctr" anchorCtr="1"/>
+            <a:bodyPr lIns="0" rIns="0" tIns="0" bIns="0" anchorCtr="1" anchor="ctr" wrap="none"/>
             <a:lstStyle/>
             <a:p>
-              <a:pPr marL="0" marR="0" indent="0" algn="l">
+              <a:pPr algn="l" marL="0" marR="0" indent="0">
                 <a:lnSpc>
                   <a:spcPts val="880"/>
                 </a:lnSpc>
@@ -5901,10 +5679,10 @@
             <a:noFill/>
           </p:spPr>
           <p:txBody>
-            <a:bodyPr wrap="none" lIns="0" tIns="0" rIns="0" bIns="0" anchor="ctr" anchorCtr="1"/>
+            <a:bodyPr lIns="0" rIns="0" tIns="0" bIns="0" anchorCtr="1" anchor="ctr" wrap="none"/>
             <a:lstStyle/>
             <a:p>
-              <a:pPr marL="0" marR="0" indent="0" algn="l">
+              <a:pPr algn="l" marL="0" marR="0" indent="0">
                 <a:lnSpc>
                   <a:spcPts val="1100"/>
                 </a:lnSpc>
@@ -5947,10 +5725,10 @@
             <a:noFill/>
           </p:spPr>
           <p:txBody>
-            <a:bodyPr wrap="none" lIns="0" tIns="0" rIns="0" bIns="0" anchor="ctr" anchorCtr="1"/>
+            <a:bodyPr lIns="0" rIns="0" tIns="0" bIns="0" anchorCtr="1" anchor="ctr" wrap="none"/>
             <a:lstStyle/>
             <a:p>
-              <a:pPr marL="0" marR="0" indent="0" algn="ctr">
+              <a:pPr algn="l" marL="0" marR="0" indent="0">
                 <a:lnSpc>
                   <a:spcPts val="1100"/>
                 </a:lnSpc>
@@ -5962,7 +5740,7 @@
                 </a:spcAft>
               </a:pPr>
               <a:r>
-                <a:rPr sz="1100" dirty="0">
+                <a:rPr sz="1100">
                   <a:solidFill>
                     <a:srgbClr val="000000">
                       <a:alpha val="100000"/>
@@ -5971,20 +5749,859 @@
                   <a:latin typeface="Arial"/>
                   <a:cs typeface="Arial"/>
                 </a:rPr>
-                <a:t>Amyloid PET </a:t>
+                <a:t>Amyloid PET -  Z</a:t>
               </a:r>
-              <a:endParaRPr lang="en-US" sz="1100" dirty="0">
-                <a:solidFill>
-                  <a:srgbClr val="000000">
-                    <a:alpha val="100000"/>
-                  </a:srgbClr>
-                </a:solidFill>
-                <a:latin typeface="Arial"/>
-                <a:cs typeface="Arial"/>
-              </a:endParaRPr>
             </a:p>
+          </p:txBody>
+        </p:sp>
+        <p:sp>
+          <p:nvSpPr>
+            <p:cNvPr id="52" name="rc52"/>
+            <p:cNvSpPr/>
+            <p:nvPr/>
+          </p:nvSpPr>
+          <p:spPr>
+            <a:xfrm>
+              <a:off x="5349081" y="1495425"/>
+              <a:ext cx="2971799" cy="2285999"/>
+            </a:xfrm>
+            <a:prstGeom prst="rect">
+              <a:avLst/>
+            </a:prstGeom>
+            <a:solidFill>
+              <a:srgbClr val="FFFFFF">
+                <a:alpha val="100000"/>
+              </a:srgbClr>
+            </a:solidFill>
+            <a:ln w="13550" cap="rnd">
+              <a:solidFill>
+                <a:srgbClr val="FFFFFF">
+                  <a:alpha val="100000"/>
+                </a:srgbClr>
+              </a:solidFill>
+              <a:prstDash val="solid"/>
+              <a:round/>
+            </a:ln>
+          </p:spPr>
+          <p:txBody>
+            <a:bodyPr/>
+            <a:lstStyle/>
+            <a:p/>
+          </p:txBody>
+        </p:sp>
+        <p:sp>
+          <p:nvSpPr>
+            <p:cNvPr id="53" name="rc53"/>
+            <p:cNvSpPr/>
+            <p:nvPr/>
+          </p:nvSpPr>
+          <p:spPr>
+            <a:xfrm>
+              <a:off x="5778020" y="1565014"/>
+              <a:ext cx="2473272" cy="1806522"/>
+            </a:xfrm>
+            <a:prstGeom prst="rect">
+              <a:avLst/>
+            </a:prstGeom>
+            <a:solidFill>
+              <a:srgbClr val="FFFFFF">
+                <a:alpha val="100000"/>
+              </a:srgbClr>
+            </a:solidFill>
+          </p:spPr>
+          <p:txBody>
+            <a:bodyPr/>
+            <a:lstStyle/>
+            <a:p/>
+          </p:txBody>
+        </p:sp>
+        <p:sp>
+          <p:nvSpPr>
+            <p:cNvPr id="54" name="pl54"/>
+            <p:cNvSpPr/>
+            <p:nvPr/>
+          </p:nvSpPr>
+          <p:spPr>
+            <a:xfrm>
+              <a:off x="5778020" y="3015706"/>
+              <a:ext cx="2473272" cy="0"/>
+            </a:xfrm>
+            <a:custGeom>
+              <a:avLst/>
+              <a:pathLst>
+                <a:path w="2473272" h="0">
+                  <a:moveTo>
+                    <a:pt x="0" y="0"/>
+                  </a:moveTo>
+                  <a:lnTo>
+                    <a:pt x="2473272" y="0"/>
+                  </a:lnTo>
+                  <a:lnTo>
+                    <a:pt x="2473272" y="0"/>
+                  </a:lnTo>
+                </a:path>
+              </a:pathLst>
+            </a:custGeom>
+            <a:ln w="6775" cap="flat">
+              <a:solidFill>
+                <a:srgbClr val="EBEBEB">
+                  <a:alpha val="100000"/>
+                </a:srgbClr>
+              </a:solidFill>
+              <a:prstDash val="solid"/>
+              <a:round/>
+            </a:ln>
+          </p:spPr>
+          <p:txBody>
+            <a:bodyPr/>
+            <a:lstStyle/>
+            <a:p/>
+          </p:txBody>
+        </p:sp>
+        <p:sp>
+          <p:nvSpPr>
+            <p:cNvPr id="55" name="pl55"/>
+            <p:cNvSpPr/>
+            <p:nvPr/>
+          </p:nvSpPr>
+          <p:spPr>
+            <a:xfrm>
+              <a:off x="5778020" y="2468275"/>
+              <a:ext cx="2473272" cy="0"/>
+            </a:xfrm>
+            <a:custGeom>
+              <a:avLst/>
+              <a:pathLst>
+                <a:path w="2473272" h="0">
+                  <a:moveTo>
+                    <a:pt x="0" y="0"/>
+                  </a:moveTo>
+                  <a:lnTo>
+                    <a:pt x="2473272" y="0"/>
+                  </a:lnTo>
+                  <a:lnTo>
+                    <a:pt x="2473272" y="0"/>
+                  </a:lnTo>
+                </a:path>
+              </a:pathLst>
+            </a:custGeom>
+            <a:ln w="6775" cap="flat">
+              <a:solidFill>
+                <a:srgbClr val="EBEBEB">
+                  <a:alpha val="100000"/>
+                </a:srgbClr>
+              </a:solidFill>
+              <a:prstDash val="solid"/>
+              <a:round/>
+            </a:ln>
+          </p:spPr>
+          <p:txBody>
+            <a:bodyPr/>
+            <a:lstStyle/>
+            <a:p/>
+          </p:txBody>
+        </p:sp>
+        <p:sp>
+          <p:nvSpPr>
+            <p:cNvPr id="56" name="pl56"/>
+            <p:cNvSpPr/>
+            <p:nvPr/>
+          </p:nvSpPr>
+          <p:spPr>
+            <a:xfrm>
+              <a:off x="5778020" y="1920844"/>
+              <a:ext cx="2473272" cy="0"/>
+            </a:xfrm>
+            <a:custGeom>
+              <a:avLst/>
+              <a:pathLst>
+                <a:path w="2473272" h="0">
+                  <a:moveTo>
+                    <a:pt x="0" y="0"/>
+                  </a:moveTo>
+                  <a:lnTo>
+                    <a:pt x="2473272" y="0"/>
+                  </a:lnTo>
+                  <a:lnTo>
+                    <a:pt x="2473272" y="0"/>
+                  </a:lnTo>
+                </a:path>
+              </a:pathLst>
+            </a:custGeom>
+            <a:ln w="6775" cap="flat">
+              <a:solidFill>
+                <a:srgbClr val="EBEBEB">
+                  <a:alpha val="100000"/>
+                </a:srgbClr>
+              </a:solidFill>
+              <a:prstDash val="solid"/>
+              <a:round/>
+            </a:ln>
+          </p:spPr>
+          <p:txBody>
+            <a:bodyPr/>
+            <a:lstStyle/>
+            <a:p/>
+          </p:txBody>
+        </p:sp>
+        <p:sp>
+          <p:nvSpPr>
+            <p:cNvPr id="57" name="pl57"/>
+            <p:cNvSpPr/>
+            <p:nvPr/>
+          </p:nvSpPr>
+          <p:spPr>
+            <a:xfrm>
+              <a:off x="6265179" y="1565014"/>
+              <a:ext cx="0" cy="1806522"/>
+            </a:xfrm>
+            <a:custGeom>
+              <a:avLst/>
+              <a:pathLst>
+                <a:path w="0" h="1806522">
+                  <a:moveTo>
+                    <a:pt x="0" y="1806522"/>
+                  </a:moveTo>
+                  <a:lnTo>
+                    <a:pt x="0" y="0"/>
+                  </a:lnTo>
+                  <a:lnTo>
+                    <a:pt x="0" y="0"/>
+                  </a:lnTo>
+                </a:path>
+              </a:pathLst>
+            </a:custGeom>
+            <a:ln w="6775" cap="flat">
+              <a:solidFill>
+                <a:srgbClr val="EBEBEB">
+                  <a:alpha val="100000"/>
+                </a:srgbClr>
+              </a:solidFill>
+              <a:prstDash val="solid"/>
+              <a:round/>
+            </a:ln>
+          </p:spPr>
+          <p:txBody>
+            <a:bodyPr/>
+            <a:lstStyle/>
+            <a:p/>
+          </p:txBody>
+        </p:sp>
+        <p:sp>
+          <p:nvSpPr>
+            <p:cNvPr id="58" name="pl58"/>
+            <p:cNvSpPr/>
+            <p:nvPr/>
+          </p:nvSpPr>
+          <p:spPr>
+            <a:xfrm>
+              <a:off x="7014656" y="1565014"/>
+              <a:ext cx="0" cy="1806522"/>
+            </a:xfrm>
+            <a:custGeom>
+              <a:avLst/>
+              <a:pathLst>
+                <a:path w="0" h="1806522">
+                  <a:moveTo>
+                    <a:pt x="0" y="1806522"/>
+                  </a:moveTo>
+                  <a:lnTo>
+                    <a:pt x="0" y="0"/>
+                  </a:lnTo>
+                  <a:lnTo>
+                    <a:pt x="0" y="0"/>
+                  </a:lnTo>
+                </a:path>
+              </a:pathLst>
+            </a:custGeom>
+            <a:ln w="6775" cap="flat">
+              <a:solidFill>
+                <a:srgbClr val="EBEBEB">
+                  <a:alpha val="100000"/>
+                </a:srgbClr>
+              </a:solidFill>
+              <a:prstDash val="solid"/>
+              <a:round/>
+            </a:ln>
+          </p:spPr>
+          <p:txBody>
+            <a:bodyPr/>
+            <a:lstStyle/>
+            <a:p/>
+          </p:txBody>
+        </p:sp>
+        <p:sp>
+          <p:nvSpPr>
+            <p:cNvPr id="59" name="pl59"/>
+            <p:cNvSpPr/>
+            <p:nvPr/>
+          </p:nvSpPr>
+          <p:spPr>
+            <a:xfrm>
+              <a:off x="7764132" y="1565014"/>
+              <a:ext cx="0" cy="1806522"/>
+            </a:xfrm>
+            <a:custGeom>
+              <a:avLst/>
+              <a:pathLst>
+                <a:path w="0" h="1806522">
+                  <a:moveTo>
+                    <a:pt x="0" y="1806522"/>
+                  </a:moveTo>
+                  <a:lnTo>
+                    <a:pt x="0" y="0"/>
+                  </a:lnTo>
+                  <a:lnTo>
+                    <a:pt x="0" y="0"/>
+                  </a:lnTo>
+                </a:path>
+              </a:pathLst>
+            </a:custGeom>
+            <a:ln w="6775" cap="flat">
+              <a:solidFill>
+                <a:srgbClr val="EBEBEB">
+                  <a:alpha val="100000"/>
+                </a:srgbClr>
+              </a:solidFill>
+              <a:prstDash val="solid"/>
+              <a:round/>
+            </a:ln>
+          </p:spPr>
+          <p:txBody>
+            <a:bodyPr/>
+            <a:lstStyle/>
+            <a:p/>
+          </p:txBody>
+        </p:sp>
+        <p:sp>
+          <p:nvSpPr>
+            <p:cNvPr id="60" name="pl60"/>
+            <p:cNvSpPr/>
+            <p:nvPr/>
+          </p:nvSpPr>
+          <p:spPr>
+            <a:xfrm>
+              <a:off x="5778020" y="3289421"/>
+              <a:ext cx="2473272" cy="0"/>
+            </a:xfrm>
+            <a:custGeom>
+              <a:avLst/>
+              <a:pathLst>
+                <a:path w="2473272" h="0">
+                  <a:moveTo>
+                    <a:pt x="0" y="0"/>
+                  </a:moveTo>
+                  <a:lnTo>
+                    <a:pt x="2473272" y="0"/>
+                  </a:lnTo>
+                  <a:lnTo>
+                    <a:pt x="2473272" y="0"/>
+                  </a:lnTo>
+                </a:path>
+              </a:pathLst>
+            </a:custGeom>
+            <a:ln w="13550" cap="flat">
+              <a:solidFill>
+                <a:srgbClr val="EBEBEB">
+                  <a:alpha val="100000"/>
+                </a:srgbClr>
+              </a:solidFill>
+              <a:prstDash val="solid"/>
+              <a:round/>
+            </a:ln>
+          </p:spPr>
+          <p:txBody>
+            <a:bodyPr/>
+            <a:lstStyle/>
+            <a:p/>
+          </p:txBody>
+        </p:sp>
+        <p:sp>
+          <p:nvSpPr>
+            <p:cNvPr id="61" name="pl61"/>
+            <p:cNvSpPr/>
+            <p:nvPr/>
+          </p:nvSpPr>
+          <p:spPr>
+            <a:xfrm>
+              <a:off x="5778020" y="2741990"/>
+              <a:ext cx="2473272" cy="0"/>
+            </a:xfrm>
+            <a:custGeom>
+              <a:avLst/>
+              <a:pathLst>
+                <a:path w="2473272" h="0">
+                  <a:moveTo>
+                    <a:pt x="0" y="0"/>
+                  </a:moveTo>
+                  <a:lnTo>
+                    <a:pt x="2473272" y="0"/>
+                  </a:lnTo>
+                  <a:lnTo>
+                    <a:pt x="2473272" y="0"/>
+                  </a:lnTo>
+                </a:path>
+              </a:pathLst>
+            </a:custGeom>
+            <a:ln w="13550" cap="flat">
+              <a:solidFill>
+                <a:srgbClr val="EBEBEB">
+                  <a:alpha val="100000"/>
+                </a:srgbClr>
+              </a:solidFill>
+              <a:prstDash val="solid"/>
+              <a:round/>
+            </a:ln>
+          </p:spPr>
+          <p:txBody>
+            <a:bodyPr/>
+            <a:lstStyle/>
+            <a:p/>
+          </p:txBody>
+        </p:sp>
+        <p:sp>
+          <p:nvSpPr>
+            <p:cNvPr id="62" name="pl62"/>
+            <p:cNvSpPr/>
+            <p:nvPr/>
+          </p:nvSpPr>
+          <p:spPr>
+            <a:xfrm>
+              <a:off x="5778020" y="2194559"/>
+              <a:ext cx="2473272" cy="0"/>
+            </a:xfrm>
+            <a:custGeom>
+              <a:avLst/>
+              <a:pathLst>
+                <a:path w="2473272" h="0">
+                  <a:moveTo>
+                    <a:pt x="0" y="0"/>
+                  </a:moveTo>
+                  <a:lnTo>
+                    <a:pt x="2473272" y="0"/>
+                  </a:lnTo>
+                  <a:lnTo>
+                    <a:pt x="2473272" y="0"/>
+                  </a:lnTo>
+                </a:path>
+              </a:pathLst>
+            </a:custGeom>
+            <a:ln w="13550" cap="flat">
+              <a:solidFill>
+                <a:srgbClr val="EBEBEB">
+                  <a:alpha val="100000"/>
+                </a:srgbClr>
+              </a:solidFill>
+              <a:prstDash val="solid"/>
+              <a:round/>
+            </a:ln>
+          </p:spPr>
+          <p:txBody>
+            <a:bodyPr/>
+            <a:lstStyle/>
+            <a:p/>
+          </p:txBody>
+        </p:sp>
+        <p:sp>
+          <p:nvSpPr>
+            <p:cNvPr id="63" name="pl63"/>
+            <p:cNvSpPr/>
+            <p:nvPr/>
+          </p:nvSpPr>
+          <p:spPr>
+            <a:xfrm>
+              <a:off x="5778020" y="1647128"/>
+              <a:ext cx="2473272" cy="0"/>
+            </a:xfrm>
+            <a:custGeom>
+              <a:avLst/>
+              <a:pathLst>
+                <a:path w="2473272" h="0">
+                  <a:moveTo>
+                    <a:pt x="0" y="0"/>
+                  </a:moveTo>
+                  <a:lnTo>
+                    <a:pt x="2473272" y="0"/>
+                  </a:lnTo>
+                  <a:lnTo>
+                    <a:pt x="2473272" y="0"/>
+                  </a:lnTo>
+                </a:path>
+              </a:pathLst>
+            </a:custGeom>
+            <a:ln w="13550" cap="flat">
+              <a:solidFill>
+                <a:srgbClr val="EBEBEB">
+                  <a:alpha val="100000"/>
+                </a:srgbClr>
+              </a:solidFill>
+              <a:prstDash val="solid"/>
+              <a:round/>
+            </a:ln>
+          </p:spPr>
+          <p:txBody>
+            <a:bodyPr/>
+            <a:lstStyle/>
+            <a:p/>
+          </p:txBody>
+        </p:sp>
+        <p:sp>
+          <p:nvSpPr>
+            <p:cNvPr id="64" name="pl64"/>
+            <p:cNvSpPr/>
+            <p:nvPr/>
+          </p:nvSpPr>
+          <p:spPr>
+            <a:xfrm>
+              <a:off x="5890441" y="1565014"/>
+              <a:ext cx="0" cy="1806522"/>
+            </a:xfrm>
+            <a:custGeom>
+              <a:avLst/>
+              <a:pathLst>
+                <a:path w="0" h="1806522">
+                  <a:moveTo>
+                    <a:pt x="0" y="1806522"/>
+                  </a:moveTo>
+                  <a:lnTo>
+                    <a:pt x="0" y="0"/>
+                  </a:lnTo>
+                  <a:lnTo>
+                    <a:pt x="0" y="0"/>
+                  </a:lnTo>
+                </a:path>
+              </a:pathLst>
+            </a:custGeom>
+            <a:ln w="13550" cap="flat">
+              <a:solidFill>
+                <a:srgbClr val="EBEBEB">
+                  <a:alpha val="100000"/>
+                </a:srgbClr>
+              </a:solidFill>
+              <a:prstDash val="solid"/>
+              <a:round/>
+            </a:ln>
+          </p:spPr>
+          <p:txBody>
+            <a:bodyPr/>
+            <a:lstStyle/>
+            <a:p/>
+          </p:txBody>
+        </p:sp>
+        <p:sp>
+          <p:nvSpPr>
+            <p:cNvPr id="65" name="pl65"/>
+            <p:cNvSpPr/>
+            <p:nvPr/>
+          </p:nvSpPr>
+          <p:spPr>
+            <a:xfrm>
+              <a:off x="6639918" y="1565014"/>
+              <a:ext cx="0" cy="1806522"/>
+            </a:xfrm>
+            <a:custGeom>
+              <a:avLst/>
+              <a:pathLst>
+                <a:path w="0" h="1806522">
+                  <a:moveTo>
+                    <a:pt x="0" y="1806522"/>
+                  </a:moveTo>
+                  <a:lnTo>
+                    <a:pt x="0" y="0"/>
+                  </a:lnTo>
+                  <a:lnTo>
+                    <a:pt x="0" y="0"/>
+                  </a:lnTo>
+                </a:path>
+              </a:pathLst>
+            </a:custGeom>
+            <a:ln w="13550" cap="flat">
+              <a:solidFill>
+                <a:srgbClr val="EBEBEB">
+                  <a:alpha val="100000"/>
+                </a:srgbClr>
+              </a:solidFill>
+              <a:prstDash val="solid"/>
+              <a:round/>
+            </a:ln>
+          </p:spPr>
+          <p:txBody>
+            <a:bodyPr/>
+            <a:lstStyle/>
+            <a:p/>
+          </p:txBody>
+        </p:sp>
+        <p:sp>
+          <p:nvSpPr>
+            <p:cNvPr id="66" name="pl66"/>
+            <p:cNvSpPr/>
+            <p:nvPr/>
+          </p:nvSpPr>
+          <p:spPr>
+            <a:xfrm>
+              <a:off x="7389394" y="1565014"/>
+              <a:ext cx="0" cy="1806522"/>
+            </a:xfrm>
+            <a:custGeom>
+              <a:avLst/>
+              <a:pathLst>
+                <a:path w="0" h="1806522">
+                  <a:moveTo>
+                    <a:pt x="0" y="1806522"/>
+                  </a:moveTo>
+                  <a:lnTo>
+                    <a:pt x="0" y="0"/>
+                  </a:lnTo>
+                  <a:lnTo>
+                    <a:pt x="0" y="0"/>
+                  </a:lnTo>
+                </a:path>
+              </a:pathLst>
+            </a:custGeom>
+            <a:ln w="13550" cap="flat">
+              <a:solidFill>
+                <a:srgbClr val="EBEBEB">
+                  <a:alpha val="100000"/>
+                </a:srgbClr>
+              </a:solidFill>
+              <a:prstDash val="solid"/>
+              <a:round/>
+            </a:ln>
+          </p:spPr>
+          <p:txBody>
+            <a:bodyPr/>
+            <a:lstStyle/>
+            <a:p/>
+          </p:txBody>
+        </p:sp>
+        <p:sp>
+          <p:nvSpPr>
+            <p:cNvPr id="67" name="pl67"/>
+            <p:cNvSpPr/>
+            <p:nvPr/>
+          </p:nvSpPr>
+          <p:spPr>
+            <a:xfrm>
+              <a:off x="8138870" y="1565014"/>
+              <a:ext cx="0" cy="1806522"/>
+            </a:xfrm>
+            <a:custGeom>
+              <a:avLst/>
+              <a:pathLst>
+                <a:path w="0" h="1806522">
+                  <a:moveTo>
+                    <a:pt x="0" y="1806522"/>
+                  </a:moveTo>
+                  <a:lnTo>
+                    <a:pt x="0" y="0"/>
+                  </a:lnTo>
+                  <a:lnTo>
+                    <a:pt x="0" y="0"/>
+                  </a:lnTo>
+                </a:path>
+              </a:pathLst>
+            </a:custGeom>
+            <a:ln w="13550" cap="flat">
+              <a:solidFill>
+                <a:srgbClr val="EBEBEB">
+                  <a:alpha val="100000"/>
+                </a:srgbClr>
+              </a:solidFill>
+              <a:prstDash val="solid"/>
+              <a:round/>
+            </a:ln>
+          </p:spPr>
+          <p:txBody>
+            <a:bodyPr/>
+            <a:lstStyle/>
+            <a:p/>
+          </p:txBody>
+        </p:sp>
+        <p:sp>
+          <p:nvSpPr>
+            <p:cNvPr id="68" name="pl68"/>
+            <p:cNvSpPr/>
+            <p:nvPr/>
+          </p:nvSpPr>
+          <p:spPr>
+            <a:xfrm>
+              <a:off x="5778020" y="1565014"/>
+              <a:ext cx="2473272" cy="1806522"/>
+            </a:xfrm>
+            <a:custGeom>
+              <a:avLst/>
+              <a:pathLst>
+                <a:path w="2473272" h="1806522">
+                  <a:moveTo>
+                    <a:pt x="0" y="1806522"/>
+                  </a:moveTo>
+                  <a:lnTo>
+                    <a:pt x="0" y="1806522"/>
+                  </a:lnTo>
+                  <a:lnTo>
+                    <a:pt x="2473272" y="0"/>
+                  </a:lnTo>
+                  <a:lnTo>
+                    <a:pt x="2473272" y="0"/>
+                  </a:lnTo>
+                </a:path>
+              </a:pathLst>
+            </a:custGeom>
+            <a:ln w="13550" cap="flat">
+              <a:solidFill>
+                <a:srgbClr val="000000">
+                  <a:alpha val="100000"/>
+                </a:srgbClr>
+              </a:solidFill>
+              <a:prstDash val="dash"/>
+              <a:round/>
+            </a:ln>
+          </p:spPr>
+          <p:txBody>
+            <a:bodyPr/>
+            <a:lstStyle/>
+            <a:p/>
+          </p:txBody>
+        </p:sp>
+        <p:sp>
+          <p:nvSpPr>
+            <p:cNvPr id="69" name="pg69"/>
+            <p:cNvSpPr/>
+            <p:nvPr/>
+          </p:nvSpPr>
+          <p:spPr>
+            <a:xfrm>
+              <a:off x="6639918" y="3015706"/>
+              <a:ext cx="1298964" cy="355830"/>
+            </a:xfrm>
+            <a:custGeom>
+              <a:avLst/>
+              <a:pathLst>
+                <a:path w="1298964" h="355830">
+                  <a:moveTo>
+                    <a:pt x="1298964" y="355830"/>
+                  </a:moveTo>
+                  <a:lnTo>
+                    <a:pt x="1298964" y="25146"/>
+                  </a:lnTo>
+                  <a:lnTo>
+                    <a:pt x="1298638" y="21112"/>
+                  </a:lnTo>
+                  <a:lnTo>
+                    <a:pt x="1297670" y="17183"/>
+                  </a:lnTo>
+                  <a:lnTo>
+                    <a:pt x="1296084" y="13460"/>
+                  </a:lnTo>
+                  <a:lnTo>
+                    <a:pt x="1293921" y="10039"/>
+                  </a:lnTo>
+                  <a:lnTo>
+                    <a:pt x="1291237" y="7010"/>
+                  </a:lnTo>
+                  <a:lnTo>
+                    <a:pt x="1288102" y="4451"/>
+                  </a:lnTo>
+                  <a:lnTo>
+                    <a:pt x="1284598" y="2427"/>
+                  </a:lnTo>
+                  <a:lnTo>
+                    <a:pt x="1280814" y="992"/>
+                  </a:lnTo>
+                  <a:lnTo>
+                    <a:pt x="1276849" y="183"/>
+                  </a:lnTo>
+                  <a:lnTo>
+                    <a:pt x="1273818" y="0"/>
+                  </a:lnTo>
+                  <a:lnTo>
+                    <a:pt x="25146" y="0"/>
+                  </a:lnTo>
+                  <a:lnTo>
+                    <a:pt x="28177" y="183"/>
+                  </a:lnTo>
+                  <a:lnTo>
+                    <a:pt x="24133" y="20"/>
+                  </a:lnTo>
+                  <a:lnTo>
+                    <a:pt x="20116" y="508"/>
+                  </a:lnTo>
+                  <a:lnTo>
+                    <a:pt x="16229" y="1634"/>
+                  </a:lnTo>
+                  <a:lnTo>
+                    <a:pt x="12573" y="3368"/>
+                  </a:lnTo>
+                  <a:lnTo>
+                    <a:pt x="9242" y="5667"/>
+                  </a:lnTo>
+                  <a:lnTo>
+                    <a:pt x="6323" y="8471"/>
+                  </a:lnTo>
+                  <a:lnTo>
+                    <a:pt x="3892" y="11706"/>
+                  </a:lnTo>
+                  <a:lnTo>
+                    <a:pt x="2012" y="15289"/>
+                  </a:lnTo>
+                  <a:lnTo>
+                    <a:pt x="730" y="19128"/>
+                  </a:lnTo>
+                  <a:lnTo>
+                    <a:pt x="81" y="23122"/>
+                  </a:lnTo>
+                  <a:lnTo>
+                    <a:pt x="0" y="25146"/>
+                  </a:lnTo>
+                  <a:lnTo>
+                    <a:pt x="0" y="355830"/>
+                  </a:lnTo>
+                  <a:close/>
+                </a:path>
+              </a:pathLst>
+            </a:custGeom>
+            <a:solidFill>
+              <a:srgbClr val="FFD700">
+                <a:alpha val="100000"/>
+              </a:srgbClr>
+            </a:solidFill>
+            <a:ln w="6775" cap="rnd">
+              <a:solidFill>
+                <a:srgbClr val="000000">
+                  <a:alpha val="100000"/>
+                </a:srgbClr>
+              </a:solidFill>
+              <a:prstDash val="solid"/>
+              <a:round/>
+            </a:ln>
+          </p:spPr>
+          <p:txBody>
+            <a:bodyPr/>
+            <a:lstStyle/>
+            <a:p/>
+          </p:txBody>
+        </p:sp>
+        <p:sp>
+          <p:nvSpPr>
+            <p:cNvPr id="70" name="tx70"/>
+            <p:cNvSpPr/>
+            <p:nvPr/>
+          </p:nvSpPr>
+          <p:spPr>
+            <a:xfrm>
+              <a:off x="6681828" y="3027807"/>
+              <a:ext cx="1114257" cy="129809"/>
+            </a:xfrm>
+            <a:prstGeom prst="rect">
+              <a:avLst/>
+            </a:prstGeom>
+            <a:noFill/>
+          </p:spPr>
+          <p:txBody>
+            <a:bodyPr lIns="0" rIns="0" tIns="0" bIns="0" anchorCtr="1" anchor="ctr" wrap="none"/>
+            <a:lstStyle/>
             <a:p>
-              <a:pPr marL="0" marR="0" indent="0" algn="ctr">
+              <a:pPr algn="l" marL="0" marR="0" indent="0">
                 <a:lnSpc>
                   <a:spcPts val="1100"/>
                 </a:lnSpc>
@@ -5996,980 +6613,7 @@
                 </a:spcAft>
               </a:pPr>
               <a:r>
-                <a:rPr sz="1100" dirty="0">
-                  <a:solidFill>
-                    <a:srgbClr val="000000">
-                      <a:alpha val="100000"/>
-                    </a:srgbClr>
-                  </a:solidFill>
-                  <a:latin typeface="Arial"/>
-                  <a:cs typeface="Arial"/>
-                </a:rPr>
-                <a:t>  Z</a:t>
-              </a:r>
-            </a:p>
-          </p:txBody>
-        </p:sp>
-        <p:sp>
-          <p:nvSpPr>
-            <p:cNvPr id="52" name="rc52"/>
-            <p:cNvSpPr/>
-            <p:nvPr/>
-          </p:nvSpPr>
-          <p:spPr>
-            <a:xfrm>
-              <a:off x="5349081" y="1495425"/>
-              <a:ext cx="2971799" cy="2285999"/>
-            </a:xfrm>
-            <a:prstGeom prst="rect">
-              <a:avLst/>
-            </a:prstGeom>
-            <a:solidFill>
-              <a:srgbClr val="FFFFFF">
-                <a:alpha val="100000"/>
-              </a:srgbClr>
-            </a:solidFill>
-            <a:ln w="13550" cap="rnd">
-              <a:solidFill>
-                <a:srgbClr val="FFFFFF">
-                  <a:alpha val="100000"/>
-                </a:srgbClr>
-              </a:solidFill>
-              <a:prstDash val="solid"/>
-              <a:round/>
-            </a:ln>
-          </p:spPr>
-          <p:txBody>
-            <a:bodyPr/>
-            <a:lstStyle/>
-            <a:p>
-              <a:endParaRPr/>
-            </a:p>
-          </p:txBody>
-        </p:sp>
-        <p:sp>
-          <p:nvSpPr>
-            <p:cNvPr id="53" name="rc53"/>
-            <p:cNvSpPr/>
-            <p:nvPr/>
-          </p:nvSpPr>
-          <p:spPr>
-            <a:xfrm>
-              <a:off x="5778020" y="1565014"/>
-              <a:ext cx="2473272" cy="1806522"/>
-            </a:xfrm>
-            <a:prstGeom prst="rect">
-              <a:avLst/>
-            </a:prstGeom>
-            <a:solidFill>
-              <a:srgbClr val="FFFFFF">
-                <a:alpha val="100000"/>
-              </a:srgbClr>
-            </a:solidFill>
-          </p:spPr>
-          <p:txBody>
-            <a:bodyPr/>
-            <a:lstStyle/>
-            <a:p>
-              <a:endParaRPr/>
-            </a:p>
-          </p:txBody>
-        </p:sp>
-        <p:sp>
-          <p:nvSpPr>
-            <p:cNvPr id="54" name="pl54"/>
-            <p:cNvSpPr/>
-            <p:nvPr/>
-          </p:nvSpPr>
-          <p:spPr>
-            <a:xfrm>
-              <a:off x="5778020" y="3015706"/>
-              <a:ext cx="2473272" cy="0"/>
-            </a:xfrm>
-            <a:custGeom>
-              <a:avLst/>
-              <a:gdLst/>
-              <a:ahLst/>
-              <a:cxnLst/>
-              <a:rect l="0" t="0" r="0" b="0"/>
-              <a:pathLst>
-                <a:path w="2473272">
-                  <a:moveTo>
-                    <a:pt x="0" y="0"/>
-                  </a:moveTo>
-                  <a:lnTo>
-                    <a:pt x="2473272" y="0"/>
-                  </a:lnTo>
-                  <a:lnTo>
-                    <a:pt x="2473272" y="0"/>
-                  </a:lnTo>
-                </a:path>
-              </a:pathLst>
-            </a:custGeom>
-            <a:ln w="6775" cap="flat">
-              <a:solidFill>
-                <a:srgbClr val="EBEBEB">
-                  <a:alpha val="100000"/>
-                </a:srgbClr>
-              </a:solidFill>
-              <a:prstDash val="solid"/>
-              <a:round/>
-            </a:ln>
-          </p:spPr>
-          <p:txBody>
-            <a:bodyPr/>
-            <a:lstStyle/>
-            <a:p>
-              <a:endParaRPr/>
-            </a:p>
-          </p:txBody>
-        </p:sp>
-        <p:sp>
-          <p:nvSpPr>
-            <p:cNvPr id="55" name="pl55"/>
-            <p:cNvSpPr/>
-            <p:nvPr/>
-          </p:nvSpPr>
-          <p:spPr>
-            <a:xfrm>
-              <a:off x="5778020" y="2468275"/>
-              <a:ext cx="2473272" cy="0"/>
-            </a:xfrm>
-            <a:custGeom>
-              <a:avLst/>
-              <a:gdLst/>
-              <a:ahLst/>
-              <a:cxnLst/>
-              <a:rect l="0" t="0" r="0" b="0"/>
-              <a:pathLst>
-                <a:path w="2473272">
-                  <a:moveTo>
-                    <a:pt x="0" y="0"/>
-                  </a:moveTo>
-                  <a:lnTo>
-                    <a:pt x="2473272" y="0"/>
-                  </a:lnTo>
-                  <a:lnTo>
-                    <a:pt x="2473272" y="0"/>
-                  </a:lnTo>
-                </a:path>
-              </a:pathLst>
-            </a:custGeom>
-            <a:ln w="6775" cap="flat">
-              <a:solidFill>
-                <a:srgbClr val="EBEBEB">
-                  <a:alpha val="100000"/>
-                </a:srgbClr>
-              </a:solidFill>
-              <a:prstDash val="solid"/>
-              <a:round/>
-            </a:ln>
-          </p:spPr>
-          <p:txBody>
-            <a:bodyPr/>
-            <a:lstStyle/>
-            <a:p>
-              <a:endParaRPr/>
-            </a:p>
-          </p:txBody>
-        </p:sp>
-        <p:sp>
-          <p:nvSpPr>
-            <p:cNvPr id="56" name="pl56"/>
-            <p:cNvSpPr/>
-            <p:nvPr/>
-          </p:nvSpPr>
-          <p:spPr>
-            <a:xfrm>
-              <a:off x="5778020" y="1920844"/>
-              <a:ext cx="2473272" cy="0"/>
-            </a:xfrm>
-            <a:custGeom>
-              <a:avLst/>
-              <a:gdLst/>
-              <a:ahLst/>
-              <a:cxnLst/>
-              <a:rect l="0" t="0" r="0" b="0"/>
-              <a:pathLst>
-                <a:path w="2473272">
-                  <a:moveTo>
-                    <a:pt x="0" y="0"/>
-                  </a:moveTo>
-                  <a:lnTo>
-                    <a:pt x="2473272" y="0"/>
-                  </a:lnTo>
-                  <a:lnTo>
-                    <a:pt x="2473272" y="0"/>
-                  </a:lnTo>
-                </a:path>
-              </a:pathLst>
-            </a:custGeom>
-            <a:ln w="6775" cap="flat">
-              <a:solidFill>
-                <a:srgbClr val="EBEBEB">
-                  <a:alpha val="100000"/>
-                </a:srgbClr>
-              </a:solidFill>
-              <a:prstDash val="solid"/>
-              <a:round/>
-            </a:ln>
-          </p:spPr>
-          <p:txBody>
-            <a:bodyPr/>
-            <a:lstStyle/>
-            <a:p>
-              <a:endParaRPr/>
-            </a:p>
-          </p:txBody>
-        </p:sp>
-        <p:sp>
-          <p:nvSpPr>
-            <p:cNvPr id="57" name="pl57"/>
-            <p:cNvSpPr/>
-            <p:nvPr/>
-          </p:nvSpPr>
-          <p:spPr>
-            <a:xfrm>
-              <a:off x="6265179" y="1565014"/>
-              <a:ext cx="0" cy="1806522"/>
-            </a:xfrm>
-            <a:custGeom>
-              <a:avLst/>
-              <a:gdLst/>
-              <a:ahLst/>
-              <a:cxnLst/>
-              <a:rect l="0" t="0" r="0" b="0"/>
-              <a:pathLst>
-                <a:path h="1806522">
-                  <a:moveTo>
-                    <a:pt x="0" y="1806522"/>
-                  </a:moveTo>
-                  <a:lnTo>
-                    <a:pt x="0" y="0"/>
-                  </a:lnTo>
-                  <a:lnTo>
-                    <a:pt x="0" y="0"/>
-                  </a:lnTo>
-                </a:path>
-              </a:pathLst>
-            </a:custGeom>
-            <a:ln w="6775" cap="flat">
-              <a:solidFill>
-                <a:srgbClr val="EBEBEB">
-                  <a:alpha val="100000"/>
-                </a:srgbClr>
-              </a:solidFill>
-              <a:prstDash val="solid"/>
-              <a:round/>
-            </a:ln>
-          </p:spPr>
-          <p:txBody>
-            <a:bodyPr/>
-            <a:lstStyle/>
-            <a:p>
-              <a:endParaRPr/>
-            </a:p>
-          </p:txBody>
-        </p:sp>
-        <p:sp>
-          <p:nvSpPr>
-            <p:cNvPr id="58" name="pl58"/>
-            <p:cNvSpPr/>
-            <p:nvPr/>
-          </p:nvSpPr>
-          <p:spPr>
-            <a:xfrm>
-              <a:off x="7014656" y="1565014"/>
-              <a:ext cx="0" cy="1806522"/>
-            </a:xfrm>
-            <a:custGeom>
-              <a:avLst/>
-              <a:gdLst/>
-              <a:ahLst/>
-              <a:cxnLst/>
-              <a:rect l="0" t="0" r="0" b="0"/>
-              <a:pathLst>
-                <a:path h="1806522">
-                  <a:moveTo>
-                    <a:pt x="0" y="1806522"/>
-                  </a:moveTo>
-                  <a:lnTo>
-                    <a:pt x="0" y="0"/>
-                  </a:lnTo>
-                  <a:lnTo>
-                    <a:pt x="0" y="0"/>
-                  </a:lnTo>
-                </a:path>
-              </a:pathLst>
-            </a:custGeom>
-            <a:ln w="6775" cap="flat">
-              <a:solidFill>
-                <a:srgbClr val="EBEBEB">
-                  <a:alpha val="100000"/>
-                </a:srgbClr>
-              </a:solidFill>
-              <a:prstDash val="solid"/>
-              <a:round/>
-            </a:ln>
-          </p:spPr>
-          <p:txBody>
-            <a:bodyPr/>
-            <a:lstStyle/>
-            <a:p>
-              <a:endParaRPr/>
-            </a:p>
-          </p:txBody>
-        </p:sp>
-        <p:sp>
-          <p:nvSpPr>
-            <p:cNvPr id="59" name="pl59"/>
-            <p:cNvSpPr/>
-            <p:nvPr/>
-          </p:nvSpPr>
-          <p:spPr>
-            <a:xfrm>
-              <a:off x="7764132" y="1565014"/>
-              <a:ext cx="0" cy="1806522"/>
-            </a:xfrm>
-            <a:custGeom>
-              <a:avLst/>
-              <a:gdLst/>
-              <a:ahLst/>
-              <a:cxnLst/>
-              <a:rect l="0" t="0" r="0" b="0"/>
-              <a:pathLst>
-                <a:path h="1806522">
-                  <a:moveTo>
-                    <a:pt x="0" y="1806522"/>
-                  </a:moveTo>
-                  <a:lnTo>
-                    <a:pt x="0" y="0"/>
-                  </a:lnTo>
-                  <a:lnTo>
-                    <a:pt x="0" y="0"/>
-                  </a:lnTo>
-                </a:path>
-              </a:pathLst>
-            </a:custGeom>
-            <a:ln w="6775" cap="flat">
-              <a:solidFill>
-                <a:srgbClr val="EBEBEB">
-                  <a:alpha val="100000"/>
-                </a:srgbClr>
-              </a:solidFill>
-              <a:prstDash val="solid"/>
-              <a:round/>
-            </a:ln>
-          </p:spPr>
-          <p:txBody>
-            <a:bodyPr/>
-            <a:lstStyle/>
-            <a:p>
-              <a:endParaRPr/>
-            </a:p>
-          </p:txBody>
-        </p:sp>
-        <p:sp>
-          <p:nvSpPr>
-            <p:cNvPr id="60" name="pl60"/>
-            <p:cNvSpPr/>
-            <p:nvPr/>
-          </p:nvSpPr>
-          <p:spPr>
-            <a:xfrm>
-              <a:off x="5778020" y="3289421"/>
-              <a:ext cx="2473272" cy="0"/>
-            </a:xfrm>
-            <a:custGeom>
-              <a:avLst/>
-              <a:gdLst/>
-              <a:ahLst/>
-              <a:cxnLst/>
-              <a:rect l="0" t="0" r="0" b="0"/>
-              <a:pathLst>
-                <a:path w="2473272">
-                  <a:moveTo>
-                    <a:pt x="0" y="0"/>
-                  </a:moveTo>
-                  <a:lnTo>
-                    <a:pt x="2473272" y="0"/>
-                  </a:lnTo>
-                  <a:lnTo>
-                    <a:pt x="2473272" y="0"/>
-                  </a:lnTo>
-                </a:path>
-              </a:pathLst>
-            </a:custGeom>
-            <a:ln w="13550" cap="flat">
-              <a:solidFill>
-                <a:srgbClr val="EBEBEB">
-                  <a:alpha val="100000"/>
-                </a:srgbClr>
-              </a:solidFill>
-              <a:prstDash val="solid"/>
-              <a:round/>
-            </a:ln>
-          </p:spPr>
-          <p:txBody>
-            <a:bodyPr/>
-            <a:lstStyle/>
-            <a:p>
-              <a:endParaRPr/>
-            </a:p>
-          </p:txBody>
-        </p:sp>
-        <p:sp>
-          <p:nvSpPr>
-            <p:cNvPr id="61" name="pl61"/>
-            <p:cNvSpPr/>
-            <p:nvPr/>
-          </p:nvSpPr>
-          <p:spPr>
-            <a:xfrm>
-              <a:off x="5778020" y="2741990"/>
-              <a:ext cx="2473272" cy="0"/>
-            </a:xfrm>
-            <a:custGeom>
-              <a:avLst/>
-              <a:gdLst/>
-              <a:ahLst/>
-              <a:cxnLst/>
-              <a:rect l="0" t="0" r="0" b="0"/>
-              <a:pathLst>
-                <a:path w="2473272">
-                  <a:moveTo>
-                    <a:pt x="0" y="0"/>
-                  </a:moveTo>
-                  <a:lnTo>
-                    <a:pt x="2473272" y="0"/>
-                  </a:lnTo>
-                  <a:lnTo>
-                    <a:pt x="2473272" y="0"/>
-                  </a:lnTo>
-                </a:path>
-              </a:pathLst>
-            </a:custGeom>
-            <a:ln w="13550" cap="flat">
-              <a:solidFill>
-                <a:srgbClr val="EBEBEB">
-                  <a:alpha val="100000"/>
-                </a:srgbClr>
-              </a:solidFill>
-              <a:prstDash val="solid"/>
-              <a:round/>
-            </a:ln>
-          </p:spPr>
-          <p:txBody>
-            <a:bodyPr/>
-            <a:lstStyle/>
-            <a:p>
-              <a:endParaRPr/>
-            </a:p>
-          </p:txBody>
-        </p:sp>
-        <p:sp>
-          <p:nvSpPr>
-            <p:cNvPr id="62" name="pl62"/>
-            <p:cNvSpPr/>
-            <p:nvPr/>
-          </p:nvSpPr>
-          <p:spPr>
-            <a:xfrm>
-              <a:off x="5778020" y="2194559"/>
-              <a:ext cx="2473272" cy="0"/>
-            </a:xfrm>
-            <a:custGeom>
-              <a:avLst/>
-              <a:gdLst/>
-              <a:ahLst/>
-              <a:cxnLst/>
-              <a:rect l="0" t="0" r="0" b="0"/>
-              <a:pathLst>
-                <a:path w="2473272">
-                  <a:moveTo>
-                    <a:pt x="0" y="0"/>
-                  </a:moveTo>
-                  <a:lnTo>
-                    <a:pt x="2473272" y="0"/>
-                  </a:lnTo>
-                  <a:lnTo>
-                    <a:pt x="2473272" y="0"/>
-                  </a:lnTo>
-                </a:path>
-              </a:pathLst>
-            </a:custGeom>
-            <a:ln w="13550" cap="flat">
-              <a:solidFill>
-                <a:srgbClr val="EBEBEB">
-                  <a:alpha val="100000"/>
-                </a:srgbClr>
-              </a:solidFill>
-              <a:prstDash val="solid"/>
-              <a:round/>
-            </a:ln>
-          </p:spPr>
-          <p:txBody>
-            <a:bodyPr/>
-            <a:lstStyle/>
-            <a:p>
-              <a:endParaRPr/>
-            </a:p>
-          </p:txBody>
-        </p:sp>
-        <p:sp>
-          <p:nvSpPr>
-            <p:cNvPr id="63" name="pl63"/>
-            <p:cNvSpPr/>
-            <p:nvPr/>
-          </p:nvSpPr>
-          <p:spPr>
-            <a:xfrm>
-              <a:off x="5778020" y="1647128"/>
-              <a:ext cx="2473272" cy="0"/>
-            </a:xfrm>
-            <a:custGeom>
-              <a:avLst/>
-              <a:gdLst/>
-              <a:ahLst/>
-              <a:cxnLst/>
-              <a:rect l="0" t="0" r="0" b="0"/>
-              <a:pathLst>
-                <a:path w="2473272">
-                  <a:moveTo>
-                    <a:pt x="0" y="0"/>
-                  </a:moveTo>
-                  <a:lnTo>
-                    <a:pt x="2473272" y="0"/>
-                  </a:lnTo>
-                  <a:lnTo>
-                    <a:pt x="2473272" y="0"/>
-                  </a:lnTo>
-                </a:path>
-              </a:pathLst>
-            </a:custGeom>
-            <a:ln w="13550" cap="flat">
-              <a:solidFill>
-                <a:srgbClr val="EBEBEB">
-                  <a:alpha val="100000"/>
-                </a:srgbClr>
-              </a:solidFill>
-              <a:prstDash val="solid"/>
-              <a:round/>
-            </a:ln>
-          </p:spPr>
-          <p:txBody>
-            <a:bodyPr/>
-            <a:lstStyle/>
-            <a:p>
-              <a:endParaRPr/>
-            </a:p>
-          </p:txBody>
-        </p:sp>
-        <p:sp>
-          <p:nvSpPr>
-            <p:cNvPr id="64" name="pl64"/>
-            <p:cNvSpPr/>
-            <p:nvPr/>
-          </p:nvSpPr>
-          <p:spPr>
-            <a:xfrm>
-              <a:off x="5890441" y="1565014"/>
-              <a:ext cx="0" cy="1806522"/>
-            </a:xfrm>
-            <a:custGeom>
-              <a:avLst/>
-              <a:gdLst/>
-              <a:ahLst/>
-              <a:cxnLst/>
-              <a:rect l="0" t="0" r="0" b="0"/>
-              <a:pathLst>
-                <a:path h="1806522">
-                  <a:moveTo>
-                    <a:pt x="0" y="1806522"/>
-                  </a:moveTo>
-                  <a:lnTo>
-                    <a:pt x="0" y="0"/>
-                  </a:lnTo>
-                  <a:lnTo>
-                    <a:pt x="0" y="0"/>
-                  </a:lnTo>
-                </a:path>
-              </a:pathLst>
-            </a:custGeom>
-            <a:ln w="13550" cap="flat">
-              <a:solidFill>
-                <a:srgbClr val="EBEBEB">
-                  <a:alpha val="100000"/>
-                </a:srgbClr>
-              </a:solidFill>
-              <a:prstDash val="solid"/>
-              <a:round/>
-            </a:ln>
-          </p:spPr>
-          <p:txBody>
-            <a:bodyPr/>
-            <a:lstStyle/>
-            <a:p>
-              <a:endParaRPr/>
-            </a:p>
-          </p:txBody>
-        </p:sp>
-        <p:sp>
-          <p:nvSpPr>
-            <p:cNvPr id="65" name="pl65"/>
-            <p:cNvSpPr/>
-            <p:nvPr/>
-          </p:nvSpPr>
-          <p:spPr>
-            <a:xfrm>
-              <a:off x="6639918" y="1565014"/>
-              <a:ext cx="0" cy="1806522"/>
-            </a:xfrm>
-            <a:custGeom>
-              <a:avLst/>
-              <a:gdLst/>
-              <a:ahLst/>
-              <a:cxnLst/>
-              <a:rect l="0" t="0" r="0" b="0"/>
-              <a:pathLst>
-                <a:path h="1806522">
-                  <a:moveTo>
-                    <a:pt x="0" y="1806522"/>
-                  </a:moveTo>
-                  <a:lnTo>
-                    <a:pt x="0" y="0"/>
-                  </a:lnTo>
-                  <a:lnTo>
-                    <a:pt x="0" y="0"/>
-                  </a:lnTo>
-                </a:path>
-              </a:pathLst>
-            </a:custGeom>
-            <a:ln w="13550" cap="flat">
-              <a:solidFill>
-                <a:srgbClr val="EBEBEB">
-                  <a:alpha val="100000"/>
-                </a:srgbClr>
-              </a:solidFill>
-              <a:prstDash val="solid"/>
-              <a:round/>
-            </a:ln>
-          </p:spPr>
-          <p:txBody>
-            <a:bodyPr/>
-            <a:lstStyle/>
-            <a:p>
-              <a:endParaRPr/>
-            </a:p>
-          </p:txBody>
-        </p:sp>
-        <p:sp>
-          <p:nvSpPr>
-            <p:cNvPr id="66" name="pl66"/>
-            <p:cNvSpPr/>
-            <p:nvPr/>
-          </p:nvSpPr>
-          <p:spPr>
-            <a:xfrm>
-              <a:off x="7389394" y="1565014"/>
-              <a:ext cx="0" cy="1806522"/>
-            </a:xfrm>
-            <a:custGeom>
-              <a:avLst/>
-              <a:gdLst/>
-              <a:ahLst/>
-              <a:cxnLst/>
-              <a:rect l="0" t="0" r="0" b="0"/>
-              <a:pathLst>
-                <a:path h="1806522">
-                  <a:moveTo>
-                    <a:pt x="0" y="1806522"/>
-                  </a:moveTo>
-                  <a:lnTo>
-                    <a:pt x="0" y="0"/>
-                  </a:lnTo>
-                  <a:lnTo>
-                    <a:pt x="0" y="0"/>
-                  </a:lnTo>
-                </a:path>
-              </a:pathLst>
-            </a:custGeom>
-            <a:ln w="13550" cap="flat">
-              <a:solidFill>
-                <a:srgbClr val="EBEBEB">
-                  <a:alpha val="100000"/>
-                </a:srgbClr>
-              </a:solidFill>
-              <a:prstDash val="solid"/>
-              <a:round/>
-            </a:ln>
-          </p:spPr>
-          <p:txBody>
-            <a:bodyPr/>
-            <a:lstStyle/>
-            <a:p>
-              <a:endParaRPr/>
-            </a:p>
-          </p:txBody>
-        </p:sp>
-        <p:sp>
-          <p:nvSpPr>
-            <p:cNvPr id="67" name="pl67"/>
-            <p:cNvSpPr/>
-            <p:nvPr/>
-          </p:nvSpPr>
-          <p:spPr>
-            <a:xfrm>
-              <a:off x="8138870" y="1565014"/>
-              <a:ext cx="0" cy="1806522"/>
-            </a:xfrm>
-            <a:custGeom>
-              <a:avLst/>
-              <a:gdLst/>
-              <a:ahLst/>
-              <a:cxnLst/>
-              <a:rect l="0" t="0" r="0" b="0"/>
-              <a:pathLst>
-                <a:path h="1806522">
-                  <a:moveTo>
-                    <a:pt x="0" y="1806522"/>
-                  </a:moveTo>
-                  <a:lnTo>
-                    <a:pt x="0" y="0"/>
-                  </a:lnTo>
-                  <a:lnTo>
-                    <a:pt x="0" y="0"/>
-                  </a:lnTo>
-                </a:path>
-              </a:pathLst>
-            </a:custGeom>
-            <a:ln w="13550" cap="flat">
-              <a:solidFill>
-                <a:srgbClr val="EBEBEB">
-                  <a:alpha val="100000"/>
-                </a:srgbClr>
-              </a:solidFill>
-              <a:prstDash val="solid"/>
-              <a:round/>
-            </a:ln>
-          </p:spPr>
-          <p:txBody>
-            <a:bodyPr/>
-            <a:lstStyle/>
-            <a:p>
-              <a:endParaRPr/>
-            </a:p>
-          </p:txBody>
-        </p:sp>
-        <p:sp>
-          <p:nvSpPr>
-            <p:cNvPr id="68" name="pl68"/>
-            <p:cNvSpPr/>
-            <p:nvPr/>
-          </p:nvSpPr>
-          <p:spPr>
-            <a:xfrm>
-              <a:off x="5778020" y="1565014"/>
-              <a:ext cx="2473272" cy="1806522"/>
-            </a:xfrm>
-            <a:custGeom>
-              <a:avLst/>
-              <a:gdLst/>
-              <a:ahLst/>
-              <a:cxnLst/>
-              <a:rect l="0" t="0" r="0" b="0"/>
-              <a:pathLst>
-                <a:path w="2473272" h="1806522">
-                  <a:moveTo>
-                    <a:pt x="0" y="1806522"/>
-                  </a:moveTo>
-                  <a:lnTo>
-                    <a:pt x="0" y="1806522"/>
-                  </a:lnTo>
-                  <a:lnTo>
-                    <a:pt x="2473272" y="0"/>
-                  </a:lnTo>
-                  <a:lnTo>
-                    <a:pt x="2473272" y="0"/>
-                  </a:lnTo>
-                </a:path>
-              </a:pathLst>
-            </a:custGeom>
-            <a:ln w="13550" cap="flat">
-              <a:solidFill>
-                <a:srgbClr val="000000">
-                  <a:alpha val="100000"/>
-                </a:srgbClr>
-              </a:solidFill>
-              <a:prstDash val="dash"/>
-              <a:round/>
-            </a:ln>
-          </p:spPr>
-          <p:txBody>
-            <a:bodyPr/>
-            <a:lstStyle/>
-            <a:p>
-              <a:endParaRPr/>
-            </a:p>
-          </p:txBody>
-        </p:sp>
-        <p:sp>
-          <p:nvSpPr>
-            <p:cNvPr id="69" name="pg69"/>
-            <p:cNvSpPr/>
-            <p:nvPr/>
-          </p:nvSpPr>
-          <p:spPr>
-            <a:xfrm>
-              <a:off x="6831171" y="2778724"/>
-              <a:ext cx="1298964" cy="355830"/>
-            </a:xfrm>
-            <a:custGeom>
-              <a:avLst/>
-              <a:gdLst/>
-              <a:ahLst/>
-              <a:cxnLst/>
-              <a:rect l="0" t="0" r="0" b="0"/>
-              <a:pathLst>
-                <a:path w="1298964" h="355830">
-                  <a:moveTo>
-                    <a:pt x="1298964" y="355830"/>
-                  </a:moveTo>
-                  <a:lnTo>
-                    <a:pt x="1298964" y="25146"/>
-                  </a:lnTo>
-                  <a:lnTo>
-                    <a:pt x="1298638" y="21112"/>
-                  </a:lnTo>
-                  <a:lnTo>
-                    <a:pt x="1297670" y="17183"/>
-                  </a:lnTo>
-                  <a:lnTo>
-                    <a:pt x="1296084" y="13460"/>
-                  </a:lnTo>
-                  <a:lnTo>
-                    <a:pt x="1293921" y="10039"/>
-                  </a:lnTo>
-                  <a:lnTo>
-                    <a:pt x="1291237" y="7010"/>
-                  </a:lnTo>
-                  <a:lnTo>
-                    <a:pt x="1288102" y="4451"/>
-                  </a:lnTo>
-                  <a:lnTo>
-                    <a:pt x="1284598" y="2427"/>
-                  </a:lnTo>
-                  <a:lnTo>
-                    <a:pt x="1280814" y="992"/>
-                  </a:lnTo>
-                  <a:lnTo>
-                    <a:pt x="1276849" y="183"/>
-                  </a:lnTo>
-                  <a:lnTo>
-                    <a:pt x="1273818" y="0"/>
-                  </a:lnTo>
-                  <a:lnTo>
-                    <a:pt x="25146" y="0"/>
-                  </a:lnTo>
-                  <a:lnTo>
-                    <a:pt x="28177" y="183"/>
-                  </a:lnTo>
-                  <a:lnTo>
-                    <a:pt x="24133" y="20"/>
-                  </a:lnTo>
-                  <a:lnTo>
-                    <a:pt x="20116" y="508"/>
-                  </a:lnTo>
-                  <a:lnTo>
-                    <a:pt x="16229" y="1634"/>
-                  </a:lnTo>
-                  <a:lnTo>
-                    <a:pt x="12573" y="3368"/>
-                  </a:lnTo>
-                  <a:lnTo>
-                    <a:pt x="9242" y="5667"/>
-                  </a:lnTo>
-                  <a:lnTo>
-                    <a:pt x="6323" y="8471"/>
-                  </a:lnTo>
-                  <a:lnTo>
-                    <a:pt x="3892" y="11706"/>
-                  </a:lnTo>
-                  <a:lnTo>
-                    <a:pt x="2012" y="15289"/>
-                  </a:lnTo>
-                  <a:lnTo>
-                    <a:pt x="730" y="19128"/>
-                  </a:lnTo>
-                  <a:lnTo>
-                    <a:pt x="81" y="23122"/>
-                  </a:lnTo>
-                  <a:lnTo>
-                    <a:pt x="0" y="25146"/>
-                  </a:lnTo>
-                  <a:lnTo>
-                    <a:pt x="0" y="355830"/>
-                  </a:lnTo>
-                  <a:close/>
-                </a:path>
-              </a:pathLst>
-            </a:custGeom>
-            <a:solidFill>
-              <a:srgbClr val="FFD700">
-                <a:alpha val="100000"/>
-              </a:srgbClr>
-            </a:solidFill>
-            <a:ln w="6775" cap="rnd">
-              <a:solidFill>
-                <a:srgbClr val="000000">
-                  <a:alpha val="100000"/>
-                </a:srgbClr>
-              </a:solidFill>
-              <a:prstDash val="solid"/>
-              <a:round/>
-            </a:ln>
-          </p:spPr>
-          <p:txBody>
-            <a:bodyPr/>
-            <a:lstStyle/>
-            <a:p>
-              <a:endParaRPr/>
-            </a:p>
-          </p:txBody>
-        </p:sp>
-        <p:sp>
-          <p:nvSpPr>
-            <p:cNvPr id="70" name="tx70"/>
-            <p:cNvSpPr/>
-            <p:nvPr/>
-          </p:nvSpPr>
-          <p:spPr>
-            <a:xfrm>
-              <a:off x="6873081" y="2790825"/>
-              <a:ext cx="1114257" cy="129809"/>
-            </a:xfrm>
-            <a:prstGeom prst="rect">
-              <a:avLst/>
-            </a:prstGeom>
-            <a:noFill/>
-          </p:spPr>
-          <p:txBody>
-            <a:bodyPr wrap="none" lIns="0" tIns="0" rIns="0" bIns="0" anchor="ctr" anchorCtr="1"/>
-            <a:lstStyle/>
-            <a:p>
-              <a:pPr marL="0" marR="0" indent="0" algn="l">
-                <a:lnSpc>
-                  <a:spcPts val="1100"/>
-                </a:lnSpc>
-                <a:spcBef>
-                  <a:spcPts val="0"/>
-                </a:spcBef>
-                <a:spcAft>
-                  <a:spcPts val="0"/>
-                </a:spcAft>
-              </a:pPr>
-              <a:r>
-                <a:rPr sz="1100" dirty="0">
+                <a:rPr sz="1100">
                   <a:solidFill>
                     <a:srgbClr val="000000">
                       <a:alpha val="100000"/>
@@ -6991,7 +6635,7 @@
           </p:nvSpPr>
           <p:spPr>
             <a:xfrm>
-              <a:off x="6873081" y="2990697"/>
+              <a:off x="6681828" y="3227679"/>
               <a:ext cx="1215144" cy="131105"/>
             </a:xfrm>
             <a:prstGeom prst="rect">
@@ -7000,10 +6644,10 @@
             <a:noFill/>
           </p:spPr>
           <p:txBody>
-            <a:bodyPr wrap="none" lIns="0" tIns="0" rIns="0" bIns="0" anchor="ctr" anchorCtr="1"/>
+            <a:bodyPr lIns="0" rIns="0" tIns="0" bIns="0" anchorCtr="1" anchor="ctr" wrap="none"/>
             <a:lstStyle/>
             <a:p>
-              <a:pPr marL="0" marR="0" indent="0" algn="l">
+              <a:pPr algn="l" marL="0" marR="0" indent="0">
                 <a:lnSpc>
                   <a:spcPts val="1100"/>
                 </a:lnSpc>
@@ -7061,9 +6705,7 @@
           <p:txBody>
             <a:bodyPr/>
             <a:lstStyle/>
-            <a:p>
-              <a:endParaRPr/>
-            </a:p>
+            <a:p/>
           </p:txBody>
         </p:sp>
         <p:sp>
@@ -7098,9 +6740,7 @@
           <p:txBody>
             <a:bodyPr/>
             <a:lstStyle/>
-            <a:p>
-              <a:endParaRPr/>
-            </a:p>
+            <a:p/>
           </p:txBody>
         </p:sp>
         <p:sp>
@@ -7135,9 +6775,7 @@
           <p:txBody>
             <a:bodyPr/>
             <a:lstStyle/>
-            <a:p>
-              <a:endParaRPr/>
-            </a:p>
+            <a:p/>
           </p:txBody>
         </p:sp>
         <p:sp>
@@ -7172,9 +6810,7 @@
           <p:txBody>
             <a:bodyPr/>
             <a:lstStyle/>
-            <a:p>
-              <a:endParaRPr/>
-            </a:p>
+            <a:p/>
           </p:txBody>
         </p:sp>
         <p:sp>
@@ -7209,9 +6845,7 @@
           <p:txBody>
             <a:bodyPr/>
             <a:lstStyle/>
-            <a:p>
-              <a:endParaRPr/>
-            </a:p>
+            <a:p/>
           </p:txBody>
         </p:sp>
         <p:sp>
@@ -7246,9 +6880,7 @@
           <p:txBody>
             <a:bodyPr/>
             <a:lstStyle/>
-            <a:p>
-              <a:endParaRPr/>
-            </a:p>
+            <a:p/>
           </p:txBody>
         </p:sp>
         <p:sp>
@@ -7283,9 +6915,7 @@
           <p:txBody>
             <a:bodyPr/>
             <a:lstStyle/>
-            <a:p>
-              <a:endParaRPr/>
-            </a:p>
+            <a:p/>
           </p:txBody>
         </p:sp>
         <p:sp>
@@ -7320,9 +6950,7 @@
           <p:txBody>
             <a:bodyPr/>
             <a:lstStyle/>
-            <a:p>
-              <a:endParaRPr/>
-            </a:p>
+            <a:p/>
           </p:txBody>
         </p:sp>
         <p:sp>
@@ -7357,9 +6985,7 @@
           <p:txBody>
             <a:bodyPr/>
             <a:lstStyle/>
-            <a:p>
-              <a:endParaRPr/>
-            </a:p>
+            <a:p/>
           </p:txBody>
         </p:sp>
         <p:sp>
@@ -7394,9 +7020,7 @@
           <p:txBody>
             <a:bodyPr/>
             <a:lstStyle/>
-            <a:p>
-              <a:endParaRPr/>
-            </a:p>
+            <a:p/>
           </p:txBody>
         </p:sp>
         <p:sp>
@@ -7431,9 +7055,7 @@
           <p:txBody>
             <a:bodyPr/>
             <a:lstStyle/>
-            <a:p>
-              <a:endParaRPr/>
-            </a:p>
+            <a:p/>
           </p:txBody>
         </p:sp>
         <p:sp>
@@ -7468,9 +7090,7 @@
           <p:txBody>
             <a:bodyPr/>
             <a:lstStyle/>
-            <a:p>
-              <a:endParaRPr/>
-            </a:p>
+            <a:p/>
           </p:txBody>
         </p:sp>
         <p:sp>
@@ -7505,9 +7125,7 @@
           <p:txBody>
             <a:bodyPr/>
             <a:lstStyle/>
-            <a:p>
-              <a:endParaRPr/>
-            </a:p>
+            <a:p/>
           </p:txBody>
         </p:sp>
         <p:sp>
@@ -7542,9 +7160,7 @@
           <p:txBody>
             <a:bodyPr/>
             <a:lstStyle/>
-            <a:p>
-              <a:endParaRPr/>
-            </a:p>
+            <a:p/>
           </p:txBody>
         </p:sp>
         <p:sp>
@@ -7579,9 +7195,7 @@
           <p:txBody>
             <a:bodyPr/>
             <a:lstStyle/>
-            <a:p>
-              <a:endParaRPr/>
-            </a:p>
+            <a:p/>
           </p:txBody>
         </p:sp>
         <p:sp>
@@ -7616,9 +7230,7 @@
           <p:txBody>
             <a:bodyPr/>
             <a:lstStyle/>
-            <a:p>
-              <a:endParaRPr/>
-            </a:p>
+            <a:p/>
           </p:txBody>
         </p:sp>
         <p:sp>
@@ -7653,9 +7265,7 @@
           <p:txBody>
             <a:bodyPr/>
             <a:lstStyle/>
-            <a:p>
-              <a:endParaRPr/>
-            </a:p>
+            <a:p/>
           </p:txBody>
         </p:sp>
         <p:sp>
@@ -7685,9 +7295,7 @@
           <p:txBody>
             <a:bodyPr/>
             <a:lstStyle/>
-            <a:p>
-              <a:endParaRPr/>
-            </a:p>
+            <a:p/>
           </p:txBody>
         </p:sp>
         <p:sp>
@@ -7707,10 +7315,10 @@
             <a:noFill/>
           </p:spPr>
           <p:txBody>
-            <a:bodyPr wrap="none" lIns="0" tIns="0" rIns="0" bIns="0" anchor="ctr" anchorCtr="1"/>
+            <a:bodyPr lIns="0" rIns="0" tIns="0" bIns="0" anchorCtr="1" anchor="ctr" wrap="none"/>
             <a:lstStyle/>
             <a:p>
-              <a:pPr marL="0" marR="0" indent="0" algn="l">
+              <a:pPr algn="l" marL="0" marR="0" indent="0">
                 <a:lnSpc>
                   <a:spcPts val="880"/>
                 </a:lnSpc>
@@ -7753,10 +7361,10 @@
             <a:noFill/>
           </p:spPr>
           <p:txBody>
-            <a:bodyPr wrap="none" lIns="0" tIns="0" rIns="0" bIns="0" anchor="ctr" anchorCtr="1"/>
+            <a:bodyPr lIns="0" rIns="0" tIns="0" bIns="0" anchorCtr="1" anchor="ctr" wrap="none"/>
             <a:lstStyle/>
             <a:p>
-              <a:pPr marL="0" marR="0" indent="0" algn="l">
+              <a:pPr algn="l" marL="0" marR="0" indent="0">
                 <a:lnSpc>
                   <a:spcPts val="880"/>
                 </a:lnSpc>
@@ -7799,10 +7407,10 @@
             <a:noFill/>
           </p:spPr>
           <p:txBody>
-            <a:bodyPr wrap="none" lIns="0" tIns="0" rIns="0" bIns="0" anchor="ctr" anchorCtr="1"/>
+            <a:bodyPr lIns="0" rIns="0" tIns="0" bIns="0" anchorCtr="1" anchor="ctr" wrap="none"/>
             <a:lstStyle/>
             <a:p>
-              <a:pPr marL="0" marR="0" indent="0" algn="l">
+              <a:pPr algn="l" marL="0" marR="0" indent="0">
                 <a:lnSpc>
                   <a:spcPts val="880"/>
                 </a:lnSpc>
@@ -7845,10 +7453,10 @@
             <a:noFill/>
           </p:spPr>
           <p:txBody>
-            <a:bodyPr wrap="none" lIns="0" tIns="0" rIns="0" bIns="0" anchor="ctr" anchorCtr="1"/>
+            <a:bodyPr lIns="0" rIns="0" tIns="0" bIns="0" anchorCtr="1" anchor="ctr" wrap="none"/>
             <a:lstStyle/>
             <a:p>
-              <a:pPr marL="0" marR="0" indent="0" algn="l">
+              <a:pPr algn="l" marL="0" marR="0" indent="0">
                 <a:lnSpc>
                   <a:spcPts val="880"/>
                 </a:lnSpc>
@@ -7887,12 +7495,8 @@
             </a:xfrm>
             <a:custGeom>
               <a:avLst/>
-              <a:gdLst/>
-              <a:ahLst/>
-              <a:cxnLst/>
-              <a:rect l="0" t="0" r="0" b="0"/>
               <a:pathLst>
-                <a:path w="34794">
+                <a:path w="34794" h="0">
                   <a:moveTo>
                     <a:pt x="0" y="0"/>
                   </a:moveTo>
@@ -7915,9 +7519,7 @@
           <p:txBody>
             <a:bodyPr/>
             <a:lstStyle/>
-            <a:p>
-              <a:endParaRPr/>
-            </a:p>
+            <a:p/>
           </p:txBody>
         </p:sp>
         <p:sp>
@@ -7933,12 +7535,8 @@
             </a:xfrm>
             <a:custGeom>
               <a:avLst/>
-              <a:gdLst/>
-              <a:ahLst/>
-              <a:cxnLst/>
-              <a:rect l="0" t="0" r="0" b="0"/>
               <a:pathLst>
-                <a:path w="34794">
+                <a:path w="34794" h="0">
                   <a:moveTo>
                     <a:pt x="0" y="0"/>
                   </a:moveTo>
@@ -7961,9 +7559,7 @@
           <p:txBody>
             <a:bodyPr/>
             <a:lstStyle/>
-            <a:p>
-              <a:endParaRPr/>
-            </a:p>
+            <a:p/>
           </p:txBody>
         </p:sp>
         <p:sp>
@@ -7979,12 +7575,8 @@
             </a:xfrm>
             <a:custGeom>
               <a:avLst/>
-              <a:gdLst/>
-              <a:ahLst/>
-              <a:cxnLst/>
-              <a:rect l="0" t="0" r="0" b="0"/>
               <a:pathLst>
-                <a:path w="34794">
+                <a:path w="34794" h="0">
                   <a:moveTo>
                     <a:pt x="0" y="0"/>
                   </a:moveTo>
@@ -8007,9 +7599,7 @@
           <p:txBody>
             <a:bodyPr/>
             <a:lstStyle/>
-            <a:p>
-              <a:endParaRPr/>
-            </a:p>
+            <a:p/>
           </p:txBody>
         </p:sp>
         <p:sp>
@@ -8025,12 +7615,8 @@
             </a:xfrm>
             <a:custGeom>
               <a:avLst/>
-              <a:gdLst/>
-              <a:ahLst/>
-              <a:cxnLst/>
-              <a:rect l="0" t="0" r="0" b="0"/>
               <a:pathLst>
-                <a:path w="34794">
+                <a:path w="34794" h="0">
                   <a:moveTo>
                     <a:pt x="0" y="0"/>
                   </a:moveTo>
@@ -8053,9 +7639,7 @@
           <p:txBody>
             <a:bodyPr/>
             <a:lstStyle/>
-            <a:p>
-              <a:endParaRPr/>
-            </a:p>
+            <a:p/>
           </p:txBody>
         </p:sp>
         <p:sp>
@@ -8071,12 +7655,8 @@
             </a:xfrm>
             <a:custGeom>
               <a:avLst/>
-              <a:gdLst/>
-              <a:ahLst/>
-              <a:cxnLst/>
-              <a:rect l="0" t="0" r="0" b="0"/>
               <a:pathLst>
-                <a:path h="34794">
+                <a:path w="0" h="34794">
                   <a:moveTo>
                     <a:pt x="0" y="34794"/>
                   </a:moveTo>
@@ -8099,9 +7679,7 @@
           <p:txBody>
             <a:bodyPr/>
             <a:lstStyle/>
-            <a:p>
-              <a:endParaRPr/>
-            </a:p>
+            <a:p/>
           </p:txBody>
         </p:sp>
         <p:sp>
@@ -8117,12 +7695,8 @@
             </a:xfrm>
             <a:custGeom>
               <a:avLst/>
-              <a:gdLst/>
-              <a:ahLst/>
-              <a:cxnLst/>
-              <a:rect l="0" t="0" r="0" b="0"/>
               <a:pathLst>
-                <a:path h="34794">
+                <a:path w="0" h="34794">
                   <a:moveTo>
                     <a:pt x="0" y="34794"/>
                   </a:moveTo>
@@ -8145,9 +7719,7 @@
           <p:txBody>
             <a:bodyPr/>
             <a:lstStyle/>
-            <a:p>
-              <a:endParaRPr/>
-            </a:p>
+            <a:p/>
           </p:txBody>
         </p:sp>
         <p:sp>
@@ -8163,12 +7735,8 @@
             </a:xfrm>
             <a:custGeom>
               <a:avLst/>
-              <a:gdLst/>
-              <a:ahLst/>
-              <a:cxnLst/>
-              <a:rect l="0" t="0" r="0" b="0"/>
               <a:pathLst>
-                <a:path h="34794">
+                <a:path w="0" h="34794">
                   <a:moveTo>
                     <a:pt x="0" y="34794"/>
                   </a:moveTo>
@@ -8191,9 +7759,7 @@
           <p:txBody>
             <a:bodyPr/>
             <a:lstStyle/>
-            <a:p>
-              <a:endParaRPr/>
-            </a:p>
+            <a:p/>
           </p:txBody>
         </p:sp>
         <p:sp>
@@ -8209,12 +7775,8 @@
             </a:xfrm>
             <a:custGeom>
               <a:avLst/>
-              <a:gdLst/>
-              <a:ahLst/>
-              <a:cxnLst/>
-              <a:rect l="0" t="0" r="0" b="0"/>
               <a:pathLst>
-                <a:path h="34794">
+                <a:path w="0" h="34794">
                   <a:moveTo>
                     <a:pt x="0" y="34794"/>
                   </a:moveTo>
@@ -8237,9 +7799,7 @@
           <p:txBody>
             <a:bodyPr/>
             <a:lstStyle/>
-            <a:p>
-              <a:endParaRPr/>
-            </a:p>
+            <a:p/>
           </p:txBody>
         </p:sp>
         <p:sp>
@@ -8259,10 +7819,10 @@
             <a:noFill/>
           </p:spPr>
           <p:txBody>
-            <a:bodyPr wrap="none" lIns="0" tIns="0" rIns="0" bIns="0" anchor="ctr" anchorCtr="1"/>
+            <a:bodyPr lIns="0" rIns="0" tIns="0" bIns="0" anchorCtr="1" anchor="ctr" wrap="none"/>
             <a:lstStyle/>
             <a:p>
-              <a:pPr marL="0" marR="0" indent="0" algn="l">
+              <a:pPr algn="l" marL="0" marR="0" indent="0">
                 <a:lnSpc>
                   <a:spcPts val="880"/>
                 </a:lnSpc>
@@ -8305,10 +7865,10 @@
             <a:noFill/>
           </p:spPr>
           <p:txBody>
-            <a:bodyPr wrap="none" lIns="0" tIns="0" rIns="0" bIns="0" anchor="ctr" anchorCtr="1"/>
+            <a:bodyPr lIns="0" rIns="0" tIns="0" bIns="0" anchorCtr="1" anchor="ctr" wrap="none"/>
             <a:lstStyle/>
             <a:p>
-              <a:pPr marL="0" marR="0" indent="0" algn="l">
+              <a:pPr algn="l" marL="0" marR="0" indent="0">
                 <a:lnSpc>
                   <a:spcPts val="880"/>
                 </a:lnSpc>
@@ -8351,10 +7911,10 @@
             <a:noFill/>
           </p:spPr>
           <p:txBody>
-            <a:bodyPr wrap="none" lIns="0" tIns="0" rIns="0" bIns="0" anchor="ctr" anchorCtr="1"/>
+            <a:bodyPr lIns="0" rIns="0" tIns="0" bIns="0" anchorCtr="1" anchor="ctr" wrap="none"/>
             <a:lstStyle/>
             <a:p>
-              <a:pPr marL="0" marR="0" indent="0" algn="l">
+              <a:pPr algn="l" marL="0" marR="0" indent="0">
                 <a:lnSpc>
                   <a:spcPts val="880"/>
                 </a:lnSpc>
@@ -8397,10 +7957,10 @@
             <a:noFill/>
           </p:spPr>
           <p:txBody>
-            <a:bodyPr wrap="none" lIns="0" tIns="0" rIns="0" bIns="0" anchor="ctr" anchorCtr="1"/>
+            <a:bodyPr lIns="0" rIns="0" tIns="0" bIns="0" anchorCtr="1" anchor="ctr" wrap="none"/>
             <a:lstStyle/>
             <a:p>
-              <a:pPr marL="0" marR="0" indent="0" algn="l">
+              <a:pPr algn="l" marL="0" marR="0" indent="0">
                 <a:lnSpc>
                   <a:spcPts val="880"/>
                 </a:lnSpc>
@@ -8443,10 +8003,10 @@
             <a:noFill/>
           </p:spPr>
           <p:txBody>
-            <a:bodyPr wrap="none" lIns="0" tIns="0" rIns="0" bIns="0" anchor="ctr" anchorCtr="1"/>
+            <a:bodyPr lIns="0" rIns="0" tIns="0" bIns="0" anchorCtr="1" anchor="ctr" wrap="none"/>
             <a:lstStyle/>
             <a:p>
-              <a:pPr marL="0" marR="0" indent="0" algn="l">
+              <a:pPr algn="l" marL="0" marR="0" indent="0">
                 <a:lnSpc>
                   <a:spcPts val="1100"/>
                 </a:lnSpc>
@@ -8489,10 +8049,10 @@
             <a:noFill/>
           </p:spPr>
           <p:txBody>
-            <a:bodyPr wrap="none" lIns="0" tIns="0" rIns="0" bIns="0" anchor="ctr" anchorCtr="1"/>
+            <a:bodyPr lIns="0" rIns="0" tIns="0" bIns="0" anchorCtr="1" anchor="ctr" wrap="none"/>
             <a:lstStyle/>
             <a:p>
-              <a:pPr marL="0" marR="0" indent="0" algn="l">
+              <a:pPr algn="l" marL="0" marR="0" indent="0">
                 <a:lnSpc>
                   <a:spcPts val="1100"/>
                 </a:lnSpc>
@@ -8550,9 +8110,7 @@
           <p:txBody>
             <a:bodyPr/>
             <a:lstStyle/>
-            <a:p>
-              <a:endParaRPr/>
-            </a:p>
+            <a:p/>
           </p:txBody>
         </p:sp>
         <p:sp>
@@ -8578,9 +8136,7 @@
           <p:txBody>
             <a:bodyPr/>
             <a:lstStyle/>
-            <a:p>
-              <a:endParaRPr/>
-            </a:p>
+            <a:p/>
           </p:txBody>
         </p:sp>
         <p:sp>
@@ -8596,12 +8152,8 @@
             </a:xfrm>
             <a:custGeom>
               <a:avLst/>
-              <a:gdLst/>
-              <a:ahLst/>
-              <a:cxnLst/>
-              <a:rect l="0" t="0" r="0" b="0"/>
               <a:pathLst>
-                <a:path w="2539947">
+                <a:path w="2539947" h="0">
                   <a:moveTo>
                     <a:pt x="0" y="0"/>
                   </a:moveTo>
@@ -8627,9 +8179,7 @@
           <p:txBody>
             <a:bodyPr/>
             <a:lstStyle/>
-            <a:p>
-              <a:endParaRPr/>
-            </a:p>
+            <a:p/>
           </p:txBody>
         </p:sp>
         <p:sp>
@@ -8645,12 +8195,8 @@
             </a:xfrm>
             <a:custGeom>
               <a:avLst/>
-              <a:gdLst/>
-              <a:ahLst/>
-              <a:cxnLst/>
-              <a:rect l="0" t="0" r="0" b="0"/>
               <a:pathLst>
-                <a:path w="2539947">
+                <a:path w="2539947" h="0">
                   <a:moveTo>
                     <a:pt x="0" y="0"/>
                   </a:moveTo>
@@ -8676,9 +8222,7 @@
           <p:txBody>
             <a:bodyPr/>
             <a:lstStyle/>
-            <a:p>
-              <a:endParaRPr/>
-            </a:p>
+            <a:p/>
           </p:txBody>
         </p:sp>
         <p:sp>
@@ -8694,12 +8238,8 @@
             </a:xfrm>
             <a:custGeom>
               <a:avLst/>
-              <a:gdLst/>
-              <a:ahLst/>
-              <a:cxnLst/>
-              <a:rect l="0" t="0" r="0" b="0"/>
               <a:pathLst>
-                <a:path w="2539947">
+                <a:path w="2539947" h="0">
                   <a:moveTo>
                     <a:pt x="0" y="0"/>
                   </a:moveTo>
@@ -8725,9 +8265,7 @@
           <p:txBody>
             <a:bodyPr/>
             <a:lstStyle/>
-            <a:p>
-              <a:endParaRPr/>
-            </a:p>
+            <a:p/>
           </p:txBody>
         </p:sp>
         <p:sp>
@@ -8743,12 +8281,8 @@
             </a:xfrm>
             <a:custGeom>
               <a:avLst/>
-              <a:gdLst/>
-              <a:ahLst/>
-              <a:cxnLst/>
-              <a:rect l="0" t="0" r="0" b="0"/>
               <a:pathLst>
-                <a:path h="1806522">
+                <a:path w="0" h="1806522">
                   <a:moveTo>
                     <a:pt x="0" y="1806522"/>
                   </a:moveTo>
@@ -8774,9 +8308,7 @@
           <p:txBody>
             <a:bodyPr/>
             <a:lstStyle/>
-            <a:p>
-              <a:endParaRPr/>
-            </a:p>
+            <a:p/>
           </p:txBody>
         </p:sp>
         <p:sp>
@@ -8792,12 +8324,8 @@
             </a:xfrm>
             <a:custGeom>
               <a:avLst/>
-              <a:gdLst/>
-              <a:ahLst/>
-              <a:cxnLst/>
-              <a:rect l="0" t="0" r="0" b="0"/>
               <a:pathLst>
-                <a:path h="1806522">
+                <a:path w="0" h="1806522">
                   <a:moveTo>
                     <a:pt x="0" y="1806522"/>
                   </a:moveTo>
@@ -8823,9 +8351,7 @@
           <p:txBody>
             <a:bodyPr/>
             <a:lstStyle/>
-            <a:p>
-              <a:endParaRPr/>
-            </a:p>
+            <a:p/>
           </p:txBody>
         </p:sp>
         <p:sp>
@@ -8841,12 +8367,8 @@
             </a:xfrm>
             <a:custGeom>
               <a:avLst/>
-              <a:gdLst/>
-              <a:ahLst/>
-              <a:cxnLst/>
-              <a:rect l="0" t="0" r="0" b="0"/>
               <a:pathLst>
-                <a:path h="1806522">
+                <a:path w="0" h="1806522">
                   <a:moveTo>
                     <a:pt x="0" y="1806522"/>
                   </a:moveTo>
@@ -8872,9 +8394,7 @@
           <p:txBody>
             <a:bodyPr/>
             <a:lstStyle/>
-            <a:p>
-              <a:endParaRPr/>
-            </a:p>
+            <a:p/>
           </p:txBody>
         </p:sp>
         <p:sp>
@@ -8890,12 +8410,8 @@
             </a:xfrm>
             <a:custGeom>
               <a:avLst/>
-              <a:gdLst/>
-              <a:ahLst/>
-              <a:cxnLst/>
-              <a:rect l="0" t="0" r="0" b="0"/>
               <a:pathLst>
-                <a:path w="2539947">
+                <a:path w="2539947" h="0">
                   <a:moveTo>
                     <a:pt x="0" y="0"/>
                   </a:moveTo>
@@ -8921,9 +8437,7 @@
           <p:txBody>
             <a:bodyPr/>
             <a:lstStyle/>
-            <a:p>
-              <a:endParaRPr/>
-            </a:p>
+            <a:p/>
           </p:txBody>
         </p:sp>
         <p:sp>
@@ -8939,12 +8453,8 @@
             </a:xfrm>
             <a:custGeom>
               <a:avLst/>
-              <a:gdLst/>
-              <a:ahLst/>
-              <a:cxnLst/>
-              <a:rect l="0" t="0" r="0" b="0"/>
               <a:pathLst>
-                <a:path w="2539947">
+                <a:path w="2539947" h="0">
                   <a:moveTo>
                     <a:pt x="0" y="0"/>
                   </a:moveTo>
@@ -8970,9 +8480,7 @@
           <p:txBody>
             <a:bodyPr/>
             <a:lstStyle/>
-            <a:p>
-              <a:endParaRPr/>
-            </a:p>
+            <a:p/>
           </p:txBody>
         </p:sp>
         <p:sp>
@@ -8988,12 +8496,8 @@
             </a:xfrm>
             <a:custGeom>
               <a:avLst/>
-              <a:gdLst/>
-              <a:ahLst/>
-              <a:cxnLst/>
-              <a:rect l="0" t="0" r="0" b="0"/>
               <a:pathLst>
-                <a:path w="2539947">
+                <a:path w="2539947" h="0">
                   <a:moveTo>
                     <a:pt x="0" y="0"/>
                   </a:moveTo>
@@ -9019,9 +8523,7 @@
           <p:txBody>
             <a:bodyPr/>
             <a:lstStyle/>
-            <a:p>
-              <a:endParaRPr/>
-            </a:p>
+            <a:p/>
           </p:txBody>
         </p:sp>
         <p:sp>
@@ -9037,12 +8539,8 @@
             </a:xfrm>
             <a:custGeom>
               <a:avLst/>
-              <a:gdLst/>
-              <a:ahLst/>
-              <a:cxnLst/>
-              <a:rect l="0" t="0" r="0" b="0"/>
               <a:pathLst>
-                <a:path w="2539947">
+                <a:path w="2539947" h="0">
                   <a:moveTo>
                     <a:pt x="0" y="0"/>
                   </a:moveTo>
@@ -9068,9 +8566,7 @@
           <p:txBody>
             <a:bodyPr/>
             <a:lstStyle/>
-            <a:p>
-              <a:endParaRPr/>
-            </a:p>
+            <a:p/>
           </p:txBody>
         </p:sp>
         <p:sp>
@@ -9086,12 +8582,8 @@
             </a:xfrm>
             <a:custGeom>
               <a:avLst/>
-              <a:gdLst/>
-              <a:ahLst/>
-              <a:cxnLst/>
-              <a:rect l="0" t="0" r="0" b="0"/>
               <a:pathLst>
-                <a:path h="1806522">
+                <a:path w="0" h="1806522">
                   <a:moveTo>
                     <a:pt x="0" y="1806522"/>
                   </a:moveTo>
@@ -9117,9 +8609,7 @@
           <p:txBody>
             <a:bodyPr/>
             <a:lstStyle/>
-            <a:p>
-              <a:endParaRPr/>
-            </a:p>
+            <a:p/>
           </p:txBody>
         </p:sp>
         <p:sp>
@@ -9135,12 +8625,8 @@
             </a:xfrm>
             <a:custGeom>
               <a:avLst/>
-              <a:gdLst/>
-              <a:ahLst/>
-              <a:cxnLst/>
-              <a:rect l="0" t="0" r="0" b="0"/>
               <a:pathLst>
-                <a:path h="1806522">
+                <a:path w="0" h="1806522">
                   <a:moveTo>
                     <a:pt x="0" y="1806522"/>
                   </a:moveTo>
@@ -9166,9 +8652,7 @@
           <p:txBody>
             <a:bodyPr/>
             <a:lstStyle/>
-            <a:p>
-              <a:endParaRPr/>
-            </a:p>
+            <a:p/>
           </p:txBody>
         </p:sp>
         <p:sp>
@@ -9184,12 +8668,8 @@
             </a:xfrm>
             <a:custGeom>
               <a:avLst/>
-              <a:gdLst/>
-              <a:ahLst/>
-              <a:cxnLst/>
-              <a:rect l="0" t="0" r="0" b="0"/>
               <a:pathLst>
-                <a:path h="1806522">
+                <a:path w="0" h="1806522">
                   <a:moveTo>
                     <a:pt x="0" y="1806522"/>
                   </a:moveTo>
@@ -9215,9 +8695,7 @@
           <p:txBody>
             <a:bodyPr/>
             <a:lstStyle/>
-            <a:p>
-              <a:endParaRPr/>
-            </a:p>
+            <a:p/>
           </p:txBody>
         </p:sp>
         <p:sp>
@@ -9233,12 +8711,8 @@
             </a:xfrm>
             <a:custGeom>
               <a:avLst/>
-              <a:gdLst/>
-              <a:ahLst/>
-              <a:cxnLst/>
-              <a:rect l="0" t="0" r="0" b="0"/>
               <a:pathLst>
-                <a:path h="1806522">
+                <a:path w="0" h="1806522">
                   <a:moveTo>
                     <a:pt x="0" y="1806522"/>
                   </a:moveTo>
@@ -9264,9 +8738,7 @@
           <p:txBody>
             <a:bodyPr/>
             <a:lstStyle/>
-            <a:p>
-              <a:endParaRPr/>
-            </a:p>
+            <a:p/>
           </p:txBody>
         </p:sp>
         <p:sp>
@@ -9282,10 +8754,6 @@
             </a:xfrm>
             <a:custGeom>
               <a:avLst/>
-              <a:gdLst/>
-              <a:ahLst/>
-              <a:cxnLst/>
-              <a:rect l="0" t="0" r="0" b="0"/>
               <a:pathLst>
                 <a:path w="1539361" h="1059091">
                   <a:moveTo>
@@ -9427,9 +8895,7 @@
           <p:txBody>
             <a:bodyPr/>
             <a:lstStyle/>
-            <a:p>
-              <a:endParaRPr/>
-            </a:p>
+            <a:p/>
           </p:txBody>
         </p:sp>
         <p:sp>
@@ -9445,10 +8911,6 @@
             </a:xfrm>
             <a:custGeom>
               <a:avLst/>
-              <a:gdLst/>
-              <a:ahLst/>
-              <a:cxnLst/>
-              <a:rect l="0" t="0" r="0" b="0"/>
               <a:pathLst>
                 <a:path w="1539361" h="1642292">
                   <a:moveTo>
@@ -9710,9 +9172,7 @@
           <p:txBody>
             <a:bodyPr/>
             <a:lstStyle/>
-            <a:p>
-              <a:endParaRPr/>
-            </a:p>
+            <a:p/>
           </p:txBody>
         </p:sp>
         <p:sp>
@@ -9728,10 +9188,6 @@
             </a:xfrm>
             <a:custGeom>
               <a:avLst/>
-              <a:gdLst/>
-              <a:ahLst/>
-              <a:cxnLst/>
-              <a:rect l="0" t="0" r="0" b="0"/>
               <a:pathLst>
                 <a:path w="1539361" h="1582625">
                   <a:moveTo>
@@ -9864,9 +9320,7 @@
           <p:txBody>
             <a:bodyPr/>
             <a:lstStyle/>
-            <a:p>
-              <a:endParaRPr/>
-            </a:p>
+            <a:p/>
           </p:txBody>
         </p:sp>
         <p:sp>
@@ -9882,10 +9336,6 @@
             </a:xfrm>
             <a:custGeom>
               <a:avLst/>
-              <a:gdLst/>
-              <a:ahLst/>
-              <a:cxnLst/>
-              <a:rect l="0" t="0" r="0" b="0"/>
               <a:pathLst>
                 <a:path w="1539361" h="535558">
                   <a:moveTo>
@@ -10018,9 +9468,7 @@
           <p:txBody>
             <a:bodyPr/>
             <a:lstStyle/>
-            <a:p>
-              <a:endParaRPr/>
-            </a:p>
+            <a:p/>
           </p:txBody>
         </p:sp>
         <p:sp>
@@ -10050,9 +9498,7 @@
           <p:txBody>
             <a:bodyPr/>
             <a:lstStyle/>
-            <a:p>
-              <a:endParaRPr/>
-            </a:p>
+            <a:p/>
           </p:txBody>
         </p:sp>
         <p:sp>
@@ -10072,10 +9518,10 @@
             <a:noFill/>
           </p:spPr>
           <p:txBody>
-            <a:bodyPr wrap="none" lIns="0" tIns="0" rIns="0" bIns="0" anchor="ctr" anchorCtr="1"/>
+            <a:bodyPr lIns="0" rIns="0" tIns="0" bIns="0" anchorCtr="1" anchor="ctr" wrap="none"/>
             <a:lstStyle/>
             <a:p>
-              <a:pPr marL="0" marR="0" indent="0" algn="l">
+              <a:pPr algn="l" marL="0" marR="0" indent="0">
                 <a:lnSpc>
                   <a:spcPts val="880"/>
                 </a:lnSpc>
@@ -10118,10 +9564,10 @@
             <a:noFill/>
           </p:spPr>
           <p:txBody>
-            <a:bodyPr wrap="none" lIns="0" tIns="0" rIns="0" bIns="0" anchor="ctr" anchorCtr="1"/>
+            <a:bodyPr lIns="0" rIns="0" tIns="0" bIns="0" anchorCtr="1" anchor="ctr" wrap="none"/>
             <a:lstStyle/>
             <a:p>
-              <a:pPr marL="0" marR="0" indent="0" algn="l">
+              <a:pPr algn="l" marL="0" marR="0" indent="0">
                 <a:lnSpc>
                   <a:spcPts val="880"/>
                 </a:lnSpc>
@@ -10164,10 +9610,10 @@
             <a:noFill/>
           </p:spPr>
           <p:txBody>
-            <a:bodyPr wrap="none" lIns="0" tIns="0" rIns="0" bIns="0" anchor="ctr" anchorCtr="1"/>
+            <a:bodyPr lIns="0" rIns="0" tIns="0" bIns="0" anchorCtr="1" anchor="ctr" wrap="none"/>
             <a:lstStyle/>
             <a:p>
-              <a:pPr marL="0" marR="0" indent="0" algn="l">
+              <a:pPr algn="l" marL="0" marR="0" indent="0">
                 <a:lnSpc>
                   <a:spcPts val="880"/>
                 </a:lnSpc>
@@ -10210,10 +9656,10 @@
             <a:noFill/>
           </p:spPr>
           <p:txBody>
-            <a:bodyPr wrap="none" lIns="0" tIns="0" rIns="0" bIns="0" anchor="ctr" anchorCtr="1"/>
+            <a:bodyPr lIns="0" rIns="0" tIns="0" bIns="0" anchorCtr="1" anchor="ctr" wrap="none"/>
             <a:lstStyle/>
             <a:p>
-              <a:pPr marL="0" marR="0" indent="0" algn="l">
+              <a:pPr algn="l" marL="0" marR="0" indent="0">
                 <a:lnSpc>
                   <a:spcPts val="880"/>
                 </a:lnSpc>
@@ -10252,12 +9698,8 @@
             </a:xfrm>
             <a:custGeom>
               <a:avLst/>
-              <a:gdLst/>
-              <a:ahLst/>
-              <a:cxnLst/>
-              <a:rect l="0" t="0" r="0" b="0"/>
               <a:pathLst>
-                <a:path w="34794">
+                <a:path w="34794" h="0">
                   <a:moveTo>
                     <a:pt x="0" y="0"/>
                   </a:moveTo>
@@ -10280,9 +9722,7 @@
           <p:txBody>
             <a:bodyPr/>
             <a:lstStyle/>
-            <a:p>
-              <a:endParaRPr/>
-            </a:p>
+            <a:p/>
           </p:txBody>
         </p:sp>
         <p:sp>
@@ -10298,12 +9738,8 @@
             </a:xfrm>
             <a:custGeom>
               <a:avLst/>
-              <a:gdLst/>
-              <a:ahLst/>
-              <a:cxnLst/>
-              <a:rect l="0" t="0" r="0" b="0"/>
               <a:pathLst>
-                <a:path w="34794">
+                <a:path w="34794" h="0">
                   <a:moveTo>
                     <a:pt x="0" y="0"/>
                   </a:moveTo>
@@ -10326,9 +9762,7 @@
           <p:txBody>
             <a:bodyPr/>
             <a:lstStyle/>
-            <a:p>
-              <a:endParaRPr/>
-            </a:p>
+            <a:p/>
           </p:txBody>
         </p:sp>
         <p:sp>
@@ -10344,12 +9778,8 @@
             </a:xfrm>
             <a:custGeom>
               <a:avLst/>
-              <a:gdLst/>
-              <a:ahLst/>
-              <a:cxnLst/>
-              <a:rect l="0" t="0" r="0" b="0"/>
               <a:pathLst>
-                <a:path w="34794">
+                <a:path w="34794" h="0">
                   <a:moveTo>
                     <a:pt x="0" y="0"/>
                   </a:moveTo>
@@ -10372,9 +9802,7 @@
           <p:txBody>
             <a:bodyPr/>
             <a:lstStyle/>
-            <a:p>
-              <a:endParaRPr/>
-            </a:p>
+            <a:p/>
           </p:txBody>
         </p:sp>
         <p:sp>
@@ -10390,12 +9818,8 @@
             </a:xfrm>
             <a:custGeom>
               <a:avLst/>
-              <a:gdLst/>
-              <a:ahLst/>
-              <a:cxnLst/>
-              <a:rect l="0" t="0" r="0" b="0"/>
               <a:pathLst>
-                <a:path w="34794">
+                <a:path w="34794" h="0">
                   <a:moveTo>
                     <a:pt x="0" y="0"/>
                   </a:moveTo>
@@ -10418,9 +9842,7 @@
           <p:txBody>
             <a:bodyPr/>
             <a:lstStyle/>
-            <a:p>
-              <a:endParaRPr/>
-            </a:p>
+            <a:p/>
           </p:txBody>
         </p:sp>
         <p:sp>
@@ -10436,12 +9858,8 @@
             </a:xfrm>
             <a:custGeom>
               <a:avLst/>
-              <a:gdLst/>
-              <a:ahLst/>
-              <a:cxnLst/>
-              <a:rect l="0" t="0" r="0" b="0"/>
               <a:pathLst>
-                <a:path h="34794">
+                <a:path w="0" h="34794">
                   <a:moveTo>
                     <a:pt x="0" y="34794"/>
                   </a:moveTo>
@@ -10464,9 +9882,7 @@
           <p:txBody>
             <a:bodyPr/>
             <a:lstStyle/>
-            <a:p>
-              <a:endParaRPr/>
-            </a:p>
+            <a:p/>
           </p:txBody>
         </p:sp>
         <p:sp>
@@ -10482,12 +9898,8 @@
             </a:xfrm>
             <a:custGeom>
               <a:avLst/>
-              <a:gdLst/>
-              <a:ahLst/>
-              <a:cxnLst/>
-              <a:rect l="0" t="0" r="0" b="0"/>
               <a:pathLst>
-                <a:path h="34794">
+                <a:path w="0" h="34794">
                   <a:moveTo>
                     <a:pt x="0" y="34794"/>
                   </a:moveTo>
@@ -10510,9 +9922,7 @@
           <p:txBody>
             <a:bodyPr/>
             <a:lstStyle/>
-            <a:p>
-              <a:endParaRPr/>
-            </a:p>
+            <a:p/>
           </p:txBody>
         </p:sp>
         <p:sp>
@@ -10528,12 +9938,8 @@
             </a:xfrm>
             <a:custGeom>
               <a:avLst/>
-              <a:gdLst/>
-              <a:ahLst/>
-              <a:cxnLst/>
-              <a:rect l="0" t="0" r="0" b="0"/>
               <a:pathLst>
-                <a:path h="34794">
+                <a:path w="0" h="34794">
                   <a:moveTo>
                     <a:pt x="0" y="34794"/>
                   </a:moveTo>
@@ -10556,9 +9962,7 @@
           <p:txBody>
             <a:bodyPr/>
             <a:lstStyle/>
-            <a:p>
-              <a:endParaRPr/>
-            </a:p>
+            <a:p/>
           </p:txBody>
         </p:sp>
         <p:sp>
@@ -10574,12 +9978,8 @@
             </a:xfrm>
             <a:custGeom>
               <a:avLst/>
-              <a:gdLst/>
-              <a:ahLst/>
-              <a:cxnLst/>
-              <a:rect l="0" t="0" r="0" b="0"/>
               <a:pathLst>
-                <a:path h="34794">
+                <a:path w="0" h="34794">
                   <a:moveTo>
                     <a:pt x="0" y="34794"/>
                   </a:moveTo>
@@ -10602,9 +10002,7 @@
           <p:txBody>
             <a:bodyPr/>
             <a:lstStyle/>
-            <a:p>
-              <a:endParaRPr/>
-            </a:p>
+            <a:p/>
           </p:txBody>
         </p:sp>
         <p:sp>
@@ -10624,10 +10022,10 @@
             <a:noFill/>
           </p:spPr>
           <p:txBody>
-            <a:bodyPr wrap="none" lIns="0" tIns="0" rIns="0" bIns="0" anchor="ctr" anchorCtr="1"/>
+            <a:bodyPr lIns="0" rIns="0" tIns="0" bIns="0" anchorCtr="1" anchor="ctr" wrap="none"/>
             <a:lstStyle/>
             <a:p>
-              <a:pPr marL="0" marR="0" indent="0" algn="l">
+              <a:pPr algn="l" marL="0" marR="0" indent="0">
                 <a:lnSpc>
                   <a:spcPts val="880"/>
                 </a:lnSpc>
@@ -10670,10 +10068,10 @@
             <a:noFill/>
           </p:spPr>
           <p:txBody>
-            <a:bodyPr wrap="none" lIns="0" tIns="0" rIns="0" bIns="0" anchor="ctr" anchorCtr="1"/>
+            <a:bodyPr lIns="0" rIns="0" tIns="0" bIns="0" anchorCtr="1" anchor="ctr" wrap="none"/>
             <a:lstStyle/>
             <a:p>
-              <a:pPr marL="0" marR="0" indent="0" algn="l">
+              <a:pPr algn="l" marL="0" marR="0" indent="0">
                 <a:lnSpc>
                   <a:spcPts val="880"/>
                 </a:lnSpc>
@@ -10716,10 +10114,10 @@
             <a:noFill/>
           </p:spPr>
           <p:txBody>
-            <a:bodyPr wrap="none" lIns="0" tIns="0" rIns="0" bIns="0" anchor="ctr" anchorCtr="1"/>
+            <a:bodyPr lIns="0" rIns="0" tIns="0" bIns="0" anchorCtr="1" anchor="ctr" wrap="none"/>
             <a:lstStyle/>
             <a:p>
-              <a:pPr marL="0" marR="0" indent="0" algn="l">
+              <a:pPr algn="l" marL="0" marR="0" indent="0">
                 <a:lnSpc>
                   <a:spcPts val="880"/>
                 </a:lnSpc>
@@ -10762,10 +10160,10 @@
             <a:noFill/>
           </p:spPr>
           <p:txBody>
-            <a:bodyPr wrap="none" lIns="0" tIns="0" rIns="0" bIns="0" anchor="ctr" anchorCtr="1"/>
+            <a:bodyPr lIns="0" rIns="0" tIns="0" bIns="0" anchorCtr="1" anchor="ctr" wrap="none"/>
             <a:lstStyle/>
             <a:p>
-              <a:pPr marL="0" marR="0" indent="0" algn="l">
+              <a:pPr algn="l" marL="0" marR="0" indent="0">
                 <a:lnSpc>
                   <a:spcPts val="880"/>
                 </a:lnSpc>
@@ -10808,10 +10206,10 @@
             <a:noFill/>
           </p:spPr>
           <p:txBody>
-            <a:bodyPr wrap="none" lIns="0" tIns="0" rIns="0" bIns="0" anchor="ctr" anchorCtr="1"/>
+            <a:bodyPr lIns="0" rIns="0" tIns="0" bIns="0" anchorCtr="1" anchor="ctr" wrap="none"/>
             <a:lstStyle/>
             <a:p>
-              <a:pPr marL="0" marR="0" indent="0" algn="l">
+              <a:pPr algn="l" marL="0" marR="0" indent="0">
                 <a:lnSpc>
                   <a:spcPts val="1100"/>
                 </a:lnSpc>
@@ -10854,10 +10252,10 @@
             <a:noFill/>
           </p:spPr>
           <p:txBody>
-            <a:bodyPr wrap="none" lIns="0" tIns="0" rIns="0" bIns="0" anchor="ctr" anchorCtr="1"/>
+            <a:bodyPr lIns="0" rIns="0" tIns="0" bIns="0" anchorCtr="1" anchor="ctr" wrap="none"/>
             <a:lstStyle/>
             <a:p>
-              <a:pPr marL="0" marR="0" indent="0" algn="ctr">
+              <a:pPr algn="l" marL="0" marR="0" indent="0">
                 <a:lnSpc>
                   <a:spcPts val="1100"/>
                 </a:lnSpc>
@@ -10869,7 +10267,7 @@
                 </a:spcAft>
               </a:pPr>
               <a:r>
-                <a:rPr sz="1100" dirty="0">
+                <a:rPr sz="1100">
                   <a:solidFill>
                     <a:srgbClr val="000000">
                       <a:alpha val="100000"/>
@@ -10878,23 +10276,856 @@
                   <a:latin typeface="Arial"/>
                   <a:cs typeface="Arial"/>
                 </a:rPr>
-                <a:t>Plasma pT217/AB42</a:t>
-              </a:r>
-              <a:r>
-                <a:rPr lang="en-US" sz="1100" dirty="0">
-                  <a:solidFill>
-                    <a:srgbClr val="000000">
-                      <a:alpha val="100000"/>
-                    </a:srgbClr>
-                  </a:solidFill>
-                  <a:latin typeface="Arial"/>
-                  <a:cs typeface="Arial"/>
-                </a:rPr>
-                <a:t> – Fujirebio</a:t>
+                <a:t>Plasma pT217/AB42 Z</a:t>
               </a:r>
             </a:p>
+          </p:txBody>
+        </p:sp>
+        <p:sp>
+          <p:nvSpPr>
+            <p:cNvPr id="147" name="rc147"/>
+            <p:cNvSpPr/>
+            <p:nvPr/>
+          </p:nvSpPr>
+          <p:spPr>
+            <a:xfrm>
+              <a:off x="5349081" y="3781425"/>
+              <a:ext cx="2971799" cy="2286000"/>
+            </a:xfrm>
+            <a:prstGeom prst="rect">
+              <a:avLst/>
+            </a:prstGeom>
+            <a:solidFill>
+              <a:srgbClr val="FFFFFF">
+                <a:alpha val="100000"/>
+              </a:srgbClr>
+            </a:solidFill>
+            <a:ln w="13550" cap="rnd">
+              <a:solidFill>
+                <a:srgbClr val="FFFFFF">
+                  <a:alpha val="100000"/>
+                </a:srgbClr>
+              </a:solidFill>
+              <a:prstDash val="solid"/>
+              <a:round/>
+            </a:ln>
+          </p:spPr>
+          <p:txBody>
+            <a:bodyPr/>
+            <a:lstStyle/>
+            <a:p/>
+          </p:txBody>
+        </p:sp>
+        <p:sp>
+          <p:nvSpPr>
+            <p:cNvPr id="148" name="rc148"/>
+            <p:cNvSpPr/>
+            <p:nvPr/>
+          </p:nvSpPr>
+          <p:spPr>
+            <a:xfrm>
+              <a:off x="5778020" y="3851014"/>
+              <a:ext cx="2473272" cy="1806522"/>
+            </a:xfrm>
+            <a:prstGeom prst="rect">
+              <a:avLst/>
+            </a:prstGeom>
+            <a:solidFill>
+              <a:srgbClr val="FFFFFF">
+                <a:alpha val="100000"/>
+              </a:srgbClr>
+            </a:solidFill>
+          </p:spPr>
+          <p:txBody>
+            <a:bodyPr/>
+            <a:lstStyle/>
+            <a:p/>
+          </p:txBody>
+        </p:sp>
+        <p:sp>
+          <p:nvSpPr>
+            <p:cNvPr id="149" name="pl149"/>
+            <p:cNvSpPr/>
+            <p:nvPr/>
+          </p:nvSpPr>
+          <p:spPr>
+            <a:xfrm>
+              <a:off x="5778020" y="5301706"/>
+              <a:ext cx="2473272" cy="0"/>
+            </a:xfrm>
+            <a:custGeom>
+              <a:avLst/>
+              <a:pathLst>
+                <a:path w="2473272" h="0">
+                  <a:moveTo>
+                    <a:pt x="0" y="0"/>
+                  </a:moveTo>
+                  <a:lnTo>
+                    <a:pt x="2473272" y="0"/>
+                  </a:lnTo>
+                  <a:lnTo>
+                    <a:pt x="2473272" y="0"/>
+                  </a:lnTo>
+                </a:path>
+              </a:pathLst>
+            </a:custGeom>
+            <a:ln w="6775" cap="flat">
+              <a:solidFill>
+                <a:srgbClr val="EBEBEB">
+                  <a:alpha val="100000"/>
+                </a:srgbClr>
+              </a:solidFill>
+              <a:prstDash val="solid"/>
+              <a:round/>
+            </a:ln>
+          </p:spPr>
+          <p:txBody>
+            <a:bodyPr/>
+            <a:lstStyle/>
+            <a:p/>
+          </p:txBody>
+        </p:sp>
+        <p:sp>
+          <p:nvSpPr>
+            <p:cNvPr id="150" name="pl150"/>
+            <p:cNvSpPr/>
+            <p:nvPr/>
+          </p:nvSpPr>
+          <p:spPr>
+            <a:xfrm>
+              <a:off x="5778020" y="4754275"/>
+              <a:ext cx="2473272" cy="0"/>
+            </a:xfrm>
+            <a:custGeom>
+              <a:avLst/>
+              <a:pathLst>
+                <a:path w="2473272" h="0">
+                  <a:moveTo>
+                    <a:pt x="0" y="0"/>
+                  </a:moveTo>
+                  <a:lnTo>
+                    <a:pt x="2473272" y="0"/>
+                  </a:lnTo>
+                  <a:lnTo>
+                    <a:pt x="2473272" y="0"/>
+                  </a:lnTo>
+                </a:path>
+              </a:pathLst>
+            </a:custGeom>
+            <a:ln w="6775" cap="flat">
+              <a:solidFill>
+                <a:srgbClr val="EBEBEB">
+                  <a:alpha val="100000"/>
+                </a:srgbClr>
+              </a:solidFill>
+              <a:prstDash val="solid"/>
+              <a:round/>
+            </a:ln>
+          </p:spPr>
+          <p:txBody>
+            <a:bodyPr/>
+            <a:lstStyle/>
+            <a:p/>
+          </p:txBody>
+        </p:sp>
+        <p:sp>
+          <p:nvSpPr>
+            <p:cNvPr id="151" name="pl151"/>
+            <p:cNvSpPr/>
+            <p:nvPr/>
+          </p:nvSpPr>
+          <p:spPr>
+            <a:xfrm>
+              <a:off x="5778020" y="4206844"/>
+              <a:ext cx="2473272" cy="0"/>
+            </a:xfrm>
+            <a:custGeom>
+              <a:avLst/>
+              <a:pathLst>
+                <a:path w="2473272" h="0">
+                  <a:moveTo>
+                    <a:pt x="0" y="0"/>
+                  </a:moveTo>
+                  <a:lnTo>
+                    <a:pt x="2473272" y="0"/>
+                  </a:lnTo>
+                  <a:lnTo>
+                    <a:pt x="2473272" y="0"/>
+                  </a:lnTo>
+                </a:path>
+              </a:pathLst>
+            </a:custGeom>
+            <a:ln w="6775" cap="flat">
+              <a:solidFill>
+                <a:srgbClr val="EBEBEB">
+                  <a:alpha val="100000"/>
+                </a:srgbClr>
+              </a:solidFill>
+              <a:prstDash val="solid"/>
+              <a:round/>
+            </a:ln>
+          </p:spPr>
+          <p:txBody>
+            <a:bodyPr/>
+            <a:lstStyle/>
+            <a:p/>
+          </p:txBody>
+        </p:sp>
+        <p:sp>
+          <p:nvSpPr>
+            <p:cNvPr id="152" name="pl152"/>
+            <p:cNvSpPr/>
+            <p:nvPr/>
+          </p:nvSpPr>
+          <p:spPr>
+            <a:xfrm>
+              <a:off x="6265179" y="3851014"/>
+              <a:ext cx="0" cy="1806522"/>
+            </a:xfrm>
+            <a:custGeom>
+              <a:avLst/>
+              <a:pathLst>
+                <a:path w="0" h="1806522">
+                  <a:moveTo>
+                    <a:pt x="0" y="1806522"/>
+                  </a:moveTo>
+                  <a:lnTo>
+                    <a:pt x="0" y="0"/>
+                  </a:lnTo>
+                  <a:lnTo>
+                    <a:pt x="0" y="0"/>
+                  </a:lnTo>
+                </a:path>
+              </a:pathLst>
+            </a:custGeom>
+            <a:ln w="6775" cap="flat">
+              <a:solidFill>
+                <a:srgbClr val="EBEBEB">
+                  <a:alpha val="100000"/>
+                </a:srgbClr>
+              </a:solidFill>
+              <a:prstDash val="solid"/>
+              <a:round/>
+            </a:ln>
+          </p:spPr>
+          <p:txBody>
+            <a:bodyPr/>
+            <a:lstStyle/>
+            <a:p/>
+          </p:txBody>
+        </p:sp>
+        <p:sp>
+          <p:nvSpPr>
+            <p:cNvPr id="153" name="pl153"/>
+            <p:cNvSpPr/>
+            <p:nvPr/>
+          </p:nvSpPr>
+          <p:spPr>
+            <a:xfrm>
+              <a:off x="7014656" y="3851014"/>
+              <a:ext cx="0" cy="1806522"/>
+            </a:xfrm>
+            <a:custGeom>
+              <a:avLst/>
+              <a:pathLst>
+                <a:path w="0" h="1806522">
+                  <a:moveTo>
+                    <a:pt x="0" y="1806522"/>
+                  </a:moveTo>
+                  <a:lnTo>
+                    <a:pt x="0" y="0"/>
+                  </a:lnTo>
+                  <a:lnTo>
+                    <a:pt x="0" y="0"/>
+                  </a:lnTo>
+                </a:path>
+              </a:pathLst>
+            </a:custGeom>
+            <a:ln w="6775" cap="flat">
+              <a:solidFill>
+                <a:srgbClr val="EBEBEB">
+                  <a:alpha val="100000"/>
+                </a:srgbClr>
+              </a:solidFill>
+              <a:prstDash val="solid"/>
+              <a:round/>
+            </a:ln>
+          </p:spPr>
+          <p:txBody>
+            <a:bodyPr/>
+            <a:lstStyle/>
+            <a:p/>
+          </p:txBody>
+        </p:sp>
+        <p:sp>
+          <p:nvSpPr>
+            <p:cNvPr id="154" name="pl154"/>
+            <p:cNvSpPr/>
+            <p:nvPr/>
+          </p:nvSpPr>
+          <p:spPr>
+            <a:xfrm>
+              <a:off x="7764132" y="3851014"/>
+              <a:ext cx="0" cy="1806522"/>
+            </a:xfrm>
+            <a:custGeom>
+              <a:avLst/>
+              <a:pathLst>
+                <a:path w="0" h="1806522">
+                  <a:moveTo>
+                    <a:pt x="0" y="1806522"/>
+                  </a:moveTo>
+                  <a:lnTo>
+                    <a:pt x="0" y="0"/>
+                  </a:lnTo>
+                  <a:lnTo>
+                    <a:pt x="0" y="0"/>
+                  </a:lnTo>
+                </a:path>
+              </a:pathLst>
+            </a:custGeom>
+            <a:ln w="6775" cap="flat">
+              <a:solidFill>
+                <a:srgbClr val="EBEBEB">
+                  <a:alpha val="100000"/>
+                </a:srgbClr>
+              </a:solidFill>
+              <a:prstDash val="solid"/>
+              <a:round/>
+            </a:ln>
+          </p:spPr>
+          <p:txBody>
+            <a:bodyPr/>
+            <a:lstStyle/>
+            <a:p/>
+          </p:txBody>
+        </p:sp>
+        <p:sp>
+          <p:nvSpPr>
+            <p:cNvPr id="155" name="pl155"/>
+            <p:cNvSpPr/>
+            <p:nvPr/>
+          </p:nvSpPr>
+          <p:spPr>
+            <a:xfrm>
+              <a:off x="5778020" y="5575421"/>
+              <a:ext cx="2473272" cy="0"/>
+            </a:xfrm>
+            <a:custGeom>
+              <a:avLst/>
+              <a:pathLst>
+                <a:path w="2473272" h="0">
+                  <a:moveTo>
+                    <a:pt x="0" y="0"/>
+                  </a:moveTo>
+                  <a:lnTo>
+                    <a:pt x="2473272" y="0"/>
+                  </a:lnTo>
+                  <a:lnTo>
+                    <a:pt x="2473272" y="0"/>
+                  </a:lnTo>
+                </a:path>
+              </a:pathLst>
+            </a:custGeom>
+            <a:ln w="13550" cap="flat">
+              <a:solidFill>
+                <a:srgbClr val="EBEBEB">
+                  <a:alpha val="100000"/>
+                </a:srgbClr>
+              </a:solidFill>
+              <a:prstDash val="solid"/>
+              <a:round/>
+            </a:ln>
+          </p:spPr>
+          <p:txBody>
+            <a:bodyPr/>
+            <a:lstStyle/>
+            <a:p/>
+          </p:txBody>
+        </p:sp>
+        <p:sp>
+          <p:nvSpPr>
+            <p:cNvPr id="156" name="pl156"/>
+            <p:cNvSpPr/>
+            <p:nvPr/>
+          </p:nvSpPr>
+          <p:spPr>
+            <a:xfrm>
+              <a:off x="5778020" y="5027990"/>
+              <a:ext cx="2473272" cy="0"/>
+            </a:xfrm>
+            <a:custGeom>
+              <a:avLst/>
+              <a:pathLst>
+                <a:path w="2473272" h="0">
+                  <a:moveTo>
+                    <a:pt x="0" y="0"/>
+                  </a:moveTo>
+                  <a:lnTo>
+                    <a:pt x="2473272" y="0"/>
+                  </a:lnTo>
+                  <a:lnTo>
+                    <a:pt x="2473272" y="0"/>
+                  </a:lnTo>
+                </a:path>
+              </a:pathLst>
+            </a:custGeom>
+            <a:ln w="13550" cap="flat">
+              <a:solidFill>
+                <a:srgbClr val="EBEBEB">
+                  <a:alpha val="100000"/>
+                </a:srgbClr>
+              </a:solidFill>
+              <a:prstDash val="solid"/>
+              <a:round/>
+            </a:ln>
+          </p:spPr>
+          <p:txBody>
+            <a:bodyPr/>
+            <a:lstStyle/>
+            <a:p/>
+          </p:txBody>
+        </p:sp>
+        <p:sp>
+          <p:nvSpPr>
+            <p:cNvPr id="157" name="pl157"/>
+            <p:cNvSpPr/>
+            <p:nvPr/>
+          </p:nvSpPr>
+          <p:spPr>
+            <a:xfrm>
+              <a:off x="5778020" y="4480559"/>
+              <a:ext cx="2473272" cy="0"/>
+            </a:xfrm>
+            <a:custGeom>
+              <a:avLst/>
+              <a:pathLst>
+                <a:path w="2473272" h="0">
+                  <a:moveTo>
+                    <a:pt x="0" y="0"/>
+                  </a:moveTo>
+                  <a:lnTo>
+                    <a:pt x="2473272" y="0"/>
+                  </a:lnTo>
+                  <a:lnTo>
+                    <a:pt x="2473272" y="0"/>
+                  </a:lnTo>
+                </a:path>
+              </a:pathLst>
+            </a:custGeom>
+            <a:ln w="13550" cap="flat">
+              <a:solidFill>
+                <a:srgbClr val="EBEBEB">
+                  <a:alpha val="100000"/>
+                </a:srgbClr>
+              </a:solidFill>
+              <a:prstDash val="solid"/>
+              <a:round/>
+            </a:ln>
+          </p:spPr>
+          <p:txBody>
+            <a:bodyPr/>
+            <a:lstStyle/>
+            <a:p/>
+          </p:txBody>
+        </p:sp>
+        <p:sp>
+          <p:nvSpPr>
+            <p:cNvPr id="158" name="pl158"/>
+            <p:cNvSpPr/>
+            <p:nvPr/>
+          </p:nvSpPr>
+          <p:spPr>
+            <a:xfrm>
+              <a:off x="5778020" y="3933128"/>
+              <a:ext cx="2473272" cy="0"/>
+            </a:xfrm>
+            <a:custGeom>
+              <a:avLst/>
+              <a:pathLst>
+                <a:path w="2473272" h="0">
+                  <a:moveTo>
+                    <a:pt x="0" y="0"/>
+                  </a:moveTo>
+                  <a:lnTo>
+                    <a:pt x="2473272" y="0"/>
+                  </a:lnTo>
+                  <a:lnTo>
+                    <a:pt x="2473272" y="0"/>
+                  </a:lnTo>
+                </a:path>
+              </a:pathLst>
+            </a:custGeom>
+            <a:ln w="13550" cap="flat">
+              <a:solidFill>
+                <a:srgbClr val="EBEBEB">
+                  <a:alpha val="100000"/>
+                </a:srgbClr>
+              </a:solidFill>
+              <a:prstDash val="solid"/>
+              <a:round/>
+            </a:ln>
+          </p:spPr>
+          <p:txBody>
+            <a:bodyPr/>
+            <a:lstStyle/>
+            <a:p/>
+          </p:txBody>
+        </p:sp>
+        <p:sp>
+          <p:nvSpPr>
+            <p:cNvPr id="159" name="pl159"/>
+            <p:cNvSpPr/>
+            <p:nvPr/>
+          </p:nvSpPr>
+          <p:spPr>
+            <a:xfrm>
+              <a:off x="5890441" y="3851014"/>
+              <a:ext cx="0" cy="1806522"/>
+            </a:xfrm>
+            <a:custGeom>
+              <a:avLst/>
+              <a:pathLst>
+                <a:path w="0" h="1806522">
+                  <a:moveTo>
+                    <a:pt x="0" y="1806522"/>
+                  </a:moveTo>
+                  <a:lnTo>
+                    <a:pt x="0" y="0"/>
+                  </a:lnTo>
+                  <a:lnTo>
+                    <a:pt x="0" y="0"/>
+                  </a:lnTo>
+                </a:path>
+              </a:pathLst>
+            </a:custGeom>
+            <a:ln w="13550" cap="flat">
+              <a:solidFill>
+                <a:srgbClr val="EBEBEB">
+                  <a:alpha val="100000"/>
+                </a:srgbClr>
+              </a:solidFill>
+              <a:prstDash val="solid"/>
+              <a:round/>
+            </a:ln>
+          </p:spPr>
+          <p:txBody>
+            <a:bodyPr/>
+            <a:lstStyle/>
+            <a:p/>
+          </p:txBody>
+        </p:sp>
+        <p:sp>
+          <p:nvSpPr>
+            <p:cNvPr id="160" name="pl160"/>
+            <p:cNvSpPr/>
+            <p:nvPr/>
+          </p:nvSpPr>
+          <p:spPr>
+            <a:xfrm>
+              <a:off x="6639918" y="3851014"/>
+              <a:ext cx="0" cy="1806522"/>
+            </a:xfrm>
+            <a:custGeom>
+              <a:avLst/>
+              <a:pathLst>
+                <a:path w="0" h="1806522">
+                  <a:moveTo>
+                    <a:pt x="0" y="1806522"/>
+                  </a:moveTo>
+                  <a:lnTo>
+                    <a:pt x="0" y="0"/>
+                  </a:lnTo>
+                  <a:lnTo>
+                    <a:pt x="0" y="0"/>
+                  </a:lnTo>
+                </a:path>
+              </a:pathLst>
+            </a:custGeom>
+            <a:ln w="13550" cap="flat">
+              <a:solidFill>
+                <a:srgbClr val="EBEBEB">
+                  <a:alpha val="100000"/>
+                </a:srgbClr>
+              </a:solidFill>
+              <a:prstDash val="solid"/>
+              <a:round/>
+            </a:ln>
+          </p:spPr>
+          <p:txBody>
+            <a:bodyPr/>
+            <a:lstStyle/>
+            <a:p/>
+          </p:txBody>
+        </p:sp>
+        <p:sp>
+          <p:nvSpPr>
+            <p:cNvPr id="161" name="pl161"/>
+            <p:cNvSpPr/>
+            <p:nvPr/>
+          </p:nvSpPr>
+          <p:spPr>
+            <a:xfrm>
+              <a:off x="7389394" y="3851014"/>
+              <a:ext cx="0" cy="1806522"/>
+            </a:xfrm>
+            <a:custGeom>
+              <a:avLst/>
+              <a:pathLst>
+                <a:path w="0" h="1806522">
+                  <a:moveTo>
+                    <a:pt x="0" y="1806522"/>
+                  </a:moveTo>
+                  <a:lnTo>
+                    <a:pt x="0" y="0"/>
+                  </a:lnTo>
+                  <a:lnTo>
+                    <a:pt x="0" y="0"/>
+                  </a:lnTo>
+                </a:path>
+              </a:pathLst>
+            </a:custGeom>
+            <a:ln w="13550" cap="flat">
+              <a:solidFill>
+                <a:srgbClr val="EBEBEB">
+                  <a:alpha val="100000"/>
+                </a:srgbClr>
+              </a:solidFill>
+              <a:prstDash val="solid"/>
+              <a:round/>
+            </a:ln>
+          </p:spPr>
+          <p:txBody>
+            <a:bodyPr/>
+            <a:lstStyle/>
+            <a:p/>
+          </p:txBody>
+        </p:sp>
+        <p:sp>
+          <p:nvSpPr>
+            <p:cNvPr id="162" name="pl162"/>
+            <p:cNvSpPr/>
+            <p:nvPr/>
+          </p:nvSpPr>
+          <p:spPr>
+            <a:xfrm>
+              <a:off x="8138870" y="3851014"/>
+              <a:ext cx="0" cy="1806522"/>
+            </a:xfrm>
+            <a:custGeom>
+              <a:avLst/>
+              <a:pathLst>
+                <a:path w="0" h="1806522">
+                  <a:moveTo>
+                    <a:pt x="0" y="1806522"/>
+                  </a:moveTo>
+                  <a:lnTo>
+                    <a:pt x="0" y="0"/>
+                  </a:lnTo>
+                  <a:lnTo>
+                    <a:pt x="0" y="0"/>
+                  </a:lnTo>
+                </a:path>
+              </a:pathLst>
+            </a:custGeom>
+            <a:ln w="13550" cap="flat">
+              <a:solidFill>
+                <a:srgbClr val="EBEBEB">
+                  <a:alpha val="100000"/>
+                </a:srgbClr>
+              </a:solidFill>
+              <a:prstDash val="solid"/>
+              <a:round/>
+            </a:ln>
+          </p:spPr>
+          <p:txBody>
+            <a:bodyPr/>
+            <a:lstStyle/>
+            <a:p/>
+          </p:txBody>
+        </p:sp>
+        <p:sp>
+          <p:nvSpPr>
+            <p:cNvPr id="163" name="pl163"/>
+            <p:cNvSpPr/>
+            <p:nvPr/>
+          </p:nvSpPr>
+          <p:spPr>
+            <a:xfrm>
+              <a:off x="5778020" y="3851014"/>
+              <a:ext cx="2473272" cy="1806522"/>
+            </a:xfrm>
+            <a:custGeom>
+              <a:avLst/>
+              <a:pathLst>
+                <a:path w="2473272" h="1806522">
+                  <a:moveTo>
+                    <a:pt x="0" y="1806522"/>
+                  </a:moveTo>
+                  <a:lnTo>
+                    <a:pt x="2473272" y="0"/>
+                  </a:lnTo>
+                  <a:lnTo>
+                    <a:pt x="2473272" y="0"/>
+                  </a:lnTo>
+                </a:path>
+              </a:pathLst>
+            </a:custGeom>
+            <a:ln w="13550" cap="flat">
+              <a:solidFill>
+                <a:srgbClr val="000000">
+                  <a:alpha val="100000"/>
+                </a:srgbClr>
+              </a:solidFill>
+              <a:prstDash val="dash"/>
+              <a:round/>
+            </a:ln>
+          </p:spPr>
+          <p:txBody>
+            <a:bodyPr/>
+            <a:lstStyle/>
+            <a:p/>
+          </p:txBody>
+        </p:sp>
+        <p:sp>
+          <p:nvSpPr>
+            <p:cNvPr id="164" name="pg164"/>
+            <p:cNvSpPr/>
+            <p:nvPr/>
+          </p:nvSpPr>
+          <p:spPr>
+            <a:xfrm>
+              <a:off x="6639918" y="5301706"/>
+              <a:ext cx="1298964" cy="355830"/>
+            </a:xfrm>
+            <a:custGeom>
+              <a:avLst/>
+              <a:pathLst>
+                <a:path w="1298964" h="355830">
+                  <a:moveTo>
+                    <a:pt x="1298964" y="355830"/>
+                  </a:moveTo>
+                  <a:lnTo>
+                    <a:pt x="1298964" y="25146"/>
+                  </a:lnTo>
+                  <a:lnTo>
+                    <a:pt x="1298638" y="21112"/>
+                  </a:lnTo>
+                  <a:lnTo>
+                    <a:pt x="1297670" y="17183"/>
+                  </a:lnTo>
+                  <a:lnTo>
+                    <a:pt x="1296084" y="13460"/>
+                  </a:lnTo>
+                  <a:lnTo>
+                    <a:pt x="1293921" y="10039"/>
+                  </a:lnTo>
+                  <a:lnTo>
+                    <a:pt x="1291237" y="7010"/>
+                  </a:lnTo>
+                  <a:lnTo>
+                    <a:pt x="1288102" y="4451"/>
+                  </a:lnTo>
+                  <a:lnTo>
+                    <a:pt x="1284598" y="2427"/>
+                  </a:lnTo>
+                  <a:lnTo>
+                    <a:pt x="1280814" y="992"/>
+                  </a:lnTo>
+                  <a:lnTo>
+                    <a:pt x="1276849" y="183"/>
+                  </a:lnTo>
+                  <a:lnTo>
+                    <a:pt x="1273818" y="0"/>
+                  </a:lnTo>
+                  <a:lnTo>
+                    <a:pt x="25146" y="0"/>
+                  </a:lnTo>
+                  <a:lnTo>
+                    <a:pt x="28177" y="183"/>
+                  </a:lnTo>
+                  <a:lnTo>
+                    <a:pt x="24133" y="20"/>
+                  </a:lnTo>
+                  <a:lnTo>
+                    <a:pt x="20116" y="508"/>
+                  </a:lnTo>
+                  <a:lnTo>
+                    <a:pt x="16229" y="1634"/>
+                  </a:lnTo>
+                  <a:lnTo>
+                    <a:pt x="12573" y="3368"/>
+                  </a:lnTo>
+                  <a:lnTo>
+                    <a:pt x="9242" y="5667"/>
+                  </a:lnTo>
+                  <a:lnTo>
+                    <a:pt x="6323" y="8471"/>
+                  </a:lnTo>
+                  <a:lnTo>
+                    <a:pt x="3892" y="11706"/>
+                  </a:lnTo>
+                  <a:lnTo>
+                    <a:pt x="2012" y="15289"/>
+                  </a:lnTo>
+                  <a:lnTo>
+                    <a:pt x="730" y="19128"/>
+                  </a:lnTo>
+                  <a:lnTo>
+                    <a:pt x="81" y="23122"/>
+                  </a:lnTo>
+                  <a:lnTo>
+                    <a:pt x="0" y="25146"/>
+                  </a:lnTo>
+                  <a:lnTo>
+                    <a:pt x="0" y="355830"/>
+                  </a:lnTo>
+                  <a:close/>
+                </a:path>
+              </a:pathLst>
+            </a:custGeom>
+            <a:solidFill>
+              <a:srgbClr val="FFD700">
+                <a:alpha val="100000"/>
+              </a:srgbClr>
+            </a:solidFill>
+            <a:ln w="6775" cap="rnd">
+              <a:solidFill>
+                <a:srgbClr val="000000">
+                  <a:alpha val="100000"/>
+                </a:srgbClr>
+              </a:solidFill>
+              <a:prstDash val="solid"/>
+              <a:round/>
+            </a:ln>
+          </p:spPr>
+          <p:txBody>
+            <a:bodyPr/>
+            <a:lstStyle/>
+            <a:p/>
+          </p:txBody>
+        </p:sp>
+        <p:sp>
+          <p:nvSpPr>
+            <p:cNvPr id="165" name="tx165"/>
+            <p:cNvSpPr/>
+            <p:nvPr/>
+          </p:nvSpPr>
+          <p:spPr>
+            <a:xfrm>
+              <a:off x="6681828" y="5313807"/>
+              <a:ext cx="1114257" cy="129809"/>
+            </a:xfrm>
+            <a:prstGeom prst="rect">
+              <a:avLst/>
+            </a:prstGeom>
+            <a:noFill/>
+          </p:spPr>
+          <p:txBody>
+            <a:bodyPr lIns="0" rIns="0" tIns="0" bIns="0" anchorCtr="1" anchor="ctr" wrap="none"/>
+            <a:lstStyle/>
             <a:p>
-              <a:pPr marL="0" marR="0" indent="0" algn="ctr">
+              <a:pPr algn="l" marL="0" marR="0" indent="0">
                 <a:lnSpc>
                   <a:spcPts val="1100"/>
                 </a:lnSpc>
@@ -10906,977 +11137,7 @@
                 </a:spcAft>
               </a:pPr>
               <a:r>
-                <a:rPr sz="1100" dirty="0">
-                  <a:solidFill>
-                    <a:srgbClr val="000000">
-                      <a:alpha val="100000"/>
-                    </a:srgbClr>
-                  </a:solidFill>
-                  <a:latin typeface="Arial"/>
-                  <a:cs typeface="Arial"/>
-                </a:rPr>
-                <a:t> Z</a:t>
-              </a:r>
-            </a:p>
-          </p:txBody>
-        </p:sp>
-        <p:sp>
-          <p:nvSpPr>
-            <p:cNvPr id="147" name="rc147"/>
-            <p:cNvSpPr/>
-            <p:nvPr/>
-          </p:nvSpPr>
-          <p:spPr>
-            <a:xfrm>
-              <a:off x="5349081" y="3781425"/>
-              <a:ext cx="2971799" cy="2286000"/>
-            </a:xfrm>
-            <a:prstGeom prst="rect">
-              <a:avLst/>
-            </a:prstGeom>
-            <a:solidFill>
-              <a:srgbClr val="FFFFFF">
-                <a:alpha val="100000"/>
-              </a:srgbClr>
-            </a:solidFill>
-            <a:ln w="13550" cap="rnd">
-              <a:solidFill>
-                <a:srgbClr val="FFFFFF">
-                  <a:alpha val="100000"/>
-                </a:srgbClr>
-              </a:solidFill>
-              <a:prstDash val="solid"/>
-              <a:round/>
-            </a:ln>
-          </p:spPr>
-          <p:txBody>
-            <a:bodyPr/>
-            <a:lstStyle/>
-            <a:p>
-              <a:endParaRPr/>
-            </a:p>
-          </p:txBody>
-        </p:sp>
-        <p:sp>
-          <p:nvSpPr>
-            <p:cNvPr id="148" name="rc148"/>
-            <p:cNvSpPr/>
-            <p:nvPr/>
-          </p:nvSpPr>
-          <p:spPr>
-            <a:xfrm>
-              <a:off x="5778020" y="3851014"/>
-              <a:ext cx="2473272" cy="1806522"/>
-            </a:xfrm>
-            <a:prstGeom prst="rect">
-              <a:avLst/>
-            </a:prstGeom>
-            <a:solidFill>
-              <a:srgbClr val="FFFFFF">
-                <a:alpha val="100000"/>
-              </a:srgbClr>
-            </a:solidFill>
-          </p:spPr>
-          <p:txBody>
-            <a:bodyPr/>
-            <a:lstStyle/>
-            <a:p>
-              <a:endParaRPr/>
-            </a:p>
-          </p:txBody>
-        </p:sp>
-        <p:sp>
-          <p:nvSpPr>
-            <p:cNvPr id="149" name="pl149"/>
-            <p:cNvSpPr/>
-            <p:nvPr/>
-          </p:nvSpPr>
-          <p:spPr>
-            <a:xfrm>
-              <a:off x="5778020" y="5301706"/>
-              <a:ext cx="2473272" cy="0"/>
-            </a:xfrm>
-            <a:custGeom>
-              <a:avLst/>
-              <a:gdLst/>
-              <a:ahLst/>
-              <a:cxnLst/>
-              <a:rect l="0" t="0" r="0" b="0"/>
-              <a:pathLst>
-                <a:path w="2473272">
-                  <a:moveTo>
-                    <a:pt x="0" y="0"/>
-                  </a:moveTo>
-                  <a:lnTo>
-                    <a:pt x="2473272" y="0"/>
-                  </a:lnTo>
-                  <a:lnTo>
-                    <a:pt x="2473272" y="0"/>
-                  </a:lnTo>
-                </a:path>
-              </a:pathLst>
-            </a:custGeom>
-            <a:ln w="6775" cap="flat">
-              <a:solidFill>
-                <a:srgbClr val="EBEBEB">
-                  <a:alpha val="100000"/>
-                </a:srgbClr>
-              </a:solidFill>
-              <a:prstDash val="solid"/>
-              <a:round/>
-            </a:ln>
-          </p:spPr>
-          <p:txBody>
-            <a:bodyPr/>
-            <a:lstStyle/>
-            <a:p>
-              <a:endParaRPr/>
-            </a:p>
-          </p:txBody>
-        </p:sp>
-        <p:sp>
-          <p:nvSpPr>
-            <p:cNvPr id="150" name="pl150"/>
-            <p:cNvSpPr/>
-            <p:nvPr/>
-          </p:nvSpPr>
-          <p:spPr>
-            <a:xfrm>
-              <a:off x="5778020" y="4754275"/>
-              <a:ext cx="2473272" cy="0"/>
-            </a:xfrm>
-            <a:custGeom>
-              <a:avLst/>
-              <a:gdLst/>
-              <a:ahLst/>
-              <a:cxnLst/>
-              <a:rect l="0" t="0" r="0" b="0"/>
-              <a:pathLst>
-                <a:path w="2473272">
-                  <a:moveTo>
-                    <a:pt x="0" y="0"/>
-                  </a:moveTo>
-                  <a:lnTo>
-                    <a:pt x="2473272" y="0"/>
-                  </a:lnTo>
-                  <a:lnTo>
-                    <a:pt x="2473272" y="0"/>
-                  </a:lnTo>
-                </a:path>
-              </a:pathLst>
-            </a:custGeom>
-            <a:ln w="6775" cap="flat">
-              <a:solidFill>
-                <a:srgbClr val="EBEBEB">
-                  <a:alpha val="100000"/>
-                </a:srgbClr>
-              </a:solidFill>
-              <a:prstDash val="solid"/>
-              <a:round/>
-            </a:ln>
-          </p:spPr>
-          <p:txBody>
-            <a:bodyPr/>
-            <a:lstStyle/>
-            <a:p>
-              <a:endParaRPr/>
-            </a:p>
-          </p:txBody>
-        </p:sp>
-        <p:sp>
-          <p:nvSpPr>
-            <p:cNvPr id="151" name="pl151"/>
-            <p:cNvSpPr/>
-            <p:nvPr/>
-          </p:nvSpPr>
-          <p:spPr>
-            <a:xfrm>
-              <a:off x="5778020" y="4206844"/>
-              <a:ext cx="2473272" cy="0"/>
-            </a:xfrm>
-            <a:custGeom>
-              <a:avLst/>
-              <a:gdLst/>
-              <a:ahLst/>
-              <a:cxnLst/>
-              <a:rect l="0" t="0" r="0" b="0"/>
-              <a:pathLst>
-                <a:path w="2473272">
-                  <a:moveTo>
-                    <a:pt x="0" y="0"/>
-                  </a:moveTo>
-                  <a:lnTo>
-                    <a:pt x="2473272" y="0"/>
-                  </a:lnTo>
-                  <a:lnTo>
-                    <a:pt x="2473272" y="0"/>
-                  </a:lnTo>
-                </a:path>
-              </a:pathLst>
-            </a:custGeom>
-            <a:ln w="6775" cap="flat">
-              <a:solidFill>
-                <a:srgbClr val="EBEBEB">
-                  <a:alpha val="100000"/>
-                </a:srgbClr>
-              </a:solidFill>
-              <a:prstDash val="solid"/>
-              <a:round/>
-            </a:ln>
-          </p:spPr>
-          <p:txBody>
-            <a:bodyPr/>
-            <a:lstStyle/>
-            <a:p>
-              <a:endParaRPr/>
-            </a:p>
-          </p:txBody>
-        </p:sp>
-        <p:sp>
-          <p:nvSpPr>
-            <p:cNvPr id="152" name="pl152"/>
-            <p:cNvSpPr/>
-            <p:nvPr/>
-          </p:nvSpPr>
-          <p:spPr>
-            <a:xfrm>
-              <a:off x="6265179" y="3851014"/>
-              <a:ext cx="0" cy="1806522"/>
-            </a:xfrm>
-            <a:custGeom>
-              <a:avLst/>
-              <a:gdLst/>
-              <a:ahLst/>
-              <a:cxnLst/>
-              <a:rect l="0" t="0" r="0" b="0"/>
-              <a:pathLst>
-                <a:path h="1806522">
-                  <a:moveTo>
-                    <a:pt x="0" y="1806522"/>
-                  </a:moveTo>
-                  <a:lnTo>
-                    <a:pt x="0" y="0"/>
-                  </a:lnTo>
-                  <a:lnTo>
-                    <a:pt x="0" y="0"/>
-                  </a:lnTo>
-                </a:path>
-              </a:pathLst>
-            </a:custGeom>
-            <a:ln w="6775" cap="flat">
-              <a:solidFill>
-                <a:srgbClr val="EBEBEB">
-                  <a:alpha val="100000"/>
-                </a:srgbClr>
-              </a:solidFill>
-              <a:prstDash val="solid"/>
-              <a:round/>
-            </a:ln>
-          </p:spPr>
-          <p:txBody>
-            <a:bodyPr/>
-            <a:lstStyle/>
-            <a:p>
-              <a:endParaRPr/>
-            </a:p>
-          </p:txBody>
-        </p:sp>
-        <p:sp>
-          <p:nvSpPr>
-            <p:cNvPr id="153" name="pl153"/>
-            <p:cNvSpPr/>
-            <p:nvPr/>
-          </p:nvSpPr>
-          <p:spPr>
-            <a:xfrm>
-              <a:off x="7014656" y="3851014"/>
-              <a:ext cx="0" cy="1806522"/>
-            </a:xfrm>
-            <a:custGeom>
-              <a:avLst/>
-              <a:gdLst/>
-              <a:ahLst/>
-              <a:cxnLst/>
-              <a:rect l="0" t="0" r="0" b="0"/>
-              <a:pathLst>
-                <a:path h="1806522">
-                  <a:moveTo>
-                    <a:pt x="0" y="1806522"/>
-                  </a:moveTo>
-                  <a:lnTo>
-                    <a:pt x="0" y="0"/>
-                  </a:lnTo>
-                  <a:lnTo>
-                    <a:pt x="0" y="0"/>
-                  </a:lnTo>
-                </a:path>
-              </a:pathLst>
-            </a:custGeom>
-            <a:ln w="6775" cap="flat">
-              <a:solidFill>
-                <a:srgbClr val="EBEBEB">
-                  <a:alpha val="100000"/>
-                </a:srgbClr>
-              </a:solidFill>
-              <a:prstDash val="solid"/>
-              <a:round/>
-            </a:ln>
-          </p:spPr>
-          <p:txBody>
-            <a:bodyPr/>
-            <a:lstStyle/>
-            <a:p>
-              <a:endParaRPr/>
-            </a:p>
-          </p:txBody>
-        </p:sp>
-        <p:sp>
-          <p:nvSpPr>
-            <p:cNvPr id="154" name="pl154"/>
-            <p:cNvSpPr/>
-            <p:nvPr/>
-          </p:nvSpPr>
-          <p:spPr>
-            <a:xfrm>
-              <a:off x="7764132" y="3851014"/>
-              <a:ext cx="0" cy="1806522"/>
-            </a:xfrm>
-            <a:custGeom>
-              <a:avLst/>
-              <a:gdLst/>
-              <a:ahLst/>
-              <a:cxnLst/>
-              <a:rect l="0" t="0" r="0" b="0"/>
-              <a:pathLst>
-                <a:path h="1806522">
-                  <a:moveTo>
-                    <a:pt x="0" y="1806522"/>
-                  </a:moveTo>
-                  <a:lnTo>
-                    <a:pt x="0" y="0"/>
-                  </a:lnTo>
-                  <a:lnTo>
-                    <a:pt x="0" y="0"/>
-                  </a:lnTo>
-                </a:path>
-              </a:pathLst>
-            </a:custGeom>
-            <a:ln w="6775" cap="flat">
-              <a:solidFill>
-                <a:srgbClr val="EBEBEB">
-                  <a:alpha val="100000"/>
-                </a:srgbClr>
-              </a:solidFill>
-              <a:prstDash val="solid"/>
-              <a:round/>
-            </a:ln>
-          </p:spPr>
-          <p:txBody>
-            <a:bodyPr/>
-            <a:lstStyle/>
-            <a:p>
-              <a:endParaRPr/>
-            </a:p>
-          </p:txBody>
-        </p:sp>
-        <p:sp>
-          <p:nvSpPr>
-            <p:cNvPr id="155" name="pl155"/>
-            <p:cNvSpPr/>
-            <p:nvPr/>
-          </p:nvSpPr>
-          <p:spPr>
-            <a:xfrm>
-              <a:off x="5778020" y="5575421"/>
-              <a:ext cx="2473272" cy="0"/>
-            </a:xfrm>
-            <a:custGeom>
-              <a:avLst/>
-              <a:gdLst/>
-              <a:ahLst/>
-              <a:cxnLst/>
-              <a:rect l="0" t="0" r="0" b="0"/>
-              <a:pathLst>
-                <a:path w="2473272">
-                  <a:moveTo>
-                    <a:pt x="0" y="0"/>
-                  </a:moveTo>
-                  <a:lnTo>
-                    <a:pt x="2473272" y="0"/>
-                  </a:lnTo>
-                  <a:lnTo>
-                    <a:pt x="2473272" y="0"/>
-                  </a:lnTo>
-                </a:path>
-              </a:pathLst>
-            </a:custGeom>
-            <a:ln w="13550" cap="flat">
-              <a:solidFill>
-                <a:srgbClr val="EBEBEB">
-                  <a:alpha val="100000"/>
-                </a:srgbClr>
-              </a:solidFill>
-              <a:prstDash val="solid"/>
-              <a:round/>
-            </a:ln>
-          </p:spPr>
-          <p:txBody>
-            <a:bodyPr/>
-            <a:lstStyle/>
-            <a:p>
-              <a:endParaRPr/>
-            </a:p>
-          </p:txBody>
-        </p:sp>
-        <p:sp>
-          <p:nvSpPr>
-            <p:cNvPr id="156" name="pl156"/>
-            <p:cNvSpPr/>
-            <p:nvPr/>
-          </p:nvSpPr>
-          <p:spPr>
-            <a:xfrm>
-              <a:off x="5778020" y="5027990"/>
-              <a:ext cx="2473272" cy="0"/>
-            </a:xfrm>
-            <a:custGeom>
-              <a:avLst/>
-              <a:gdLst/>
-              <a:ahLst/>
-              <a:cxnLst/>
-              <a:rect l="0" t="0" r="0" b="0"/>
-              <a:pathLst>
-                <a:path w="2473272">
-                  <a:moveTo>
-                    <a:pt x="0" y="0"/>
-                  </a:moveTo>
-                  <a:lnTo>
-                    <a:pt x="2473272" y="0"/>
-                  </a:lnTo>
-                  <a:lnTo>
-                    <a:pt x="2473272" y="0"/>
-                  </a:lnTo>
-                </a:path>
-              </a:pathLst>
-            </a:custGeom>
-            <a:ln w="13550" cap="flat">
-              <a:solidFill>
-                <a:srgbClr val="EBEBEB">
-                  <a:alpha val="100000"/>
-                </a:srgbClr>
-              </a:solidFill>
-              <a:prstDash val="solid"/>
-              <a:round/>
-            </a:ln>
-          </p:spPr>
-          <p:txBody>
-            <a:bodyPr/>
-            <a:lstStyle/>
-            <a:p>
-              <a:endParaRPr/>
-            </a:p>
-          </p:txBody>
-        </p:sp>
-        <p:sp>
-          <p:nvSpPr>
-            <p:cNvPr id="157" name="pl157"/>
-            <p:cNvSpPr/>
-            <p:nvPr/>
-          </p:nvSpPr>
-          <p:spPr>
-            <a:xfrm>
-              <a:off x="5778020" y="4480559"/>
-              <a:ext cx="2473272" cy="0"/>
-            </a:xfrm>
-            <a:custGeom>
-              <a:avLst/>
-              <a:gdLst/>
-              <a:ahLst/>
-              <a:cxnLst/>
-              <a:rect l="0" t="0" r="0" b="0"/>
-              <a:pathLst>
-                <a:path w="2473272">
-                  <a:moveTo>
-                    <a:pt x="0" y="0"/>
-                  </a:moveTo>
-                  <a:lnTo>
-                    <a:pt x="2473272" y="0"/>
-                  </a:lnTo>
-                  <a:lnTo>
-                    <a:pt x="2473272" y="0"/>
-                  </a:lnTo>
-                </a:path>
-              </a:pathLst>
-            </a:custGeom>
-            <a:ln w="13550" cap="flat">
-              <a:solidFill>
-                <a:srgbClr val="EBEBEB">
-                  <a:alpha val="100000"/>
-                </a:srgbClr>
-              </a:solidFill>
-              <a:prstDash val="solid"/>
-              <a:round/>
-            </a:ln>
-          </p:spPr>
-          <p:txBody>
-            <a:bodyPr/>
-            <a:lstStyle/>
-            <a:p>
-              <a:endParaRPr/>
-            </a:p>
-          </p:txBody>
-        </p:sp>
-        <p:sp>
-          <p:nvSpPr>
-            <p:cNvPr id="158" name="pl158"/>
-            <p:cNvSpPr/>
-            <p:nvPr/>
-          </p:nvSpPr>
-          <p:spPr>
-            <a:xfrm>
-              <a:off x="5778020" y="3933128"/>
-              <a:ext cx="2473272" cy="0"/>
-            </a:xfrm>
-            <a:custGeom>
-              <a:avLst/>
-              <a:gdLst/>
-              <a:ahLst/>
-              <a:cxnLst/>
-              <a:rect l="0" t="0" r="0" b="0"/>
-              <a:pathLst>
-                <a:path w="2473272">
-                  <a:moveTo>
-                    <a:pt x="0" y="0"/>
-                  </a:moveTo>
-                  <a:lnTo>
-                    <a:pt x="2473272" y="0"/>
-                  </a:lnTo>
-                  <a:lnTo>
-                    <a:pt x="2473272" y="0"/>
-                  </a:lnTo>
-                </a:path>
-              </a:pathLst>
-            </a:custGeom>
-            <a:ln w="13550" cap="flat">
-              <a:solidFill>
-                <a:srgbClr val="EBEBEB">
-                  <a:alpha val="100000"/>
-                </a:srgbClr>
-              </a:solidFill>
-              <a:prstDash val="solid"/>
-              <a:round/>
-            </a:ln>
-          </p:spPr>
-          <p:txBody>
-            <a:bodyPr/>
-            <a:lstStyle/>
-            <a:p>
-              <a:endParaRPr/>
-            </a:p>
-          </p:txBody>
-        </p:sp>
-        <p:sp>
-          <p:nvSpPr>
-            <p:cNvPr id="159" name="pl159"/>
-            <p:cNvSpPr/>
-            <p:nvPr/>
-          </p:nvSpPr>
-          <p:spPr>
-            <a:xfrm>
-              <a:off x="5890441" y="3851014"/>
-              <a:ext cx="0" cy="1806522"/>
-            </a:xfrm>
-            <a:custGeom>
-              <a:avLst/>
-              <a:gdLst/>
-              <a:ahLst/>
-              <a:cxnLst/>
-              <a:rect l="0" t="0" r="0" b="0"/>
-              <a:pathLst>
-                <a:path h="1806522">
-                  <a:moveTo>
-                    <a:pt x="0" y="1806522"/>
-                  </a:moveTo>
-                  <a:lnTo>
-                    <a:pt x="0" y="0"/>
-                  </a:lnTo>
-                  <a:lnTo>
-                    <a:pt x="0" y="0"/>
-                  </a:lnTo>
-                </a:path>
-              </a:pathLst>
-            </a:custGeom>
-            <a:ln w="13550" cap="flat">
-              <a:solidFill>
-                <a:srgbClr val="EBEBEB">
-                  <a:alpha val="100000"/>
-                </a:srgbClr>
-              </a:solidFill>
-              <a:prstDash val="solid"/>
-              <a:round/>
-            </a:ln>
-          </p:spPr>
-          <p:txBody>
-            <a:bodyPr/>
-            <a:lstStyle/>
-            <a:p>
-              <a:endParaRPr/>
-            </a:p>
-          </p:txBody>
-        </p:sp>
-        <p:sp>
-          <p:nvSpPr>
-            <p:cNvPr id="160" name="pl160"/>
-            <p:cNvSpPr/>
-            <p:nvPr/>
-          </p:nvSpPr>
-          <p:spPr>
-            <a:xfrm>
-              <a:off x="6639918" y="3851014"/>
-              <a:ext cx="0" cy="1806522"/>
-            </a:xfrm>
-            <a:custGeom>
-              <a:avLst/>
-              <a:gdLst/>
-              <a:ahLst/>
-              <a:cxnLst/>
-              <a:rect l="0" t="0" r="0" b="0"/>
-              <a:pathLst>
-                <a:path h="1806522">
-                  <a:moveTo>
-                    <a:pt x="0" y="1806522"/>
-                  </a:moveTo>
-                  <a:lnTo>
-                    <a:pt x="0" y="0"/>
-                  </a:lnTo>
-                  <a:lnTo>
-                    <a:pt x="0" y="0"/>
-                  </a:lnTo>
-                </a:path>
-              </a:pathLst>
-            </a:custGeom>
-            <a:ln w="13550" cap="flat">
-              <a:solidFill>
-                <a:srgbClr val="EBEBEB">
-                  <a:alpha val="100000"/>
-                </a:srgbClr>
-              </a:solidFill>
-              <a:prstDash val="solid"/>
-              <a:round/>
-            </a:ln>
-          </p:spPr>
-          <p:txBody>
-            <a:bodyPr/>
-            <a:lstStyle/>
-            <a:p>
-              <a:endParaRPr/>
-            </a:p>
-          </p:txBody>
-        </p:sp>
-        <p:sp>
-          <p:nvSpPr>
-            <p:cNvPr id="161" name="pl161"/>
-            <p:cNvSpPr/>
-            <p:nvPr/>
-          </p:nvSpPr>
-          <p:spPr>
-            <a:xfrm>
-              <a:off x="7389394" y="3851014"/>
-              <a:ext cx="0" cy="1806522"/>
-            </a:xfrm>
-            <a:custGeom>
-              <a:avLst/>
-              <a:gdLst/>
-              <a:ahLst/>
-              <a:cxnLst/>
-              <a:rect l="0" t="0" r="0" b="0"/>
-              <a:pathLst>
-                <a:path h="1806522">
-                  <a:moveTo>
-                    <a:pt x="0" y="1806522"/>
-                  </a:moveTo>
-                  <a:lnTo>
-                    <a:pt x="0" y="0"/>
-                  </a:lnTo>
-                  <a:lnTo>
-                    <a:pt x="0" y="0"/>
-                  </a:lnTo>
-                </a:path>
-              </a:pathLst>
-            </a:custGeom>
-            <a:ln w="13550" cap="flat">
-              <a:solidFill>
-                <a:srgbClr val="EBEBEB">
-                  <a:alpha val="100000"/>
-                </a:srgbClr>
-              </a:solidFill>
-              <a:prstDash val="solid"/>
-              <a:round/>
-            </a:ln>
-          </p:spPr>
-          <p:txBody>
-            <a:bodyPr/>
-            <a:lstStyle/>
-            <a:p>
-              <a:endParaRPr/>
-            </a:p>
-          </p:txBody>
-        </p:sp>
-        <p:sp>
-          <p:nvSpPr>
-            <p:cNvPr id="162" name="pl162"/>
-            <p:cNvSpPr/>
-            <p:nvPr/>
-          </p:nvSpPr>
-          <p:spPr>
-            <a:xfrm>
-              <a:off x="8138870" y="3851014"/>
-              <a:ext cx="0" cy="1806522"/>
-            </a:xfrm>
-            <a:custGeom>
-              <a:avLst/>
-              <a:gdLst/>
-              <a:ahLst/>
-              <a:cxnLst/>
-              <a:rect l="0" t="0" r="0" b="0"/>
-              <a:pathLst>
-                <a:path h="1806522">
-                  <a:moveTo>
-                    <a:pt x="0" y="1806522"/>
-                  </a:moveTo>
-                  <a:lnTo>
-                    <a:pt x="0" y="0"/>
-                  </a:lnTo>
-                  <a:lnTo>
-                    <a:pt x="0" y="0"/>
-                  </a:lnTo>
-                </a:path>
-              </a:pathLst>
-            </a:custGeom>
-            <a:ln w="13550" cap="flat">
-              <a:solidFill>
-                <a:srgbClr val="EBEBEB">
-                  <a:alpha val="100000"/>
-                </a:srgbClr>
-              </a:solidFill>
-              <a:prstDash val="solid"/>
-              <a:round/>
-            </a:ln>
-          </p:spPr>
-          <p:txBody>
-            <a:bodyPr/>
-            <a:lstStyle/>
-            <a:p>
-              <a:endParaRPr/>
-            </a:p>
-          </p:txBody>
-        </p:sp>
-        <p:sp>
-          <p:nvSpPr>
-            <p:cNvPr id="163" name="pl163"/>
-            <p:cNvSpPr/>
-            <p:nvPr/>
-          </p:nvSpPr>
-          <p:spPr>
-            <a:xfrm>
-              <a:off x="5778020" y="3851014"/>
-              <a:ext cx="2473272" cy="1806522"/>
-            </a:xfrm>
-            <a:custGeom>
-              <a:avLst/>
-              <a:gdLst/>
-              <a:ahLst/>
-              <a:cxnLst/>
-              <a:rect l="0" t="0" r="0" b="0"/>
-              <a:pathLst>
-                <a:path w="2473272" h="1806522">
-                  <a:moveTo>
-                    <a:pt x="0" y="1806522"/>
-                  </a:moveTo>
-                  <a:lnTo>
-                    <a:pt x="2473272" y="0"/>
-                  </a:lnTo>
-                  <a:lnTo>
-                    <a:pt x="2473272" y="0"/>
-                  </a:lnTo>
-                </a:path>
-              </a:pathLst>
-            </a:custGeom>
-            <a:ln w="13550" cap="flat">
-              <a:solidFill>
-                <a:srgbClr val="000000">
-                  <a:alpha val="100000"/>
-                </a:srgbClr>
-              </a:solidFill>
-              <a:prstDash val="dash"/>
-              <a:round/>
-            </a:ln>
-          </p:spPr>
-          <p:txBody>
-            <a:bodyPr/>
-            <a:lstStyle/>
-            <a:p>
-              <a:endParaRPr/>
-            </a:p>
-          </p:txBody>
-        </p:sp>
-        <p:sp>
-          <p:nvSpPr>
-            <p:cNvPr id="164" name="pg164"/>
-            <p:cNvSpPr/>
-            <p:nvPr/>
-          </p:nvSpPr>
-          <p:spPr>
-            <a:xfrm>
-              <a:off x="6831171" y="5140924"/>
-              <a:ext cx="1298964" cy="355830"/>
-            </a:xfrm>
-            <a:custGeom>
-              <a:avLst/>
-              <a:gdLst/>
-              <a:ahLst/>
-              <a:cxnLst/>
-              <a:rect l="0" t="0" r="0" b="0"/>
-              <a:pathLst>
-                <a:path w="1298964" h="355830">
-                  <a:moveTo>
-                    <a:pt x="1298964" y="355830"/>
-                  </a:moveTo>
-                  <a:lnTo>
-                    <a:pt x="1298964" y="25146"/>
-                  </a:lnTo>
-                  <a:lnTo>
-                    <a:pt x="1298638" y="21112"/>
-                  </a:lnTo>
-                  <a:lnTo>
-                    <a:pt x="1297670" y="17183"/>
-                  </a:lnTo>
-                  <a:lnTo>
-                    <a:pt x="1296084" y="13460"/>
-                  </a:lnTo>
-                  <a:lnTo>
-                    <a:pt x="1293921" y="10039"/>
-                  </a:lnTo>
-                  <a:lnTo>
-                    <a:pt x="1291237" y="7010"/>
-                  </a:lnTo>
-                  <a:lnTo>
-                    <a:pt x="1288102" y="4451"/>
-                  </a:lnTo>
-                  <a:lnTo>
-                    <a:pt x="1284598" y="2427"/>
-                  </a:lnTo>
-                  <a:lnTo>
-                    <a:pt x="1280814" y="992"/>
-                  </a:lnTo>
-                  <a:lnTo>
-                    <a:pt x="1276849" y="183"/>
-                  </a:lnTo>
-                  <a:lnTo>
-                    <a:pt x="1273818" y="0"/>
-                  </a:lnTo>
-                  <a:lnTo>
-                    <a:pt x="25146" y="0"/>
-                  </a:lnTo>
-                  <a:lnTo>
-                    <a:pt x="28177" y="183"/>
-                  </a:lnTo>
-                  <a:lnTo>
-                    <a:pt x="24133" y="20"/>
-                  </a:lnTo>
-                  <a:lnTo>
-                    <a:pt x="20116" y="508"/>
-                  </a:lnTo>
-                  <a:lnTo>
-                    <a:pt x="16229" y="1634"/>
-                  </a:lnTo>
-                  <a:lnTo>
-                    <a:pt x="12573" y="3368"/>
-                  </a:lnTo>
-                  <a:lnTo>
-                    <a:pt x="9242" y="5667"/>
-                  </a:lnTo>
-                  <a:lnTo>
-                    <a:pt x="6323" y="8471"/>
-                  </a:lnTo>
-                  <a:lnTo>
-                    <a:pt x="3892" y="11706"/>
-                  </a:lnTo>
-                  <a:lnTo>
-                    <a:pt x="2012" y="15289"/>
-                  </a:lnTo>
-                  <a:lnTo>
-                    <a:pt x="730" y="19128"/>
-                  </a:lnTo>
-                  <a:lnTo>
-                    <a:pt x="81" y="23122"/>
-                  </a:lnTo>
-                  <a:lnTo>
-                    <a:pt x="0" y="25146"/>
-                  </a:lnTo>
-                  <a:lnTo>
-                    <a:pt x="0" y="355830"/>
-                  </a:lnTo>
-                  <a:close/>
-                </a:path>
-              </a:pathLst>
-            </a:custGeom>
-            <a:solidFill>
-              <a:srgbClr val="FFD700">
-                <a:alpha val="100000"/>
-              </a:srgbClr>
-            </a:solidFill>
-            <a:ln w="6775" cap="rnd">
-              <a:solidFill>
-                <a:srgbClr val="000000">
-                  <a:alpha val="100000"/>
-                </a:srgbClr>
-              </a:solidFill>
-              <a:prstDash val="solid"/>
-              <a:round/>
-            </a:ln>
-          </p:spPr>
-          <p:txBody>
-            <a:bodyPr/>
-            <a:lstStyle/>
-            <a:p>
-              <a:endParaRPr/>
-            </a:p>
-          </p:txBody>
-        </p:sp>
-        <p:sp>
-          <p:nvSpPr>
-            <p:cNvPr id="165" name="tx165"/>
-            <p:cNvSpPr/>
-            <p:nvPr/>
-          </p:nvSpPr>
-          <p:spPr>
-            <a:xfrm>
-              <a:off x="6873081" y="5153025"/>
-              <a:ext cx="1114257" cy="129809"/>
-            </a:xfrm>
-            <a:prstGeom prst="rect">
-              <a:avLst/>
-            </a:prstGeom>
-            <a:noFill/>
-          </p:spPr>
-          <p:txBody>
-            <a:bodyPr wrap="none" lIns="0" tIns="0" rIns="0" bIns="0" anchor="ctr" anchorCtr="1"/>
-            <a:lstStyle/>
-            <a:p>
-              <a:pPr marL="0" marR="0" indent="0" algn="l">
-                <a:lnSpc>
-                  <a:spcPts val="1100"/>
-                </a:lnSpc>
-                <a:spcBef>
-                  <a:spcPts val="0"/>
-                </a:spcBef>
-                <a:spcAft>
-                  <a:spcPts val="0"/>
-                </a:spcAft>
-              </a:pPr>
-              <a:r>
-                <a:rPr sz="1100" dirty="0">
+                <a:rPr sz="1100">
                   <a:solidFill>
                     <a:srgbClr val="000000">
                       <a:alpha val="100000"/>
@@ -11898,7 +11159,7 @@
           </p:nvSpPr>
           <p:spPr>
             <a:xfrm>
-              <a:off x="6873081" y="5352897"/>
+              <a:off x="6681828" y="5513679"/>
               <a:ext cx="1215144" cy="131105"/>
             </a:xfrm>
             <a:prstGeom prst="rect">
@@ -11907,10 +11168,10 @@
             <a:noFill/>
           </p:spPr>
           <p:txBody>
-            <a:bodyPr wrap="none" lIns="0" tIns="0" rIns="0" bIns="0" anchor="ctr" anchorCtr="1"/>
+            <a:bodyPr lIns="0" rIns="0" tIns="0" bIns="0" anchorCtr="1" anchor="ctr" wrap="none"/>
             <a:lstStyle/>
             <a:p>
-              <a:pPr marL="0" marR="0" indent="0" algn="l">
+              <a:pPr algn="l" marL="0" marR="0" indent="0">
                 <a:lnSpc>
                   <a:spcPts val="1100"/>
                 </a:lnSpc>
@@ -11968,9 +11229,7 @@
           <p:txBody>
             <a:bodyPr/>
             <a:lstStyle/>
-            <a:p>
-              <a:endParaRPr/>
-            </a:p>
+            <a:p/>
           </p:txBody>
         </p:sp>
         <p:sp>
@@ -12005,9 +11264,7 @@
           <p:txBody>
             <a:bodyPr/>
             <a:lstStyle/>
-            <a:p>
-              <a:endParaRPr/>
-            </a:p>
+            <a:p/>
           </p:txBody>
         </p:sp>
         <p:sp>
@@ -12042,9 +11299,7 @@
           <p:txBody>
             <a:bodyPr/>
             <a:lstStyle/>
-            <a:p>
-              <a:endParaRPr/>
-            </a:p>
+            <a:p/>
           </p:txBody>
         </p:sp>
         <p:sp>
@@ -12079,9 +11334,7 @@
           <p:txBody>
             <a:bodyPr/>
             <a:lstStyle/>
-            <a:p>
-              <a:endParaRPr/>
-            </a:p>
+            <a:p/>
           </p:txBody>
         </p:sp>
         <p:sp>
@@ -12116,9 +11369,7 @@
           <p:txBody>
             <a:bodyPr/>
             <a:lstStyle/>
-            <a:p>
-              <a:endParaRPr/>
-            </a:p>
+            <a:p/>
           </p:txBody>
         </p:sp>
         <p:sp>
@@ -12153,9 +11404,7 @@
           <p:txBody>
             <a:bodyPr/>
             <a:lstStyle/>
-            <a:p>
-              <a:endParaRPr/>
-            </a:p>
+            <a:p/>
           </p:txBody>
         </p:sp>
         <p:sp>
@@ -12190,9 +11439,7 @@
           <p:txBody>
             <a:bodyPr/>
             <a:lstStyle/>
-            <a:p>
-              <a:endParaRPr/>
-            </a:p>
+            <a:p/>
           </p:txBody>
         </p:sp>
         <p:sp>
@@ -12227,9 +11474,7 @@
           <p:txBody>
             <a:bodyPr/>
             <a:lstStyle/>
-            <a:p>
-              <a:endParaRPr/>
-            </a:p>
+            <a:p/>
           </p:txBody>
         </p:sp>
         <p:sp>
@@ -12264,9 +11509,7 @@
           <p:txBody>
             <a:bodyPr/>
             <a:lstStyle/>
-            <a:p>
-              <a:endParaRPr/>
-            </a:p>
+            <a:p/>
           </p:txBody>
         </p:sp>
         <p:sp>
@@ -12301,9 +11544,7 @@
           <p:txBody>
             <a:bodyPr/>
             <a:lstStyle/>
-            <a:p>
-              <a:endParaRPr/>
-            </a:p>
+            <a:p/>
           </p:txBody>
         </p:sp>
         <p:sp>
@@ -12333,9 +11574,7 @@
           <p:txBody>
             <a:bodyPr/>
             <a:lstStyle/>
-            <a:p>
-              <a:endParaRPr/>
-            </a:p>
+            <a:p/>
           </p:txBody>
         </p:sp>
         <p:sp>
@@ -12355,10 +11594,10 @@
             <a:noFill/>
           </p:spPr>
           <p:txBody>
-            <a:bodyPr wrap="none" lIns="0" tIns="0" rIns="0" bIns="0" anchor="ctr" anchorCtr="1"/>
+            <a:bodyPr lIns="0" rIns="0" tIns="0" bIns="0" anchorCtr="1" anchor="ctr" wrap="none"/>
             <a:lstStyle/>
             <a:p>
-              <a:pPr marL="0" marR="0" indent="0" algn="l">
+              <a:pPr algn="l" marL="0" marR="0" indent="0">
                 <a:lnSpc>
                   <a:spcPts val="880"/>
                 </a:lnSpc>
@@ -12401,10 +11640,10 @@
             <a:noFill/>
           </p:spPr>
           <p:txBody>
-            <a:bodyPr wrap="none" lIns="0" tIns="0" rIns="0" bIns="0" anchor="ctr" anchorCtr="1"/>
+            <a:bodyPr lIns="0" rIns="0" tIns="0" bIns="0" anchorCtr="1" anchor="ctr" wrap="none"/>
             <a:lstStyle/>
             <a:p>
-              <a:pPr marL="0" marR="0" indent="0" algn="l">
+              <a:pPr algn="l" marL="0" marR="0" indent="0">
                 <a:lnSpc>
                   <a:spcPts val="880"/>
                 </a:lnSpc>
@@ -12447,10 +11686,10 @@
             <a:noFill/>
           </p:spPr>
           <p:txBody>
-            <a:bodyPr wrap="none" lIns="0" tIns="0" rIns="0" bIns="0" anchor="ctr" anchorCtr="1"/>
+            <a:bodyPr lIns="0" rIns="0" tIns="0" bIns="0" anchorCtr="1" anchor="ctr" wrap="none"/>
             <a:lstStyle/>
             <a:p>
-              <a:pPr marL="0" marR="0" indent="0" algn="l">
+              <a:pPr algn="l" marL="0" marR="0" indent="0">
                 <a:lnSpc>
                   <a:spcPts val="880"/>
                 </a:lnSpc>
@@ -12493,10 +11732,10 @@
             <a:noFill/>
           </p:spPr>
           <p:txBody>
-            <a:bodyPr wrap="none" lIns="0" tIns="0" rIns="0" bIns="0" anchor="ctr" anchorCtr="1"/>
+            <a:bodyPr lIns="0" rIns="0" tIns="0" bIns="0" anchorCtr="1" anchor="ctr" wrap="none"/>
             <a:lstStyle/>
             <a:p>
-              <a:pPr marL="0" marR="0" indent="0" algn="l">
+              <a:pPr algn="l" marL="0" marR="0" indent="0">
                 <a:lnSpc>
                   <a:spcPts val="880"/>
                 </a:lnSpc>
@@ -12535,12 +11774,8 @@
             </a:xfrm>
             <a:custGeom>
               <a:avLst/>
-              <a:gdLst/>
-              <a:ahLst/>
-              <a:cxnLst/>
-              <a:rect l="0" t="0" r="0" b="0"/>
               <a:pathLst>
-                <a:path w="34794">
+                <a:path w="34794" h="0">
                   <a:moveTo>
                     <a:pt x="0" y="0"/>
                   </a:moveTo>
@@ -12563,9 +11798,7 @@
           <p:txBody>
             <a:bodyPr/>
             <a:lstStyle/>
-            <a:p>
-              <a:endParaRPr/>
-            </a:p>
+            <a:p/>
           </p:txBody>
         </p:sp>
         <p:sp>
@@ -12581,12 +11814,8 @@
             </a:xfrm>
             <a:custGeom>
               <a:avLst/>
-              <a:gdLst/>
-              <a:ahLst/>
-              <a:cxnLst/>
-              <a:rect l="0" t="0" r="0" b="0"/>
               <a:pathLst>
-                <a:path w="34794">
+                <a:path w="34794" h="0">
                   <a:moveTo>
                     <a:pt x="0" y="0"/>
                   </a:moveTo>
@@ -12609,9 +11838,7 @@
           <p:txBody>
             <a:bodyPr/>
             <a:lstStyle/>
-            <a:p>
-              <a:endParaRPr/>
-            </a:p>
+            <a:p/>
           </p:txBody>
         </p:sp>
         <p:sp>
@@ -12627,12 +11854,8 @@
             </a:xfrm>
             <a:custGeom>
               <a:avLst/>
-              <a:gdLst/>
-              <a:ahLst/>
-              <a:cxnLst/>
-              <a:rect l="0" t="0" r="0" b="0"/>
               <a:pathLst>
-                <a:path w="34794">
+                <a:path w="34794" h="0">
                   <a:moveTo>
                     <a:pt x="0" y="0"/>
                   </a:moveTo>
@@ -12655,9 +11878,7 @@
           <p:txBody>
             <a:bodyPr/>
             <a:lstStyle/>
-            <a:p>
-              <a:endParaRPr/>
-            </a:p>
+            <a:p/>
           </p:txBody>
         </p:sp>
         <p:sp>
@@ -12673,12 +11894,8 @@
             </a:xfrm>
             <a:custGeom>
               <a:avLst/>
-              <a:gdLst/>
-              <a:ahLst/>
-              <a:cxnLst/>
-              <a:rect l="0" t="0" r="0" b="0"/>
               <a:pathLst>
-                <a:path w="34794">
+                <a:path w="34794" h="0">
                   <a:moveTo>
                     <a:pt x="0" y="0"/>
                   </a:moveTo>
@@ -12701,9 +11918,7 @@
           <p:txBody>
             <a:bodyPr/>
             <a:lstStyle/>
-            <a:p>
-              <a:endParaRPr/>
-            </a:p>
+            <a:p/>
           </p:txBody>
         </p:sp>
         <p:sp>
@@ -12719,12 +11934,8 @@
             </a:xfrm>
             <a:custGeom>
               <a:avLst/>
-              <a:gdLst/>
-              <a:ahLst/>
-              <a:cxnLst/>
-              <a:rect l="0" t="0" r="0" b="0"/>
               <a:pathLst>
-                <a:path h="34794">
+                <a:path w="0" h="34794">
                   <a:moveTo>
                     <a:pt x="0" y="34794"/>
                   </a:moveTo>
@@ -12747,9 +11958,7 @@
           <p:txBody>
             <a:bodyPr/>
             <a:lstStyle/>
-            <a:p>
-              <a:endParaRPr/>
-            </a:p>
+            <a:p/>
           </p:txBody>
         </p:sp>
         <p:sp>
@@ -12765,12 +11974,8 @@
             </a:xfrm>
             <a:custGeom>
               <a:avLst/>
-              <a:gdLst/>
-              <a:ahLst/>
-              <a:cxnLst/>
-              <a:rect l="0" t="0" r="0" b="0"/>
               <a:pathLst>
-                <a:path h="34794">
+                <a:path w="0" h="34794">
                   <a:moveTo>
                     <a:pt x="0" y="34794"/>
                   </a:moveTo>
@@ -12793,9 +11998,7 @@
           <p:txBody>
             <a:bodyPr/>
             <a:lstStyle/>
-            <a:p>
-              <a:endParaRPr/>
-            </a:p>
+            <a:p/>
           </p:txBody>
         </p:sp>
         <p:sp>
@@ -12811,12 +12014,8 @@
             </a:xfrm>
             <a:custGeom>
               <a:avLst/>
-              <a:gdLst/>
-              <a:ahLst/>
-              <a:cxnLst/>
-              <a:rect l="0" t="0" r="0" b="0"/>
               <a:pathLst>
-                <a:path h="34794">
+                <a:path w="0" h="34794">
                   <a:moveTo>
                     <a:pt x="0" y="34794"/>
                   </a:moveTo>
@@ -12839,9 +12038,7 @@
           <p:txBody>
             <a:bodyPr/>
             <a:lstStyle/>
-            <a:p>
-              <a:endParaRPr/>
-            </a:p>
+            <a:p/>
           </p:txBody>
         </p:sp>
         <p:sp>
@@ -12857,12 +12054,8 @@
             </a:xfrm>
             <a:custGeom>
               <a:avLst/>
-              <a:gdLst/>
-              <a:ahLst/>
-              <a:cxnLst/>
-              <a:rect l="0" t="0" r="0" b="0"/>
               <a:pathLst>
-                <a:path h="34794">
+                <a:path w="0" h="34794">
                   <a:moveTo>
                     <a:pt x="0" y="34794"/>
                   </a:moveTo>
@@ -12885,9 +12078,7 @@
           <p:txBody>
             <a:bodyPr/>
             <a:lstStyle/>
-            <a:p>
-              <a:endParaRPr/>
-            </a:p>
+            <a:p/>
           </p:txBody>
         </p:sp>
         <p:sp>
@@ -12907,10 +12098,10 @@
             <a:noFill/>
           </p:spPr>
           <p:txBody>
-            <a:bodyPr wrap="none" lIns="0" tIns="0" rIns="0" bIns="0" anchor="ctr" anchorCtr="1"/>
+            <a:bodyPr lIns="0" rIns="0" tIns="0" bIns="0" anchorCtr="1" anchor="ctr" wrap="none"/>
             <a:lstStyle/>
             <a:p>
-              <a:pPr marL="0" marR="0" indent="0" algn="l">
+              <a:pPr algn="l" marL="0" marR="0" indent="0">
                 <a:lnSpc>
                   <a:spcPts val="880"/>
                 </a:lnSpc>
@@ -12953,10 +12144,10 @@
             <a:noFill/>
           </p:spPr>
           <p:txBody>
-            <a:bodyPr wrap="none" lIns="0" tIns="0" rIns="0" bIns="0" anchor="ctr" anchorCtr="1"/>
+            <a:bodyPr lIns="0" rIns="0" tIns="0" bIns="0" anchorCtr="1" anchor="ctr" wrap="none"/>
             <a:lstStyle/>
             <a:p>
-              <a:pPr marL="0" marR="0" indent="0" algn="l">
+              <a:pPr algn="l" marL="0" marR="0" indent="0">
                 <a:lnSpc>
                   <a:spcPts val="880"/>
                 </a:lnSpc>
@@ -12999,10 +12190,10 @@
             <a:noFill/>
           </p:spPr>
           <p:txBody>
-            <a:bodyPr wrap="none" lIns="0" tIns="0" rIns="0" bIns="0" anchor="ctr" anchorCtr="1"/>
+            <a:bodyPr lIns="0" rIns="0" tIns="0" bIns="0" anchorCtr="1" anchor="ctr" wrap="none"/>
             <a:lstStyle/>
             <a:p>
-              <a:pPr marL="0" marR="0" indent="0" algn="l">
+              <a:pPr algn="l" marL="0" marR="0" indent="0">
                 <a:lnSpc>
                   <a:spcPts val="880"/>
                 </a:lnSpc>
@@ -13045,10 +12236,10 @@
             <a:noFill/>
           </p:spPr>
           <p:txBody>
-            <a:bodyPr wrap="none" lIns="0" tIns="0" rIns="0" bIns="0" anchor="ctr" anchorCtr="1"/>
+            <a:bodyPr lIns="0" rIns="0" tIns="0" bIns="0" anchorCtr="1" anchor="ctr" wrap="none"/>
             <a:lstStyle/>
             <a:p>
-              <a:pPr marL="0" marR="0" indent="0" algn="l">
+              <a:pPr algn="l" marL="0" marR="0" indent="0">
                 <a:lnSpc>
                   <a:spcPts val="880"/>
                 </a:lnSpc>
@@ -13091,10 +12282,10 @@
             <a:noFill/>
           </p:spPr>
           <p:txBody>
-            <a:bodyPr wrap="none" lIns="0" tIns="0" rIns="0" bIns="0" anchor="ctr" anchorCtr="1"/>
+            <a:bodyPr lIns="0" rIns="0" tIns="0" bIns="0" anchorCtr="1" anchor="ctr" wrap="none"/>
             <a:lstStyle/>
             <a:p>
-              <a:pPr marL="0" marR="0" indent="0" algn="l">
+              <a:pPr algn="l" marL="0" marR="0" indent="0">
                 <a:lnSpc>
                   <a:spcPts val="1100"/>
                 </a:lnSpc>
@@ -13137,10 +12328,10 @@
             <a:noFill/>
           </p:spPr>
           <p:txBody>
-            <a:bodyPr wrap="none" lIns="0" tIns="0" rIns="0" bIns="0" anchor="ctr" anchorCtr="1"/>
+            <a:bodyPr lIns="0" rIns="0" tIns="0" bIns="0" anchorCtr="1" anchor="ctr" wrap="none"/>
             <a:lstStyle/>
             <a:p>
-              <a:pPr marL="0" marR="0" indent="0" algn="l">
+              <a:pPr algn="l" marL="0" marR="0" indent="0">
                 <a:lnSpc>
                   <a:spcPts val="1100"/>
                 </a:lnSpc>
